--- a/docs/test/stress/e2e-outputs/income_overflow_pr11.pptx
+++ b/docs/test/stress/e2e-outputs/income_overflow_pr11.pptx
@@ -2315,7 +2315,7 @@
         <p:spPr>
           <a:xfrm>
             <a:off x="502920" y="3090672"/>
-            <a:ext cx="7315200" cy="365760"/>
+            <a:ext cx="7315200" cy="329184"/>
           </a:xfrm>
           <a:prstGeom prst="rect">
             <a:avLst/>
@@ -2353,7 +2353,7 @@
         </p:nvSpPr>
         <p:spPr>
           <a:xfrm>
-            <a:off x="502920" y="3685032"/>
+            <a:off x="502920" y="3639312"/>
             <a:ext cx="1097280" cy="292608"/>
           </a:xfrm>
           <a:prstGeom prst="roundRect">
@@ -2375,7 +2375,7 @@
         </p:nvSpPr>
         <p:spPr>
           <a:xfrm>
-            <a:off x="502920" y="3685032"/>
+            <a:off x="502920" y="3639312"/>
             <a:ext cx="1097280" cy="292608"/>
           </a:xfrm>
           <a:prstGeom prst="rect">
@@ -2414,7 +2414,7 @@
         </p:nvSpPr>
         <p:spPr>
           <a:xfrm>
-            <a:off x="1691640" y="3685032"/>
+            <a:off x="1691640" y="3639312"/>
             <a:ext cx="1005840" cy="292608"/>
           </a:xfrm>
           <a:prstGeom prst="roundRect">
@@ -2436,7 +2436,7 @@
         </p:nvSpPr>
         <p:spPr>
           <a:xfrm>
-            <a:off x="1691640" y="3685032"/>
+            <a:off x="1691640" y="3639312"/>
             <a:ext cx="1005840" cy="292608"/>
           </a:xfrm>
           <a:prstGeom prst="rect">
@@ -2475,7 +2475,7 @@
         </p:nvSpPr>
         <p:spPr>
           <a:xfrm>
-            <a:off x="502920" y="4187952"/>
+            <a:off x="502920" y="4078224"/>
             <a:ext cx="6858000" cy="1051560"/>
           </a:xfrm>
           <a:prstGeom prst="roundRect">
@@ -2502,7 +2502,7 @@
         </p:nvSpPr>
         <p:spPr>
           <a:xfrm>
-            <a:off x="758952" y="4297680"/>
+            <a:off x="758952" y="4187952"/>
             <a:ext cx="6345936" cy="832104"/>
           </a:xfrm>
           <a:prstGeom prst="rect">
@@ -2594,7 +2594,7 @@
                 <a:ea typeface="Pretendard" pitchFamily="34" charset="-122"/>
                 <a:cs typeface="Pretendard" pitchFamily="34" charset="-120"/>
               </a:rPr>
-              <a:t>크리딜   |   </a:t>
+              <a:t>크리딜</a:t>
             </a:r>
             <a:endParaRPr lang="en-US" sz="800" dirty="0"/>
           </a:p>
@@ -2949,7 +2949,7 @@
                 <a:ea typeface="Pretendard" pitchFamily="34" charset="-122"/>
                 <a:cs typeface="Pretendard" pitchFamily="34" charset="-120"/>
               </a:rPr>
-              <a:t>크리딜   |   </a:t>
+              <a:t>크리딜</a:t>
             </a:r>
             <a:endParaRPr lang="en-US" sz="800" dirty="0"/>
           </a:p>
@@ -3606,7 +3606,7 @@
                 <a:ea typeface="Pretendard" pitchFamily="34" charset="-122"/>
                 <a:cs typeface="Pretendard" pitchFamily="34" charset="-120"/>
               </a:rPr>
-              <a:t>크리딜   |   </a:t>
+              <a:t>크리딜</a:t>
             </a:r>
             <a:endParaRPr lang="en-US" sz="800" dirty="0"/>
           </a:p>
@@ -3868,7 +3868,7 @@
         <p:spPr>
           <a:xfrm>
             <a:off x="502920" y="1719072"/>
-            <a:ext cx="5368900" cy="868680"/>
+            <a:ext cx="5368900" cy="749808"/>
           </a:xfrm>
           <a:prstGeom prst="rect">
             <a:avLst/>
@@ -3892,8 +3892,8 @@
         </p:nvSpPr>
         <p:spPr>
           <a:xfrm>
-            <a:off x="640080" y="1883664"/>
-            <a:ext cx="320040" cy="320040"/>
+            <a:off x="640080" y="1947672"/>
+            <a:ext cx="292608" cy="292608"/>
           </a:xfrm>
           <a:prstGeom prst="rect">
             <a:avLst/>
@@ -3912,8 +3912,8 @@
         </p:nvSpPr>
         <p:spPr>
           <a:xfrm>
-            <a:off x="640080" y="1883664"/>
-            <a:ext cx="320040" cy="320040"/>
+            <a:off x="640080" y="1947672"/>
+            <a:ext cx="292608" cy="292608"/>
           </a:xfrm>
           <a:prstGeom prst="rect">
             <a:avLst/>
@@ -3929,7 +3929,7 @@
               <a:buNone/>
             </a:pPr>
             <a:r>
-              <a:rPr lang="en-US" sz="1100" b="1" dirty="0">
+              <a:rPr lang="en-US" sz="1050" b="1" dirty="0">
                 <a:solidFill>
                   <a:srgbClr val="FFFFFF"/>
                 </a:solidFill>
@@ -3939,7 +3939,7 @@
               </a:rPr>
               <a:t>✓</a:t>
             </a:r>
-            <a:endParaRPr lang="en-US" sz="1100" dirty="0"/>
+            <a:endParaRPr lang="en-US" sz="1050" dirty="0"/>
           </a:p>
         </p:txBody>
       </p:sp>
@@ -3951,8 +3951,8 @@
         </p:nvSpPr>
         <p:spPr>
           <a:xfrm>
-            <a:off x="1051560" y="1810512"/>
-            <a:ext cx="4683100" cy="722376"/>
+            <a:off x="1033272" y="1792224"/>
+            <a:ext cx="4710532" cy="603504"/>
           </a:xfrm>
           <a:prstGeom prst="rect">
             <a:avLst/>
@@ -3993,8 +3993,8 @@
         </p:nvSpPr>
         <p:spPr>
           <a:xfrm>
-            <a:off x="502920" y="2715768"/>
-            <a:ext cx="5368900" cy="868680"/>
+            <a:off x="502920" y="2542032"/>
+            <a:ext cx="5368900" cy="749808"/>
           </a:xfrm>
           <a:prstGeom prst="rect">
             <a:avLst/>
@@ -4018,8 +4018,8 @@
         </p:nvSpPr>
         <p:spPr>
           <a:xfrm>
-            <a:off x="640080" y="2880360"/>
-            <a:ext cx="320040" cy="320040"/>
+            <a:off x="640080" y="2770632"/>
+            <a:ext cx="292608" cy="292608"/>
           </a:xfrm>
           <a:prstGeom prst="rect">
             <a:avLst/>
@@ -4038,8 +4038,8 @@
         </p:nvSpPr>
         <p:spPr>
           <a:xfrm>
-            <a:off x="640080" y="2880360"/>
-            <a:ext cx="320040" cy="320040"/>
+            <a:off x="640080" y="2770632"/>
+            <a:ext cx="292608" cy="292608"/>
           </a:xfrm>
           <a:prstGeom prst="rect">
             <a:avLst/>
@@ -4055,7 +4055,7 @@
               <a:buNone/>
             </a:pPr>
             <a:r>
-              <a:rPr lang="en-US" sz="1100" b="1" dirty="0">
+              <a:rPr lang="en-US" sz="1050" b="1" dirty="0">
                 <a:solidFill>
                   <a:srgbClr val="FFFFFF"/>
                 </a:solidFill>
@@ -4065,7 +4065,7 @@
               </a:rPr>
               <a:t>✓</a:t>
             </a:r>
-            <a:endParaRPr lang="en-US" sz="1100" dirty="0"/>
+            <a:endParaRPr lang="en-US" sz="1050" dirty="0"/>
           </a:p>
         </p:txBody>
       </p:sp>
@@ -4077,8 +4077,8 @@
         </p:nvSpPr>
         <p:spPr>
           <a:xfrm>
-            <a:off x="1051560" y="2807208"/>
-            <a:ext cx="4683100" cy="722376"/>
+            <a:off x="1033272" y="2615184"/>
+            <a:ext cx="4710532" cy="603504"/>
           </a:xfrm>
           <a:prstGeom prst="rect">
             <a:avLst/>
@@ -4119,8 +4119,8 @@
         </p:nvSpPr>
         <p:spPr>
           <a:xfrm>
-            <a:off x="502920" y="3712464"/>
-            <a:ext cx="5368900" cy="868680"/>
+            <a:off x="502920" y="3364992"/>
+            <a:ext cx="5368900" cy="749808"/>
           </a:xfrm>
           <a:prstGeom prst="rect">
             <a:avLst/>
@@ -4144,8 +4144,8 @@
         </p:nvSpPr>
         <p:spPr>
           <a:xfrm>
-            <a:off x="640080" y="3877056"/>
-            <a:ext cx="320040" cy="320040"/>
+            <a:off x="640080" y="3593592"/>
+            <a:ext cx="292608" cy="292608"/>
           </a:xfrm>
           <a:prstGeom prst="rect">
             <a:avLst/>
@@ -4164,8 +4164,8 @@
         </p:nvSpPr>
         <p:spPr>
           <a:xfrm>
-            <a:off x="640080" y="3877056"/>
-            <a:ext cx="320040" cy="320040"/>
+            <a:off x="640080" y="3593592"/>
+            <a:ext cx="292608" cy="292608"/>
           </a:xfrm>
           <a:prstGeom prst="rect">
             <a:avLst/>
@@ -4181,7 +4181,7 @@
               <a:buNone/>
             </a:pPr>
             <a:r>
-              <a:rPr lang="en-US" sz="1100" b="1" dirty="0">
+              <a:rPr lang="en-US" sz="1050" b="1" dirty="0">
                 <a:solidFill>
                   <a:srgbClr val="FFFFFF"/>
                 </a:solidFill>
@@ -4191,7 +4191,7 @@
               </a:rPr>
               <a:t>✓</a:t>
             </a:r>
-            <a:endParaRPr lang="en-US" sz="1100" dirty="0"/>
+            <a:endParaRPr lang="en-US" sz="1050" dirty="0"/>
           </a:p>
         </p:txBody>
       </p:sp>
@@ -4203,8 +4203,8 @@
         </p:nvSpPr>
         <p:spPr>
           <a:xfrm>
-            <a:off x="1051560" y="3803904"/>
-            <a:ext cx="4683100" cy="722376"/>
+            <a:off x="1033272" y="3438144"/>
+            <a:ext cx="4710532" cy="603504"/>
           </a:xfrm>
           <a:prstGeom prst="rect">
             <a:avLst/>
@@ -4246,7 +4246,7 @@
         <p:spPr>
           <a:xfrm>
             <a:off x="6191860" y="1719072"/>
-            <a:ext cx="5368900" cy="868680"/>
+            <a:ext cx="5368900" cy="749808"/>
           </a:xfrm>
           <a:prstGeom prst="rect">
             <a:avLst/>
@@ -4270,8 +4270,8 @@
         </p:nvSpPr>
         <p:spPr>
           <a:xfrm>
-            <a:off x="6329020" y="1883664"/>
-            <a:ext cx="320040" cy="320040"/>
+            <a:off x="6329020" y="1947672"/>
+            <a:ext cx="292608" cy="292608"/>
           </a:xfrm>
           <a:prstGeom prst="rect">
             <a:avLst/>
@@ -4290,8 +4290,8 @@
         </p:nvSpPr>
         <p:spPr>
           <a:xfrm>
-            <a:off x="6329020" y="1883664"/>
-            <a:ext cx="320040" cy="320040"/>
+            <a:off x="6329020" y="1947672"/>
+            <a:ext cx="292608" cy="292608"/>
           </a:xfrm>
           <a:prstGeom prst="rect">
             <a:avLst/>
@@ -4307,7 +4307,7 @@
               <a:buNone/>
             </a:pPr>
             <a:r>
-              <a:rPr lang="en-US" sz="1100" b="1" dirty="0">
+              <a:rPr lang="en-US" sz="1050" b="1" dirty="0">
                 <a:solidFill>
                   <a:srgbClr val="FFFFFF"/>
                 </a:solidFill>
@@ -4317,7 +4317,7 @@
               </a:rPr>
               <a:t>✓</a:t>
             </a:r>
-            <a:endParaRPr lang="en-US" sz="1100" dirty="0"/>
+            <a:endParaRPr lang="en-US" sz="1050" dirty="0"/>
           </a:p>
         </p:txBody>
       </p:sp>
@@ -4329,8 +4329,8 @@
         </p:nvSpPr>
         <p:spPr>
           <a:xfrm>
-            <a:off x="6740500" y="1810512"/>
-            <a:ext cx="4683100" cy="722376"/>
+            <a:off x="6722212" y="1792224"/>
+            <a:ext cx="4710532" cy="603504"/>
           </a:xfrm>
           <a:prstGeom prst="rect">
             <a:avLst/>
@@ -4371,8 +4371,8 @@
         </p:nvSpPr>
         <p:spPr>
           <a:xfrm>
-            <a:off x="6191860" y="2715768"/>
-            <a:ext cx="5368900" cy="868680"/>
+            <a:off x="6191860" y="2542032"/>
+            <a:ext cx="5368900" cy="749808"/>
           </a:xfrm>
           <a:prstGeom prst="rect">
             <a:avLst/>
@@ -4396,8 +4396,8 @@
         </p:nvSpPr>
         <p:spPr>
           <a:xfrm>
-            <a:off x="6329020" y="2880360"/>
-            <a:ext cx="320040" cy="320040"/>
+            <a:off x="6329020" y="2770632"/>
+            <a:ext cx="292608" cy="292608"/>
           </a:xfrm>
           <a:prstGeom prst="rect">
             <a:avLst/>
@@ -4416,8 +4416,8 @@
         </p:nvSpPr>
         <p:spPr>
           <a:xfrm>
-            <a:off x="6329020" y="2880360"/>
-            <a:ext cx="320040" cy="320040"/>
+            <a:off x="6329020" y="2770632"/>
+            <a:ext cx="292608" cy="292608"/>
           </a:xfrm>
           <a:prstGeom prst="rect">
             <a:avLst/>
@@ -4433,7 +4433,7 @@
               <a:buNone/>
             </a:pPr>
             <a:r>
-              <a:rPr lang="en-US" sz="1100" b="1" dirty="0">
+              <a:rPr lang="en-US" sz="1050" b="1" dirty="0">
                 <a:solidFill>
                   <a:srgbClr val="FFFFFF"/>
                 </a:solidFill>
@@ -4443,7 +4443,7 @@
               </a:rPr>
               <a:t>✓</a:t>
             </a:r>
-            <a:endParaRPr lang="en-US" sz="1100" dirty="0"/>
+            <a:endParaRPr lang="en-US" sz="1050" dirty="0"/>
           </a:p>
         </p:txBody>
       </p:sp>
@@ -4455,8 +4455,8 @@
         </p:nvSpPr>
         <p:spPr>
           <a:xfrm>
-            <a:off x="6740500" y="2807208"/>
-            <a:ext cx="4683100" cy="722376"/>
+            <a:off x="6722212" y="2615184"/>
+            <a:ext cx="4710532" cy="603504"/>
           </a:xfrm>
           <a:prstGeom prst="rect">
             <a:avLst/>
@@ -4497,8 +4497,8 @@
         </p:nvSpPr>
         <p:spPr>
           <a:xfrm>
-            <a:off x="6191860" y="3712464"/>
-            <a:ext cx="5368900" cy="868680"/>
+            <a:off x="6191860" y="3364992"/>
+            <a:ext cx="5368900" cy="749808"/>
           </a:xfrm>
           <a:prstGeom prst="rect">
             <a:avLst/>
@@ -4522,8 +4522,8 @@
         </p:nvSpPr>
         <p:spPr>
           <a:xfrm>
-            <a:off x="6329020" y="3877056"/>
-            <a:ext cx="320040" cy="320040"/>
+            <a:off x="6329020" y="3593592"/>
+            <a:ext cx="292608" cy="292608"/>
           </a:xfrm>
           <a:prstGeom prst="rect">
             <a:avLst/>
@@ -4542,8 +4542,8 @@
         </p:nvSpPr>
         <p:spPr>
           <a:xfrm>
-            <a:off x="6329020" y="3877056"/>
-            <a:ext cx="320040" cy="320040"/>
+            <a:off x="6329020" y="3593592"/>
+            <a:ext cx="292608" cy="292608"/>
           </a:xfrm>
           <a:prstGeom prst="rect">
             <a:avLst/>
@@ -4559,7 +4559,7 @@
               <a:buNone/>
             </a:pPr>
             <a:r>
-              <a:rPr lang="en-US" sz="1100" b="1" dirty="0">
+              <a:rPr lang="en-US" sz="1050" b="1" dirty="0">
                 <a:solidFill>
                   <a:srgbClr val="FFFFFF"/>
                 </a:solidFill>
@@ -4569,7 +4569,7 @@
               </a:rPr>
               <a:t>✓</a:t>
             </a:r>
-            <a:endParaRPr lang="en-US" sz="1100" dirty="0"/>
+            <a:endParaRPr lang="en-US" sz="1050" dirty="0"/>
           </a:p>
         </p:txBody>
       </p:sp>
@@ -4581,8 +4581,8 @@
         </p:nvSpPr>
         <p:spPr>
           <a:xfrm>
-            <a:off x="6740500" y="3803904"/>
-            <a:ext cx="4683100" cy="722376"/>
+            <a:off x="6722212" y="3438144"/>
+            <a:ext cx="4710532" cy="603504"/>
           </a:xfrm>
           <a:prstGeom prst="rect">
             <a:avLst/>
@@ -4707,7 +4707,7 @@
                 <a:ea typeface="Pretendard" pitchFamily="34" charset="-122"/>
                 <a:cs typeface="Pretendard" pitchFamily="34" charset="-120"/>
               </a:rPr>
-              <a:t>크리딜   |   </a:t>
+              <a:t>크리딜</a:t>
             </a:r>
             <a:endParaRPr lang="en-US" sz="800" dirty="0"/>
           </a:p>
@@ -5135,7 +5135,7 @@
                 <a:ea typeface="Pretendard" pitchFamily="34" charset="-122"/>
                 <a:cs typeface="Pretendard" pitchFamily="34" charset="-120"/>
               </a:rPr>
-              <a:t>크리딜   |   </a:t>
+              <a:t>크리딜</a:t>
             </a:r>
             <a:endParaRPr lang="en-US" sz="800" dirty="0"/>
           </a:p>
@@ -6638,7 +6638,7 @@
                 <a:ea typeface="Pretendard" pitchFamily="34" charset="-122"/>
                 <a:cs typeface="Pretendard" pitchFamily="34" charset="-120"/>
               </a:rPr>
-              <a:t>크리딜   |   </a:t>
+              <a:t>크리딜</a:t>
             </a:r>
             <a:endParaRPr lang="en-US" sz="800" dirty="0"/>
           </a:p>
@@ -7004,10 +7004,13 @@
           <a:lstStyle/>
           <a:p>
             <a:pPr indent="0" marL="0">
-              <a:buNone/>
-            </a:pPr>
-            <a:r>
-              <a:rPr lang="en-US" sz="1700" b="1" dirty="0">
+              <a:lnSpc>
+                <a:spcPct val="100000"/>
+              </a:lnSpc>
+              <a:buNone/>
+            </a:pPr>
+            <a:r>
+              <a:rPr lang="en-US" sz="2200" b="1" dirty="0">
                 <a:solidFill>
                   <a:srgbClr val="10161F"/>
                 </a:solidFill>
@@ -7017,7 +7020,7 @@
               </a:rPr>
               <a:t>-</a:t>
             </a:r>
-            <a:endParaRPr lang="en-US" sz="1700" dirty="0"/>
+            <a:endParaRPr lang="en-US" sz="2200" dirty="0"/>
           </a:p>
         </p:txBody>
       </p:sp>
@@ -7111,10 +7114,13 @@
           <a:lstStyle/>
           <a:p>
             <a:pPr indent="0" marL="0">
-              <a:buNone/>
-            </a:pPr>
-            <a:r>
-              <a:rPr lang="en-US" sz="1700" b="1" dirty="0">
+              <a:lnSpc>
+                <a:spcPct val="100000"/>
+              </a:lnSpc>
+              <a:buNone/>
+            </a:pPr>
+            <a:r>
+              <a:rPr lang="en-US" sz="2200" b="1" dirty="0">
                 <a:solidFill>
                   <a:srgbClr val="10161F"/>
                 </a:solidFill>
@@ -7124,7 +7130,7 @@
               </a:rPr>
               <a:t>B</a:t>
             </a:r>
-            <a:endParaRPr lang="en-US" sz="1700" dirty="0"/>
+            <a:endParaRPr lang="en-US" sz="2200" dirty="0"/>
           </a:p>
         </p:txBody>
       </p:sp>
@@ -7218,10 +7224,13 @@
           <a:lstStyle/>
           <a:p>
             <a:pPr indent="0" marL="0">
-              <a:buNone/>
-            </a:pPr>
-            <a:r>
-              <a:rPr lang="en-US" sz="1700" b="1" dirty="0">
+              <a:lnSpc>
+                <a:spcPct val="100000"/>
+              </a:lnSpc>
+              <a:buNone/>
+            </a:pPr>
+            <a:r>
+              <a:rPr lang="en-US" sz="2200" b="1" dirty="0">
                 <a:solidFill>
                   <a:srgbClr val="10161F"/>
                 </a:solidFill>
@@ -7231,7 +7240,7 @@
               </a:rPr>
               <a:t>서초권역</a:t>
             </a:r>
-            <a:endParaRPr lang="en-US" sz="1700" dirty="0"/>
+            <a:endParaRPr lang="en-US" sz="2200" dirty="0"/>
           </a:p>
         </p:txBody>
       </p:sp>
@@ -7325,10 +7334,13 @@
           <a:lstStyle/>
           <a:p>
             <a:pPr indent="0" marL="0">
-              <a:buNone/>
-            </a:pPr>
-            <a:r>
-              <a:rPr lang="en-US" sz="1700" b="1" dirty="0">
+              <a:lnSpc>
+                <a:spcPct val="100000"/>
+              </a:lnSpc>
+              <a:buNone/>
+            </a:pPr>
+            <a:r>
+              <a:rPr lang="en-US" sz="2200" b="1" dirty="0">
                 <a:solidFill>
                   <a:srgbClr val="10161F"/>
                 </a:solidFill>
@@ -7338,7 +7350,7 @@
               </a:rPr>
               <a:t>메디컬빌딩</a:t>
             </a:r>
-            <a:endParaRPr lang="en-US" sz="1700" dirty="0"/>
+            <a:endParaRPr lang="en-US" sz="2200" dirty="0"/>
           </a:p>
         </p:txBody>
       </p:sp>
@@ -7394,7 +7406,7 @@
               <a:buNone/>
             </a:pPr>
             <a:r>
-              <a:rPr lang="en-US" sz="950" dirty="0">
+              <a:rPr lang="en-US" sz="850" dirty="0">
                 <a:solidFill>
                   <a:srgbClr val="718096"/>
                 </a:solidFill>
@@ -7404,7 +7416,7 @@
               </a:rPr>
               <a:t>연 수익률(Cap Rate)</a:t>
             </a:r>
-            <a:endParaRPr lang="en-US" sz="950" dirty="0"/>
+            <a:endParaRPr lang="en-US" sz="850" dirty="0"/>
           </a:p>
         </p:txBody>
       </p:sp>
@@ -7432,10 +7444,13 @@
           <a:lstStyle/>
           <a:p>
             <a:pPr indent="0" marL="0">
-              <a:buNone/>
-            </a:pPr>
-            <a:r>
-              <a:rPr lang="en-US" sz="1700" b="1" dirty="0">
+              <a:lnSpc>
+                <a:spcPct val="100000"/>
+              </a:lnSpc>
+              <a:buNone/>
+            </a:pPr>
+            <a:r>
+              <a:rPr lang="en-US" sz="2200" b="1" dirty="0">
                 <a:solidFill>
                   <a:srgbClr val="10161F"/>
                 </a:solidFill>
@@ -7445,7 +7460,7 @@
               </a:rPr>
               <a:t>-</a:t>
             </a:r>
-            <a:endParaRPr lang="en-US" sz="1700" dirty="0"/>
+            <a:endParaRPr lang="en-US" sz="2200" dirty="0"/>
           </a:p>
         </p:txBody>
       </p:sp>
@@ -7539,10 +7554,13 @@
           <a:lstStyle/>
           <a:p>
             <a:pPr indent="0" marL="0">
-              <a:buNone/>
-            </a:pPr>
-            <a:r>
-              <a:rPr lang="en-US" sz="1700" b="1" dirty="0">
+              <a:lnSpc>
+                <a:spcPct val="100000"/>
+              </a:lnSpc>
+              <a:buNone/>
+            </a:pPr>
+            <a:r>
+              <a:rPr lang="en-US" sz="2200" b="1" dirty="0">
                 <a:solidFill>
                   <a:srgbClr val="10161F"/>
                 </a:solidFill>
@@ -7552,7 +7570,7 @@
               </a:rPr>
               <a:t>-</a:t>
             </a:r>
-            <a:endParaRPr lang="en-US" sz="1700" dirty="0"/>
+            <a:endParaRPr lang="en-US" sz="2200" dirty="0"/>
           </a:p>
         </p:txBody>
       </p:sp>
@@ -7646,10 +7664,13 @@
           <a:lstStyle/>
           <a:p>
             <a:pPr indent="0" marL="0">
-              <a:buNone/>
-            </a:pPr>
-            <a:r>
-              <a:rPr lang="en-US" sz="1700" b="1" dirty="0">
+              <a:lnSpc>
+                <a:spcPct val="100000"/>
+              </a:lnSpc>
+              <a:buNone/>
+            </a:pPr>
+            <a:r>
+              <a:rPr lang="en-US" sz="2200" b="1" dirty="0">
                 <a:solidFill>
                   <a:srgbClr val="10161F"/>
                 </a:solidFill>
@@ -7659,7 +7680,7 @@
               </a:rPr>
               <a:t>-</a:t>
             </a:r>
-            <a:endParaRPr lang="en-US" sz="1700" dirty="0"/>
+            <a:endParaRPr lang="en-US" sz="2200" dirty="0"/>
           </a:p>
         </p:txBody>
       </p:sp>
@@ -7753,10 +7774,13 @@
           <a:lstStyle/>
           <a:p>
             <a:pPr indent="0" marL="0">
-              <a:buNone/>
-            </a:pPr>
-            <a:r>
-              <a:rPr lang="en-US" sz="1700" b="1" dirty="0">
+              <a:lnSpc>
+                <a:spcPct val="100000"/>
+              </a:lnSpc>
+              <a:buNone/>
+            </a:pPr>
+            <a:r>
+              <a:rPr lang="en-US" sz="2200" b="1" dirty="0">
                 <a:solidFill>
                   <a:srgbClr val="10161F"/>
                 </a:solidFill>
@@ -7766,7 +7790,7 @@
               </a:rPr>
               <a:t>-</a:t>
             </a:r>
-            <a:endParaRPr lang="en-US" sz="1700" dirty="0"/>
+            <a:endParaRPr lang="en-US" sz="2200" dirty="0"/>
           </a:p>
         </p:txBody>
       </p:sp>
@@ -8238,7 +8262,7 @@
                 <a:ea typeface="Pretendard" pitchFamily="34" charset="-122"/>
                 <a:cs typeface="Pretendard" pitchFamily="34" charset="-120"/>
               </a:rPr>
-              <a:t>크리딜   |   </a:t>
+              <a:t>크리딜</a:t>
             </a:r>
             <a:endParaRPr lang="en-US" sz="800" dirty="0"/>
           </a:p>
@@ -8485,7 +8509,7 @@
         <p:spPr>
           <a:xfrm>
             <a:off x="5989320" y="1481328"/>
-            <a:ext cx="1560003" cy="493776"/>
+            <a:ext cx="1560003" cy="457200"/>
           </a:xfrm>
           <a:prstGeom prst="rect">
             <a:avLst/>
@@ -8504,7 +8528,7 @@
               <a:buNone/>
             </a:pPr>
             <a:r>
-              <a:rPr lang="en-US" sz="1300" dirty="0">
+              <a:rPr lang="en-US" sz="1250" dirty="0">
                 <a:solidFill>
                   <a:srgbClr val="718096"/>
                 </a:solidFill>
@@ -8514,7 +8538,7 @@
               </a:rPr>
               <a:t>대중교통</a:t>
             </a:r>
-            <a:endParaRPr lang="en-US" sz="1300" dirty="0"/>
+            <a:endParaRPr lang="en-US" sz="1250" dirty="0"/>
           </a:p>
         </p:txBody>
       </p:sp>
@@ -8527,7 +8551,7 @@
         <p:spPr>
           <a:xfrm>
             <a:off x="7549323" y="1481328"/>
-            <a:ext cx="4011436" cy="493776"/>
+            <a:ext cx="4011436" cy="457200"/>
           </a:xfrm>
           <a:prstGeom prst="rect">
             <a:avLst/>
@@ -8546,7 +8570,7 @@
               <a:buNone/>
             </a:pPr>
             <a:r>
-              <a:rPr lang="en-US" sz="1300" b="1" dirty="0">
+              <a:rPr lang="en-US" sz="1250" b="1" dirty="0">
                 <a:solidFill>
                   <a:srgbClr val="10161F"/>
                 </a:solidFill>
@@ -8554,9 +8578,9 @@
                 <a:ea typeface="Pretendard" pitchFamily="34" charset="-122"/>
                 <a:cs typeface="Pretendard" pitchFamily="34" charset="-120"/>
               </a:rPr>
-              <a:t>인접 지하철역 역세권 (상세 확인 필요)</a:t>
-            </a:r>
-            <a:endParaRPr lang="en-US" sz="1300" dirty="0"/>
+              <a:t>지하철 및 간선버스 인접</a:t>
+            </a:r>
+            <a:endParaRPr lang="en-US" sz="1250" dirty="0"/>
           </a:p>
         </p:txBody>
       </p:sp>
@@ -8568,7 +8592,7 @@
         </p:nvSpPr>
         <p:spPr>
           <a:xfrm>
-            <a:off x="5989320" y="1975104"/>
+            <a:off x="5989320" y="1938528"/>
             <a:ext cx="5571439" cy="0"/>
           </a:xfrm>
           <a:prstGeom prst="line">
@@ -8591,8 +8615,8 @@
         </p:nvSpPr>
         <p:spPr>
           <a:xfrm>
-            <a:off x="5989320" y="1975104"/>
-            <a:ext cx="1560003" cy="493776"/>
+            <a:off x="5989320" y="1938528"/>
+            <a:ext cx="1560003" cy="457200"/>
           </a:xfrm>
           <a:prstGeom prst="rect">
             <a:avLst/>
@@ -8611,7 +8635,7 @@
               <a:buNone/>
             </a:pPr>
             <a:r>
-              <a:rPr lang="en-US" sz="1300" dirty="0">
+              <a:rPr lang="en-US" sz="1250" dirty="0">
                 <a:solidFill>
                   <a:srgbClr val="718096"/>
                 </a:solidFill>
@@ -8621,7 +8645,7 @@
               </a:rPr>
               <a:t>상권권역</a:t>
             </a:r>
-            <a:endParaRPr lang="en-US" sz="1300" dirty="0"/>
+            <a:endParaRPr lang="en-US" sz="1250" dirty="0"/>
           </a:p>
         </p:txBody>
       </p:sp>
@@ -8633,8 +8657,8 @@
         </p:nvSpPr>
         <p:spPr>
           <a:xfrm>
-            <a:off x="7549323" y="1975104"/>
-            <a:ext cx="4011436" cy="493776"/>
+            <a:off x="7549323" y="1938528"/>
+            <a:ext cx="4011436" cy="457200"/>
           </a:xfrm>
           <a:prstGeom prst="rect">
             <a:avLst/>
@@ -8653,7 +8677,7 @@
               <a:buNone/>
             </a:pPr>
             <a:r>
-              <a:rPr lang="en-US" sz="1300" b="1" dirty="0">
+              <a:rPr lang="en-US" sz="1250" b="1" dirty="0">
                 <a:solidFill>
                   <a:srgbClr val="10161F"/>
                 </a:solidFill>
@@ -8663,7 +8687,7 @@
               </a:rPr>
               <a:t>서초권역 주요 상업·업무 권역</a:t>
             </a:r>
-            <a:endParaRPr lang="en-US" sz="1300" dirty="0"/>
+            <a:endParaRPr lang="en-US" sz="1250" dirty="0"/>
           </a:p>
         </p:txBody>
       </p:sp>
@@ -8675,7 +8699,7 @@
         </p:nvSpPr>
         <p:spPr>
           <a:xfrm>
-            <a:off x="5989320" y="2606040"/>
+            <a:off x="5989320" y="2505456"/>
             <a:ext cx="5571439" cy="658368"/>
           </a:xfrm>
           <a:prstGeom prst="roundRect">
@@ -8697,7 +8721,7 @@
         </p:nvSpPr>
         <p:spPr>
           <a:xfrm>
-            <a:off x="5989320" y="2660904"/>
+            <a:off x="5989320" y="2560320"/>
             <a:ext cx="36576" cy="548640"/>
           </a:xfrm>
           <a:prstGeom prst="rect">
@@ -8717,7 +8741,7 @@
         </p:nvSpPr>
         <p:spPr>
           <a:xfrm>
-            <a:off x="6135624" y="2697480"/>
+            <a:off x="6135624" y="2596896"/>
             <a:ext cx="5315407" cy="201168"/>
           </a:xfrm>
           <a:prstGeom prst="rect">
@@ -8756,7 +8780,7 @@
         </p:nvSpPr>
         <p:spPr>
           <a:xfrm>
-            <a:off x="6135624" y="2898648"/>
+            <a:off x="6135624" y="2798064"/>
             <a:ext cx="5315407" cy="329184"/>
           </a:xfrm>
           <a:prstGeom prst="rect">
@@ -8824,7 +8848,7 @@
                 <a:ea typeface="Pretendard" pitchFamily="34" charset="-122"/>
                 <a:cs typeface="Pretendard" pitchFamily="34" charset="-120"/>
               </a:rPr>
-              <a:t>크리딜   |   </a:t>
+              <a:t>크리딜</a:t>
             </a:r>
             <a:endParaRPr lang="en-US" sz="800" dirty="0"/>
           </a:p>
@@ -9086,11 +9110,11 @@
         <p:spPr>
           <a:xfrm>
             <a:off x="502920" y="1645920"/>
-            <a:ext cx="6858000" cy="1828800"/>
+            <a:ext cx="6858000" cy="1645920"/>
           </a:xfrm>
           <a:prstGeom prst="roundRect">
             <a:avLst>
-              <a:gd name="adj" fmla="val 3000"/>
+              <a:gd name="adj" fmla="val 3333"/>
             </a:avLst>
           </a:prstGeom>
           <a:solidFill>
@@ -9108,7 +9132,7 @@
         <p:spPr>
           <a:xfrm>
             <a:off x="502920" y="1700784"/>
-            <a:ext cx="36576" cy="1719072"/>
+            <a:ext cx="36576" cy="1536192"/>
           </a:xfrm>
           <a:prstGeom prst="rect">
             <a:avLst/>
@@ -9167,7 +9191,7 @@
         <p:spPr>
           <a:xfrm>
             <a:off x="649224" y="1938528"/>
-            <a:ext cx="6601968" cy="1499616"/>
+            <a:ext cx="6601968" cy="1316736"/>
           </a:xfrm>
           <a:prstGeom prst="rect">
             <a:avLst/>
@@ -9195,7 +9219,7 @@
                 <a:ea typeface="Pretendard" pitchFamily="34" charset="-122"/>
                 <a:cs typeface="Pretendard" pitchFamily="34" charset="-120"/>
               </a:rPr>
-              <a:t>등기부등본 갑구·을구 권리관계 확인 필요</a:t>
+              <a:t>등기부등본 갑구·을구 권리관계 공적장부 대조</a:t>
             </a:r>
             <a:endParaRPr lang="en-US" sz="980" dirty="0"/>
           </a:p>
@@ -9347,7 +9371,7 @@
                 <a:ea typeface="Pretendard" pitchFamily="34" charset="-122"/>
                 <a:cs typeface="Pretendard" pitchFamily="34" charset="-120"/>
               </a:rPr>
-              <a:t>토지 및 건축 규제 포인트</a:t>
+              <a:t>토지 및 건축 규제</a:t>
             </a:r>
             <a:endParaRPr lang="en-US" sz="1050" dirty="0"/>
           </a:p>
@@ -9390,7 +9414,131 @@
                 <a:ea typeface="Pretendard" pitchFamily="34" charset="-122"/>
                 <a:cs typeface="Pretendard" pitchFamily="34" charset="-120"/>
               </a:rPr>
-              <a:t>용도지역·용도지구 기준 건폐율/용적률 상한 확인</a:t>
+              <a:t>토지이용계획 열람 및 건축 규제 확인 필요</a:t>
+            </a:r>
+            <a:endParaRPr lang="en-US" sz="980" dirty="0"/>
+          </a:p>
+        </p:txBody>
+      </p:sp>
+      <p:sp>
+        <p:nvSpPr>
+          <p:cNvPr id="16" name="Shape 14"/>
+          <p:cNvSpPr/>
+          <p:nvPr/>
+        </p:nvSpPr>
+        <p:spPr>
+          <a:xfrm>
+            <a:off x="7720279" y="3977640"/>
+            <a:ext cx="3840480" cy="2148840"/>
+          </a:xfrm>
+          <a:prstGeom prst="roundRect">
+            <a:avLst>
+              <a:gd name="adj" fmla="val 2553"/>
+            </a:avLst>
+          </a:prstGeom>
+          <a:solidFill>
+            <a:srgbClr val="BEE3F8"/>
+          </a:solidFill>
+          <a:ln/>
+        </p:spPr>
+      </p:sp>
+      <p:sp>
+        <p:nvSpPr>
+          <p:cNvPr id="17" name="Shape 15"/>
+          <p:cNvSpPr/>
+          <p:nvPr/>
+        </p:nvSpPr>
+        <p:spPr>
+          <a:xfrm>
+            <a:off x="7720279" y="4032504"/>
+            <a:ext cx="36576" cy="2039112"/>
+          </a:xfrm>
+          <a:prstGeom prst="rect">
+            <a:avLst/>
+          </a:prstGeom>
+          <a:solidFill>
+            <a:srgbClr val="2B6CB0"/>
+          </a:solidFill>
+          <a:ln/>
+        </p:spPr>
+      </p:sp>
+      <p:sp>
+        <p:nvSpPr>
+          <p:cNvPr id="18" name="Text 16"/>
+          <p:cNvSpPr/>
+          <p:nvPr/>
+        </p:nvSpPr>
+        <p:spPr>
+          <a:xfrm>
+            <a:off x="7866583" y="4069080"/>
+            <a:ext cx="3584448" cy="201168"/>
+          </a:xfrm>
+          <a:prstGeom prst="rect">
+            <a:avLst/>
+          </a:prstGeom>
+          <a:noFill/>
+          <a:ln/>
+        </p:spPr>
+        <p:txBody>
+          <a:bodyPr wrap="square" lIns="0" tIns="0" rIns="0" bIns="0" rtlCol="0" anchor="ctr"/>
+          <a:lstStyle/>
+          <a:p>
+            <a:pPr indent="0" marL="0">
+              <a:buNone/>
+            </a:pPr>
+            <a:r>
+              <a:rPr lang="en-US" sz="1050" b="1" dirty="0">
+                <a:solidFill>
+                  <a:srgbClr val="2B6CB0"/>
+                </a:solidFill>
+                <a:latin typeface="Pretendard" pitchFamily="34" charset="0"/>
+                <a:ea typeface="Pretendard" pitchFamily="34" charset="-122"/>
+                <a:cs typeface="Pretendard" pitchFamily="34" charset="-120"/>
+              </a:rPr>
+              <a:t>권리관계 및 공적장부</a:t>
+            </a:r>
+            <a:endParaRPr lang="en-US" sz="1050" dirty="0"/>
+          </a:p>
+        </p:txBody>
+      </p:sp>
+      <p:sp>
+        <p:nvSpPr>
+          <p:cNvPr id="19" name="Text 17"/>
+          <p:cNvSpPr/>
+          <p:nvPr/>
+        </p:nvSpPr>
+        <p:spPr>
+          <a:xfrm>
+            <a:off x="7866583" y="4270248"/>
+            <a:ext cx="3584448" cy="1819656"/>
+          </a:xfrm>
+          <a:prstGeom prst="rect">
+            <a:avLst/>
+          </a:prstGeom>
+          <a:noFill/>
+          <a:ln/>
+        </p:spPr>
+        <p:txBody>
+          <a:bodyPr wrap="square" lIns="0" tIns="0" rIns="0" bIns="0" rtlCol="0" anchor="t"/>
+          <a:lstStyle/>
+          <a:p>
+            <a:pPr marL="342900" indent="-342900">
+              <a:lnSpc>
+                <a:spcPct val="108000"/>
+              </a:lnSpc>
+              <a:buSzPct val="100000"/>
+              <a:buChar char="•"/>
+            </a:pPr>
+            <a:r>
+              <a:rPr lang="en-US" sz="980" dirty="0">
+                <a:solidFill>
+                  <a:srgbClr val="10161F"/>
+                </a:solidFill>
+                <a:latin typeface="Pretendard" pitchFamily="34" charset="0"/>
+                <a:ea typeface="Pretendard" pitchFamily="34" charset="-122"/>
+                <a:cs typeface="Pretendard" pitchFamily="34" charset="-120"/>
+              </a:rPr>
+              <a:t>등기부등본 갑구 소유권 확인</a:t>
             </a:r>
             <a:endParaRPr lang="en-US" sz="980" dirty="0"/>
           </a:p>
@@ -9414,7 +9562,7 @@
                 <a:ea typeface="Pretendard" pitchFamily="34" charset="-122"/>
                 <a:cs typeface="Pretendard" pitchFamily="34" charset="-120"/>
               </a:rPr>
-              <a:t>필지 형상 및 접도 조건에 따른 건축 가능 면적 검토</a:t>
+              <a:t>건축물대장 기재 사항 실물 대조</a:t>
             </a:r>
             <a:endParaRPr lang="en-US" sz="980" dirty="0"/>
           </a:p>
@@ -9438,179 +9586,7 @@
                 <a:ea typeface="Pretendard" pitchFamily="34" charset="-122"/>
                 <a:cs typeface="Pretendard" pitchFamily="34" charset="-120"/>
               </a:rPr>
-              <a:t>토지이용계획 열람 및 개발행위허가 제한 여부 확인</a:t>
-            </a:r>
-            <a:endParaRPr lang="en-US" sz="980" dirty="0"/>
-          </a:p>
-        </p:txBody>
-      </p:sp>
-      <p:sp>
-        <p:nvSpPr>
-          <p:cNvPr id="16" name="Shape 14"/>
-          <p:cNvSpPr/>
-          <p:nvPr/>
-        </p:nvSpPr>
-        <p:spPr>
-          <a:xfrm>
-            <a:off x="7720279" y="3977640"/>
-            <a:ext cx="3840480" cy="2148840"/>
-          </a:xfrm>
-          <a:prstGeom prst="roundRect">
-            <a:avLst>
-              <a:gd name="adj" fmla="val 2553"/>
-            </a:avLst>
-          </a:prstGeom>
-          <a:solidFill>
-            <a:srgbClr val="BEE3F8"/>
-          </a:solidFill>
-          <a:ln/>
-        </p:spPr>
-      </p:sp>
-      <p:sp>
-        <p:nvSpPr>
-          <p:cNvPr id="17" name="Shape 15"/>
-          <p:cNvSpPr/>
-          <p:nvPr/>
-        </p:nvSpPr>
-        <p:spPr>
-          <a:xfrm>
-            <a:off x="7720279" y="4032504"/>
-            <a:ext cx="36576" cy="2039112"/>
-          </a:xfrm>
-          <a:prstGeom prst="rect">
-            <a:avLst/>
-          </a:prstGeom>
-          <a:solidFill>
-            <a:srgbClr val="2B6CB0"/>
-          </a:solidFill>
-          <a:ln/>
-        </p:spPr>
-      </p:sp>
-      <p:sp>
-        <p:nvSpPr>
-          <p:cNvPr id="18" name="Text 16"/>
-          <p:cNvSpPr/>
-          <p:nvPr/>
-        </p:nvSpPr>
-        <p:spPr>
-          <a:xfrm>
-            <a:off x="7866583" y="4069080"/>
-            <a:ext cx="3584448" cy="201168"/>
-          </a:xfrm>
-          <a:prstGeom prst="rect">
-            <a:avLst/>
-          </a:prstGeom>
-          <a:noFill/>
-          <a:ln/>
-        </p:spPr>
-        <p:txBody>
-          <a:bodyPr wrap="square" lIns="0" tIns="0" rIns="0" bIns="0" rtlCol="0" anchor="ctr"/>
-          <a:lstStyle/>
-          <a:p>
-            <a:pPr indent="0" marL="0">
-              <a:buNone/>
-            </a:pPr>
-            <a:r>
-              <a:rPr lang="en-US" sz="1050" b="1" dirty="0">
-                <a:solidFill>
-                  <a:srgbClr val="2B6CB0"/>
-                </a:solidFill>
-                <a:latin typeface="Pretendard" pitchFamily="34" charset="0"/>
-                <a:ea typeface="Pretendard" pitchFamily="34" charset="-122"/>
-                <a:cs typeface="Pretendard" pitchFamily="34" charset="-120"/>
-              </a:rPr>
-              <a:t>권리관계 및 공적장부</a:t>
-            </a:r>
-            <a:endParaRPr lang="en-US" sz="1050" dirty="0"/>
-          </a:p>
-        </p:txBody>
-      </p:sp>
-      <p:sp>
-        <p:nvSpPr>
-          <p:cNvPr id="19" name="Text 17"/>
-          <p:cNvSpPr/>
-          <p:nvPr/>
-        </p:nvSpPr>
-        <p:spPr>
-          <a:xfrm>
-            <a:off x="7866583" y="4270248"/>
-            <a:ext cx="3584448" cy="1819656"/>
-          </a:xfrm>
-          <a:prstGeom prst="rect">
-            <a:avLst/>
-          </a:prstGeom>
-          <a:noFill/>
-          <a:ln/>
-        </p:spPr>
-        <p:txBody>
-          <a:bodyPr wrap="square" lIns="0" tIns="0" rIns="0" bIns="0" rtlCol="0" anchor="t"/>
-          <a:lstStyle/>
-          <a:p>
-            <a:pPr marL="342900" indent="-342900">
-              <a:lnSpc>
-                <a:spcPct val="108000"/>
-              </a:lnSpc>
-              <a:buSzPct val="100000"/>
-              <a:buChar char="•"/>
-            </a:pPr>
-            <a:r>
-              <a:rPr lang="en-US" sz="980" dirty="0">
-                <a:solidFill>
-                  <a:srgbClr val="10161F"/>
-                </a:solidFill>
-                <a:latin typeface="Pretendard" pitchFamily="34" charset="0"/>
-                <a:ea typeface="Pretendard" pitchFamily="34" charset="-122"/>
-                <a:cs typeface="Pretendard" pitchFamily="34" charset="-120"/>
-              </a:rPr>
-              <a:t>등기부등본 갑구 소유권 및 을구 근저당·가압류 확인</a:t>
-            </a:r>
-            <a:endParaRPr lang="en-US" sz="980" dirty="0"/>
-          </a:p>
-          <a:p>
-            <a:pPr marL="342900" indent="-342900">
-              <a:lnSpc>
-                <a:spcPct val="108000"/>
-              </a:lnSpc>
-              <a:spcBef>
-                <a:spcPts val="300"/>
-              </a:spcBef>
-              <a:buSzPct val="100000"/>
-              <a:buChar char="•"/>
-            </a:pPr>
-            <a:r>
-              <a:rPr lang="en-US" sz="980" dirty="0">
-                <a:solidFill>
-                  <a:srgbClr val="10161F"/>
-                </a:solidFill>
-                <a:latin typeface="Pretendard" pitchFamily="34" charset="0"/>
-                <a:ea typeface="Pretendard" pitchFamily="34" charset="-122"/>
-                <a:cs typeface="Pretendard" pitchFamily="34" charset="-120"/>
-              </a:rPr>
-              <a:t>건축물대장 기재 사항과 실물 현황 대조 점검</a:t>
-            </a:r>
-            <a:endParaRPr lang="en-US" sz="980" dirty="0"/>
-          </a:p>
-          <a:p>
-            <a:pPr marL="342900" indent="-342900">
-              <a:lnSpc>
-                <a:spcPct val="108000"/>
-              </a:lnSpc>
-              <a:spcBef>
-                <a:spcPts val="300"/>
-              </a:spcBef>
-              <a:buSzPct val="100000"/>
-              <a:buChar char="•"/>
-            </a:pPr>
-            <a:r>
-              <a:rPr lang="en-US" sz="980" dirty="0">
-                <a:solidFill>
-                  <a:srgbClr val="10161F"/>
-                </a:solidFill>
-                <a:latin typeface="Pretendard" pitchFamily="34" charset="0"/>
-                <a:ea typeface="Pretendard" pitchFamily="34" charset="-122"/>
-                <a:cs typeface="Pretendard" pitchFamily="34" charset="-120"/>
-              </a:rPr>
-              <a:t>개별공시지가 및 실거래가 비교 분석</a:t>
+              <a:t>개별공시지가 및 실거래가 비교</a:t>
             </a:r>
             <a:endParaRPr lang="en-US" sz="980" dirty="0"/>
           </a:p>
@@ -9649,7 +9625,7 @@
                 <a:ea typeface="Pretendard" pitchFamily="34" charset="-122"/>
                 <a:cs typeface="Pretendard" pitchFamily="34" charset="-120"/>
               </a:rPr>
-              <a:t>크리딜   |   </a:t>
+              <a:t>크리딜</a:t>
             </a:r>
             <a:endParaRPr lang="en-US" sz="800" dirty="0"/>
           </a:p>
@@ -9911,11 +9887,11 @@
         <p:spPr>
           <a:xfrm>
             <a:off x="502920" y="1645920"/>
-            <a:ext cx="6858000" cy="1828800"/>
+            <a:ext cx="6858000" cy="1645920"/>
           </a:xfrm>
           <a:prstGeom prst="roundRect">
             <a:avLst>
-              <a:gd name="adj" fmla="val 3000"/>
+              <a:gd name="adj" fmla="val 3333"/>
             </a:avLst>
           </a:prstGeom>
           <a:solidFill>
@@ -9933,7 +9909,7 @@
         <p:spPr>
           <a:xfrm>
             <a:off x="502920" y="1700784"/>
-            <a:ext cx="36576" cy="1719072"/>
+            <a:ext cx="36576" cy="1536192"/>
           </a:xfrm>
           <a:prstGeom prst="rect">
             <a:avLst/>
@@ -9992,7 +9968,7 @@
         <p:spPr>
           <a:xfrm>
             <a:off x="649224" y="1938528"/>
-            <a:ext cx="6601968" cy="1499616"/>
+            <a:ext cx="6601968" cy="1316736"/>
           </a:xfrm>
           <a:prstGeom prst="rect">
             <a:avLst/>
@@ -10020,7 +9996,7 @@
                 <a:ea typeface="Pretendard" pitchFamily="34" charset="-122"/>
                 <a:cs typeface="Pretendard" pitchFamily="34" charset="-120"/>
               </a:rPr>
-              <a:t>등기부등본 갑구·을구 권리관계 확인 필요</a:t>
+              <a:t>등기부등본 갑구·을구 권리관계 공적장부 대조</a:t>
             </a:r>
             <a:endParaRPr lang="en-US" sz="980" dirty="0"/>
           </a:p>
@@ -10242,7 +10218,7 @@
                 <a:ea typeface="Pretendard" pitchFamily="34" charset="-122"/>
                 <a:cs typeface="Pretendard" pitchFamily="34" charset="-120"/>
               </a:rPr>
-              <a:t>크리딜   |   </a:t>
+              <a:t>크리딜</a:t>
             </a:r>
             <a:endParaRPr lang="en-US" sz="800" dirty="0"/>
           </a:p>
@@ -10956,7 +10932,7 @@
                 <a:ea typeface="Pretendard" pitchFamily="34" charset="-122"/>
                 <a:cs typeface="Pretendard" pitchFamily="34" charset="-120"/>
               </a:rPr>
-              <a:t>크리딜   |   </a:t>
+              <a:t>크리딜</a:t>
             </a:r>
             <a:endParaRPr lang="en-US" sz="800" dirty="0"/>
           </a:p>
@@ -11218,11 +11194,11 @@
         <p:spPr>
           <a:xfrm>
             <a:off x="502920" y="1645920"/>
-            <a:ext cx="6858000" cy="1828800"/>
+            <a:ext cx="6858000" cy="1645920"/>
           </a:xfrm>
           <a:prstGeom prst="roundRect">
             <a:avLst>
-              <a:gd name="adj" fmla="val 3000"/>
+              <a:gd name="adj" fmla="val 3333"/>
             </a:avLst>
           </a:prstGeom>
           <a:solidFill>
@@ -11240,7 +11216,7 @@
         <p:spPr>
           <a:xfrm>
             <a:off x="502920" y="1700784"/>
-            <a:ext cx="36576" cy="1719072"/>
+            <a:ext cx="36576" cy="1536192"/>
           </a:xfrm>
           <a:prstGeom prst="rect">
             <a:avLst/>
@@ -11299,7 +11275,7 @@
         <p:spPr>
           <a:xfrm>
             <a:off x="649224" y="1938528"/>
-            <a:ext cx="6601968" cy="1499616"/>
+            <a:ext cx="6601968" cy="1316736"/>
           </a:xfrm>
           <a:prstGeom prst="rect">
             <a:avLst/>
@@ -11327,7 +11303,7 @@
                 <a:ea typeface="Pretendard" pitchFamily="34" charset="-122"/>
                 <a:cs typeface="Pretendard" pitchFamily="34" charset="-120"/>
               </a:rPr>
-              <a:t>등기부등본 갑구·을구 권리관계 확인 필요</a:t>
+              <a:t>등기부등본 갑구·을구 권리관계 공적장부 대조</a:t>
             </a:r>
             <a:endParaRPr lang="en-US" sz="980" dirty="0"/>
           </a:p>
@@ -11549,7 +11525,7 @@
                 <a:ea typeface="Pretendard" pitchFamily="34" charset="-122"/>
                 <a:cs typeface="Pretendard" pitchFamily="34" charset="-120"/>
               </a:rPr>
-              <a:t>크리딜   |   </a:t>
+              <a:t>크리딜</a:t>
             </a:r>
             <a:endParaRPr lang="en-US" sz="800" dirty="0"/>
           </a:p>
@@ -11876,6 +11852,9 @@
           <a:lstStyle/>
           <a:p>
             <a:pPr indent="0" marL="0">
+              <a:lnSpc>
+                <a:spcPct val="100000"/>
+              </a:lnSpc>
               <a:buNone/>
             </a:pPr>
             <a:r>
@@ -11983,6 +11962,9 @@
           <a:lstStyle/>
           <a:p>
             <a:pPr indent="0" marL="0">
+              <a:lnSpc>
+                <a:spcPct val="100000"/>
+              </a:lnSpc>
               <a:buNone/>
             </a:pPr>
             <a:r>
@@ -12090,6 +12072,9 @@
           <a:lstStyle/>
           <a:p>
             <a:pPr indent="0" marL="0">
+              <a:lnSpc>
+                <a:spcPct val="100000"/>
+              </a:lnSpc>
               <a:buNone/>
             </a:pPr>
             <a:r>
@@ -12263,7 +12248,7 @@
                 <a:ea typeface="Pretendard" pitchFamily="34" charset="-122"/>
                 <a:cs typeface="Pretendard" pitchFamily="34" charset="-120"/>
               </a:rPr>
-              <a:t>크리딜   |   </a:t>
+              <a:t>크리딜</a:t>
             </a:r>
             <a:endParaRPr lang="en-US" sz="800" dirty="0"/>
           </a:p>
@@ -12621,7 +12606,7 @@
                 <a:ea typeface="Pretendard" pitchFamily="34" charset="-122"/>
                 <a:cs typeface="Pretendard" pitchFamily="34" charset="-120"/>
               </a:rPr>
-              <a:t>165.0억 원</a:t>
+              <a:t>165억 원</a:t>
             </a:r>
             <a:endParaRPr lang="en-US" sz="1150" dirty="0"/>
           </a:p>
@@ -13049,7 +13034,7 @@
                 <a:ea typeface="Pretendard" pitchFamily="34" charset="-122"/>
                 <a:cs typeface="Pretendard" pitchFamily="34" charset="-120"/>
               </a:rPr>
-              <a:t>0.0억 원</a:t>
+              <a:t>-</a:t>
             </a:r>
             <a:endParaRPr lang="en-US" sz="1150" dirty="0"/>
           </a:p>
@@ -13887,7 +13872,7 @@
                           <a:ea typeface="Pretendard" pitchFamily="34" charset="-122"/>
                           <a:cs typeface="Pretendard" pitchFamily="34" charset="-120"/>
                         </a:rPr>
-                        <a:t>0.00%</a:t>
+                        <a:t>-</a:t>
                       </a:r>
                       <a:endParaRPr lang="en-US" sz="1100" dirty="0">
                         <a:latin typeface="Pretendard" charset="0"/>
@@ -14189,7 +14174,7 @@
                           <a:ea typeface="Pretendard" pitchFamily="34" charset="-122"/>
                           <a:cs typeface="Pretendard" pitchFamily="34" charset="-120"/>
                         </a:rPr>
-                        <a:t>0.00%</a:t>
+                        <a:t>-</a:t>
                       </a:r>
                       <a:endParaRPr lang="en-US" sz="1100" dirty="0">
                         <a:latin typeface="Pretendard" charset="0"/>
@@ -14491,7 +14476,7 @@
                           <a:ea typeface="Pretendard" pitchFamily="34" charset="-122"/>
                           <a:cs typeface="Pretendard" pitchFamily="34" charset="-120"/>
                         </a:rPr>
-                        <a:t>0.00%</a:t>
+                        <a:t>-</a:t>
                       </a:r>
                       <a:endParaRPr lang="en-US" sz="1100" dirty="0">
                         <a:latin typeface="Pretendard" charset="0"/>
@@ -14793,7 +14778,7 @@
                           <a:ea typeface="Pretendard" pitchFamily="34" charset="-122"/>
                           <a:cs typeface="Pretendard" pitchFamily="34" charset="-120"/>
                         </a:rPr>
-                        <a:t>0.00%</a:t>
+                        <a:t>-</a:t>
                       </a:r>
                       <a:endParaRPr lang="en-US" sz="1100" dirty="0">
                         <a:latin typeface="Pretendard" charset="0"/>
@@ -15005,7 +14990,7 @@
                 <a:ea typeface="Pretendard" pitchFamily="34" charset="-122"/>
                 <a:cs typeface="Pretendard" pitchFamily="34" charset="-120"/>
               </a:rPr>
-              <a:t>크리딜   |   </a:t>
+              <a:t>크리딜</a:t>
             </a:r>
             <a:endParaRPr lang="en-US" sz="800" dirty="0"/>
           </a:p>

--- a/docs/test/stress/e2e-outputs/income_overflow_pr11.pptx
+++ b/docs/test/stress/e2e-outputs/income_overflow_pr11.pptx
@@ -4105,7 +4105,7 @@
                 <a:ea typeface="Pretendard" pitchFamily="34" charset="-122"/>
                 <a:cs typeface="Pretendard" pitchFamily="34" charset="-120"/>
               </a:rPr>
-              <a:t>임대차 원본 계약서 대조 (보증금, 월임대료, 관리비 실입금 내역 및 제소전화해조서)</a:t>
+              <a:t>임대차 원본 계약서 검토 (보증금, 월임대료, 관리비 실입금 내역 및 제소전화해조서)</a:t>
             </a:r>
             <a:endParaRPr lang="en-US" sz="950" dirty="0"/>
           </a:p>

--- a/docs/test/stress/e2e-outputs/income_overflow_pr11.pptx
+++ b/docs/test/stress/e2e-outputs/income_overflow_pr11.pptx
@@ -2183,7 +2183,7 @@
         </p:nvSpPr>
         <p:spPr>
           <a:xfrm>
-            <a:off x="502920" y="475488"/>
+            <a:off x="566928" y="475488"/>
             <a:ext cx="2743200" cy="365760"/>
           </a:xfrm>
           <a:prstGeom prst="rect">
@@ -2236,7 +2236,7 @@
         </p:nvSpPr>
         <p:spPr>
           <a:xfrm>
-            <a:off x="502920" y="2029968"/>
+            <a:off x="566928" y="2029968"/>
             <a:ext cx="7315200" cy="274320"/>
           </a:xfrm>
           <a:prstGeom prst="rect">
@@ -2275,8 +2275,8 @@
         </p:nvSpPr>
         <p:spPr>
           <a:xfrm>
-            <a:off x="502920" y="2304288"/>
-            <a:ext cx="7315200" cy="731520"/>
+            <a:off x="566928" y="2304288"/>
+            <a:ext cx="7315200" cy="1051560"/>
           </a:xfrm>
           <a:prstGeom prst="rect">
             <a:avLst/>
@@ -2292,7 +2292,7 @@
               <a:buNone/>
             </a:pPr>
             <a:r>
-              <a:rPr lang="en-US" sz="4000" b="1" dirty="0">
+              <a:rPr lang="en-US" sz="3000" b="1" dirty="0">
                 <a:solidFill>
                   <a:srgbClr val="FFFFFF"/>
                 </a:solidFill>
@@ -2302,7 +2302,7 @@
               </a:rPr>
               <a:t>income 포스처 테스트 문서</a:t>
             </a:r>
-            <a:endParaRPr lang="en-US" sz="4000" dirty="0"/>
+            <a:endParaRPr lang="en-US" sz="3000" dirty="0"/>
           </a:p>
         </p:txBody>
       </p:sp>
@@ -2314,7 +2314,7 @@
         </p:nvSpPr>
         <p:spPr>
           <a:xfrm>
-            <a:off x="502920" y="3090672"/>
+            <a:off x="566928" y="3410712"/>
             <a:ext cx="7315200" cy="329184"/>
           </a:xfrm>
           <a:prstGeom prst="rect">
@@ -2353,7 +2353,7 @@
         </p:nvSpPr>
         <p:spPr>
           <a:xfrm>
-            <a:off x="502920" y="3639312"/>
+            <a:off x="566928" y="3959352"/>
             <a:ext cx="1097280" cy="292608"/>
           </a:xfrm>
           <a:prstGeom prst="roundRect">
@@ -2375,7 +2375,7 @@
         </p:nvSpPr>
         <p:spPr>
           <a:xfrm>
-            <a:off x="502920" y="3639312"/>
+            <a:off x="566928" y="3959352"/>
             <a:ext cx="1097280" cy="292608"/>
           </a:xfrm>
           <a:prstGeom prst="rect">
@@ -2414,7 +2414,7 @@
         </p:nvSpPr>
         <p:spPr>
           <a:xfrm>
-            <a:off x="1691640" y="3639312"/>
+            <a:off x="1755648" y="3959352"/>
             <a:ext cx="1005840" cy="292608"/>
           </a:xfrm>
           <a:prstGeom prst="roundRect">
@@ -2436,7 +2436,7 @@
         </p:nvSpPr>
         <p:spPr>
           <a:xfrm>
-            <a:off x="1691640" y="3639312"/>
+            <a:off x="1755648" y="3959352"/>
             <a:ext cx="1005840" cy="292608"/>
           </a:xfrm>
           <a:prstGeom prst="rect">
@@ -2475,7 +2475,7 @@
         </p:nvSpPr>
         <p:spPr>
           <a:xfrm>
-            <a:off x="502920" y="4078224"/>
+            <a:off x="566928" y="4398264"/>
             <a:ext cx="6858000" cy="1051560"/>
           </a:xfrm>
           <a:prstGeom prst="roundRect">
@@ -2502,7 +2502,7 @@
         </p:nvSpPr>
         <p:spPr>
           <a:xfrm>
-            <a:off x="758952" y="4187952"/>
+            <a:off x="822960" y="4507992"/>
             <a:ext cx="6345936" cy="832104"/>
           </a:xfrm>
           <a:prstGeom prst="rect">
@@ -2541,8 +2541,8 @@
         </p:nvSpPr>
         <p:spPr>
           <a:xfrm>
-            <a:off x="502920" y="6035040"/>
-            <a:ext cx="11057839" cy="274320"/>
+            <a:off x="566928" y="5943600"/>
+            <a:ext cx="11057839" cy="201168"/>
           </a:xfrm>
           <a:prstGeom prst="rect">
             <a:avLst/>
@@ -2569,7 +2569,7 @@
         </p:nvSpPr>
         <p:spPr>
           <a:xfrm>
-            <a:off x="502920" y="6382512"/>
+            <a:off x="566928" y="6382512"/>
             <a:ext cx="7315200" cy="219456"/>
           </a:xfrm>
           <a:prstGeom prst="rect">
@@ -2608,7 +2608,7 @@
         </p:nvSpPr>
         <p:spPr>
           <a:xfrm>
-            <a:off x="10774375" y="6382512"/>
+            <a:off x="10710367" y="6382512"/>
             <a:ext cx="914400" cy="219456"/>
           </a:xfrm>
           <a:prstGeom prst="rect">
@@ -2679,7 +2679,7 @@
         </p:nvSpPr>
         <p:spPr>
           <a:xfrm>
-            <a:off x="502920" y="457200"/>
+            <a:off x="566928" y="457200"/>
             <a:ext cx="384048" cy="384048"/>
           </a:xfrm>
           <a:prstGeom prst="ellipse">
@@ -2699,7 +2699,7 @@
         </p:nvSpPr>
         <p:spPr>
           <a:xfrm>
-            <a:off x="502920" y="457200"/>
+            <a:off x="566928" y="457200"/>
             <a:ext cx="384048" cy="384048"/>
           </a:xfrm>
           <a:prstGeom prst="rect">
@@ -2738,7 +2738,7 @@
         </p:nvSpPr>
         <p:spPr>
           <a:xfrm>
-            <a:off x="1069848" y="457200"/>
+            <a:off x="1133856" y="457200"/>
             <a:ext cx="10490911" cy="182880"/>
           </a:xfrm>
           <a:prstGeom prst="rect">
@@ -2777,7 +2777,7 @@
         </p:nvSpPr>
         <p:spPr>
           <a:xfrm>
-            <a:off x="1069848" y="640080"/>
+            <a:off x="1133856" y="640080"/>
             <a:ext cx="10490911" cy="365760"/>
           </a:xfrm>
           <a:prstGeom prst="rect">
@@ -2787,7 +2787,9 @@
           <a:ln/>
         </p:spPr>
         <p:txBody>
-          <a:bodyPr wrap="square" lIns="0" tIns="0" rIns="0" bIns="0" rtlCol="0" anchor="ctr"/>
+          <a:bodyPr wrap="square" lIns="0" tIns="0" rIns="0" bIns="0" rtlCol="0" anchor="ctr">
+            <a:normAutofit/>
+          </a:bodyPr>
           <a:lstStyle/>
           <a:p>
             <a:pPr indent="0" marL="0">
@@ -2816,7 +2818,7 @@
         </p:nvSpPr>
         <p:spPr>
           <a:xfrm>
-            <a:off x="502920" y="4937760"/>
+            <a:off x="566928" y="4937760"/>
             <a:ext cx="11057839" cy="804672"/>
           </a:xfrm>
           <a:prstGeom prst="roundRect">
@@ -2843,7 +2845,7 @@
         </p:nvSpPr>
         <p:spPr>
           <a:xfrm>
-            <a:off x="685800" y="5047488"/>
+            <a:off x="749808" y="5047488"/>
             <a:ext cx="1691640" cy="256032"/>
           </a:xfrm>
           <a:prstGeom prst="rect">
@@ -2882,7 +2884,7 @@
         </p:nvSpPr>
         <p:spPr>
           <a:xfrm>
-            <a:off x="2423160" y="5010912"/>
+            <a:off x="2487168" y="5010912"/>
             <a:ext cx="8954719" cy="658368"/>
           </a:xfrm>
           <a:prstGeom prst="rect">
@@ -2924,7 +2926,7 @@
         </p:nvSpPr>
         <p:spPr>
           <a:xfrm>
-            <a:off x="502920" y="6382512"/>
+            <a:off x="566928" y="6382512"/>
             <a:ext cx="7315200" cy="219456"/>
           </a:xfrm>
           <a:prstGeom prst="rect">
@@ -2963,7 +2965,7 @@
         </p:nvSpPr>
         <p:spPr>
           <a:xfrm>
-            <a:off x="10774375" y="6382512"/>
+            <a:off x="10710367" y="6382512"/>
             <a:ext cx="914400" cy="219456"/>
           </a:xfrm>
           <a:prstGeom prst="rect">
@@ -3034,7 +3036,7 @@
         </p:nvSpPr>
         <p:spPr>
           <a:xfrm>
-            <a:off x="502920" y="457200"/>
+            <a:off x="566928" y="457200"/>
             <a:ext cx="384048" cy="384048"/>
           </a:xfrm>
           <a:prstGeom prst="ellipse">
@@ -3054,7 +3056,7 @@
         </p:nvSpPr>
         <p:spPr>
           <a:xfrm>
-            <a:off x="502920" y="457200"/>
+            <a:off x="566928" y="457200"/>
             <a:ext cx="384048" cy="384048"/>
           </a:xfrm>
           <a:prstGeom prst="rect">
@@ -3093,7 +3095,7 @@
         </p:nvSpPr>
         <p:spPr>
           <a:xfrm>
-            <a:off x="1069848" y="457200"/>
+            <a:off x="1133856" y="457200"/>
             <a:ext cx="10490911" cy="182880"/>
           </a:xfrm>
           <a:prstGeom prst="rect">
@@ -3132,7 +3134,7 @@
         </p:nvSpPr>
         <p:spPr>
           <a:xfrm>
-            <a:off x="1069848" y="640080"/>
+            <a:off x="1133856" y="640080"/>
             <a:ext cx="10490911" cy="365760"/>
           </a:xfrm>
           <a:prstGeom prst="rect">
@@ -3142,7 +3144,9 @@
           <a:ln/>
         </p:spPr>
         <p:txBody>
-          <a:bodyPr wrap="square" lIns="0" tIns="0" rIns="0" bIns="0" rtlCol="0" anchor="ctr"/>
+          <a:bodyPr wrap="square" lIns="0" tIns="0" rIns="0" bIns="0" rtlCol="0" anchor="ctr">
+            <a:normAutofit/>
+          </a:bodyPr>
           <a:lstStyle/>
           <a:p>
             <a:pPr indent="0" marL="0">
@@ -3171,7 +3175,7 @@
         </p:nvSpPr>
         <p:spPr>
           <a:xfrm>
-            <a:off x="502920" y="1417320"/>
+            <a:off x="566928" y="1417320"/>
             <a:ext cx="5400904" cy="3657600"/>
           </a:xfrm>
           <a:prstGeom prst="roundRect">
@@ -3198,7 +3202,7 @@
         </p:nvSpPr>
         <p:spPr>
           <a:xfrm>
-            <a:off x="502920" y="1417320"/>
+            <a:off x="566928" y="1417320"/>
             <a:ext cx="5400904" cy="45720"/>
           </a:xfrm>
           <a:prstGeom prst="rect">
@@ -3218,7 +3222,7 @@
         </p:nvSpPr>
         <p:spPr>
           <a:xfrm>
-            <a:off x="731520" y="1618488"/>
+            <a:off x="795528" y="1618488"/>
             <a:ext cx="4943704" cy="292608"/>
           </a:xfrm>
           <a:prstGeom prst="rect">
@@ -3257,7 +3261,7 @@
         </p:nvSpPr>
         <p:spPr>
           <a:xfrm>
-            <a:off x="731520" y="1947672"/>
+            <a:off x="795528" y="1947672"/>
             <a:ext cx="4943704" cy="365760"/>
           </a:xfrm>
           <a:prstGeom prst="rect">
@@ -3298,7 +3302,7 @@
         </p:nvSpPr>
         <p:spPr>
           <a:xfrm>
-            <a:off x="731520" y="2377440"/>
+            <a:off x="795528" y="2377440"/>
             <a:ext cx="4943704" cy="2606040"/>
           </a:xfrm>
           <a:prstGeom prst="rect">
@@ -3343,7 +3347,7 @@
         </p:nvSpPr>
         <p:spPr>
           <a:xfrm>
-            <a:off x="6159856" y="1417320"/>
+            <a:off x="6223864" y="1417320"/>
             <a:ext cx="5400904" cy="3657600"/>
           </a:xfrm>
           <a:prstGeom prst="roundRect">
@@ -3370,7 +3374,7 @@
         </p:nvSpPr>
         <p:spPr>
           <a:xfrm>
-            <a:off x="6159856" y="1417320"/>
+            <a:off x="6223864" y="1417320"/>
             <a:ext cx="5400904" cy="45720"/>
           </a:xfrm>
           <a:prstGeom prst="rect">
@@ -3390,7 +3394,7 @@
         </p:nvSpPr>
         <p:spPr>
           <a:xfrm>
-            <a:off x="6388456" y="1618488"/>
+            <a:off x="6452464" y="1618488"/>
             <a:ext cx="4943704" cy="292608"/>
           </a:xfrm>
           <a:prstGeom prst="rect">
@@ -3429,7 +3433,7 @@
         </p:nvSpPr>
         <p:spPr>
           <a:xfrm>
-            <a:off x="6388456" y="1947672"/>
+            <a:off x="6452464" y="1947672"/>
             <a:ext cx="4943704" cy="365760"/>
           </a:xfrm>
           <a:prstGeom prst="rect">
@@ -3470,7 +3474,7 @@
         </p:nvSpPr>
         <p:spPr>
           <a:xfrm>
-            <a:off x="6388456" y="2377440"/>
+            <a:off x="6452464" y="2377440"/>
             <a:ext cx="4943704" cy="2606040"/>
           </a:xfrm>
           <a:prstGeom prst="rect">
@@ -3515,7 +3519,7 @@
         </p:nvSpPr>
         <p:spPr>
           <a:xfrm>
-            <a:off x="502920" y="5193792"/>
+            <a:off x="566928" y="5193792"/>
             <a:ext cx="11057839" cy="621792"/>
           </a:xfrm>
           <a:prstGeom prst="roundRect">
@@ -3542,7 +3546,7 @@
         </p:nvSpPr>
         <p:spPr>
           <a:xfrm>
-            <a:off x="731520" y="5193792"/>
+            <a:off x="795528" y="5193792"/>
             <a:ext cx="10600639" cy="621792"/>
           </a:xfrm>
           <a:prstGeom prst="rect">
@@ -3581,7 +3585,7 @@
         </p:nvSpPr>
         <p:spPr>
           <a:xfrm>
-            <a:off x="502920" y="6382512"/>
+            <a:off x="566928" y="6382512"/>
             <a:ext cx="7315200" cy="219456"/>
           </a:xfrm>
           <a:prstGeom prst="rect">
@@ -3620,7 +3624,7 @@
         </p:nvSpPr>
         <p:spPr>
           <a:xfrm>
-            <a:off x="10774375" y="6382512"/>
+            <a:off x="10710367" y="6382512"/>
             <a:ext cx="914400" cy="219456"/>
           </a:xfrm>
           <a:prstGeom prst="rect">
@@ -3691,7 +3695,7 @@
         </p:nvSpPr>
         <p:spPr>
           <a:xfrm>
-            <a:off x="502920" y="457200"/>
+            <a:off x="566928" y="457200"/>
             <a:ext cx="384048" cy="384048"/>
           </a:xfrm>
           <a:prstGeom prst="ellipse">
@@ -3711,7 +3715,7 @@
         </p:nvSpPr>
         <p:spPr>
           <a:xfrm>
-            <a:off x="502920" y="457200"/>
+            <a:off x="566928" y="457200"/>
             <a:ext cx="384048" cy="384048"/>
           </a:xfrm>
           <a:prstGeom prst="rect">
@@ -3750,7 +3754,7 @@
         </p:nvSpPr>
         <p:spPr>
           <a:xfrm>
-            <a:off x="1069848" y="457200"/>
+            <a:off x="1133856" y="457200"/>
             <a:ext cx="10490911" cy="182880"/>
           </a:xfrm>
           <a:prstGeom prst="rect">
@@ -3789,7 +3793,7 @@
         </p:nvSpPr>
         <p:spPr>
           <a:xfrm>
-            <a:off x="1069848" y="640080"/>
+            <a:off x="1133856" y="640080"/>
             <a:ext cx="10490911" cy="365760"/>
           </a:xfrm>
           <a:prstGeom prst="rect">
@@ -3799,6 +3803,47 @@
           <a:ln/>
         </p:spPr>
         <p:txBody>
+          <a:bodyPr wrap="square" lIns="0" tIns="0" rIns="0" bIns="0" rtlCol="0" anchor="ctr">
+            <a:normAutofit/>
+          </a:bodyPr>
+          <a:lstStyle/>
+          <a:p>
+            <a:pPr indent="0" marL="0">
+              <a:buNone/>
+            </a:pPr>
+            <a:r>
+              <a:rPr lang="en-US" sz="2300" b="1" dirty="0">
+                <a:solidFill>
+                  <a:srgbClr val="10161F"/>
+                </a:solidFill>
+                <a:latin typeface="Pretendard" pitchFamily="34" charset="0"/>
+                <a:ea typeface="Pretendard" pitchFamily="34" charset="-122"/>
+                <a:cs typeface="Pretendard" pitchFamily="34" charset="-120"/>
+              </a:rPr>
+              <a:t>실사 체크리스트</a:t>
+            </a:r>
+            <a:endParaRPr lang="en-US" sz="2300" dirty="0"/>
+          </a:p>
+        </p:txBody>
+      </p:sp>
+      <p:sp>
+        <p:nvSpPr>
+          <p:cNvPr id="6" name="Text 4"/>
+          <p:cNvSpPr/>
+          <p:nvPr/>
+        </p:nvSpPr>
+        <p:spPr>
+          <a:xfrm>
+            <a:off x="566928" y="1371600"/>
+            <a:ext cx="11057839" cy="237744"/>
+          </a:xfrm>
+          <a:prstGeom prst="rect">
+            <a:avLst/>
+          </a:prstGeom>
+          <a:noFill/>
+          <a:ln/>
+        </p:spPr>
+        <p:txBody>
           <a:bodyPr wrap="square" lIns="0" tIns="0" rIns="0" bIns="0" rtlCol="0" anchor="ctr"/>
           <a:lstStyle/>
           <a:p>
@@ -3806,7 +3851,7 @@
               <a:buNone/>
             </a:pPr>
             <a:r>
-              <a:rPr lang="en-US" sz="2300" b="1" dirty="0">
+              <a:rPr lang="en-US" sz="1100" b="1" dirty="0">
                 <a:solidFill>
                   <a:srgbClr val="10161F"/>
                 </a:solidFill>
@@ -3814,45 +3859,6 @@
                 <a:ea typeface="Pretendard" pitchFamily="34" charset="-122"/>
                 <a:cs typeface="Pretendard" pitchFamily="34" charset="-120"/>
               </a:rPr>
-              <a:t>실사 체크리스트</a:t>
-            </a:r>
-            <a:endParaRPr lang="en-US" sz="2300" dirty="0"/>
-          </a:p>
-        </p:txBody>
-      </p:sp>
-      <p:sp>
-        <p:nvSpPr>
-          <p:cNvPr id="6" name="Text 4"/>
-          <p:cNvSpPr/>
-          <p:nvPr/>
-        </p:nvSpPr>
-        <p:spPr>
-          <a:xfrm>
-            <a:off x="502920" y="1371600"/>
-            <a:ext cx="11057839" cy="237744"/>
-          </a:xfrm>
-          <a:prstGeom prst="rect">
-            <a:avLst/>
-          </a:prstGeom>
-          <a:noFill/>
-          <a:ln/>
-        </p:spPr>
-        <p:txBody>
-          <a:bodyPr wrap="square" lIns="0" tIns="0" rIns="0" bIns="0" rtlCol="0" anchor="ctr"/>
-          <a:lstStyle/>
-          <a:p>
-            <a:pPr indent="0" marL="0">
-              <a:buNone/>
-            </a:pPr>
-            <a:r>
-              <a:rPr lang="en-US" sz="1100" b="1" dirty="0">
-                <a:solidFill>
-                  <a:srgbClr val="10161F"/>
-                </a:solidFill>
-                <a:latin typeface="Pretendard" pitchFamily="34" charset="0"/>
-                <a:ea typeface="Pretendard" pitchFamily="34" charset="-122"/>
-                <a:cs typeface="Pretendard" pitchFamily="34" charset="-120"/>
-              </a:rPr>
               <a:t>거래 안정성 확보를 위한 필수 법률·물리·임대차 실사 점검 항목 (총 6건)</a:t>
             </a:r>
             <a:endParaRPr lang="en-US" sz="1100" dirty="0"/>
@@ -3867,7 +3873,7 @@
         </p:nvSpPr>
         <p:spPr>
           <a:xfrm>
-            <a:off x="502920" y="1719072"/>
+            <a:off x="566928" y="1719072"/>
             <a:ext cx="5368900" cy="749808"/>
           </a:xfrm>
           <a:prstGeom prst="rect">
@@ -3892,7 +3898,7 @@
         </p:nvSpPr>
         <p:spPr>
           <a:xfrm>
-            <a:off x="640080" y="1947672"/>
+            <a:off x="704088" y="1947672"/>
             <a:ext cx="292608" cy="292608"/>
           </a:xfrm>
           <a:prstGeom prst="rect">
@@ -3912,7 +3918,7 @@
         </p:nvSpPr>
         <p:spPr>
           <a:xfrm>
-            <a:off x="640080" y="1947672"/>
+            <a:off x="704088" y="1947672"/>
             <a:ext cx="292608" cy="292608"/>
           </a:xfrm>
           <a:prstGeom prst="rect">
@@ -3951,7 +3957,7 @@
         </p:nvSpPr>
         <p:spPr>
           <a:xfrm>
-            <a:off x="1033272" y="1792224"/>
+            <a:off x="1097280" y="1792224"/>
             <a:ext cx="4710532" cy="603504"/>
           </a:xfrm>
           <a:prstGeom prst="rect">
@@ -3993,7 +3999,7 @@
         </p:nvSpPr>
         <p:spPr>
           <a:xfrm>
-            <a:off x="502920" y="2542032"/>
+            <a:off x="566928" y="2542032"/>
             <a:ext cx="5368900" cy="749808"/>
           </a:xfrm>
           <a:prstGeom prst="rect">
@@ -4018,7 +4024,7 @@
         </p:nvSpPr>
         <p:spPr>
           <a:xfrm>
-            <a:off x="640080" y="2770632"/>
+            <a:off x="704088" y="2770632"/>
             <a:ext cx="292608" cy="292608"/>
           </a:xfrm>
           <a:prstGeom prst="rect">
@@ -4038,7 +4044,7 @@
         </p:nvSpPr>
         <p:spPr>
           <a:xfrm>
-            <a:off x="640080" y="2770632"/>
+            <a:off x="704088" y="2770632"/>
             <a:ext cx="292608" cy="292608"/>
           </a:xfrm>
           <a:prstGeom prst="rect">
@@ -4077,7 +4083,7 @@
         </p:nvSpPr>
         <p:spPr>
           <a:xfrm>
-            <a:off x="1033272" y="2615184"/>
+            <a:off x="1097280" y="2615184"/>
             <a:ext cx="4710532" cy="603504"/>
           </a:xfrm>
           <a:prstGeom prst="rect">
@@ -4119,7 +4125,7 @@
         </p:nvSpPr>
         <p:spPr>
           <a:xfrm>
-            <a:off x="502920" y="3364992"/>
+            <a:off x="566928" y="3364992"/>
             <a:ext cx="5368900" cy="749808"/>
           </a:xfrm>
           <a:prstGeom prst="rect">
@@ -4144,7 +4150,7 @@
         </p:nvSpPr>
         <p:spPr>
           <a:xfrm>
-            <a:off x="640080" y="3593592"/>
+            <a:off x="704088" y="3593592"/>
             <a:ext cx="292608" cy="292608"/>
           </a:xfrm>
           <a:prstGeom prst="rect">
@@ -4164,7 +4170,7 @@
         </p:nvSpPr>
         <p:spPr>
           <a:xfrm>
-            <a:off x="640080" y="3593592"/>
+            <a:off x="704088" y="3593592"/>
             <a:ext cx="292608" cy="292608"/>
           </a:xfrm>
           <a:prstGeom prst="rect">
@@ -4203,7 +4209,7 @@
         </p:nvSpPr>
         <p:spPr>
           <a:xfrm>
-            <a:off x="1033272" y="3438144"/>
+            <a:off x="1097280" y="3438144"/>
             <a:ext cx="4710532" cy="603504"/>
           </a:xfrm>
           <a:prstGeom prst="rect">
@@ -4245,7 +4251,7 @@
         </p:nvSpPr>
         <p:spPr>
           <a:xfrm>
-            <a:off x="6191860" y="1719072"/>
+            <a:off x="6255868" y="1719072"/>
             <a:ext cx="5368900" cy="749808"/>
           </a:xfrm>
           <a:prstGeom prst="rect">
@@ -4270,7 +4276,7 @@
         </p:nvSpPr>
         <p:spPr>
           <a:xfrm>
-            <a:off x="6329020" y="1947672"/>
+            <a:off x="6393028" y="1947672"/>
             <a:ext cx="292608" cy="292608"/>
           </a:xfrm>
           <a:prstGeom prst="rect">
@@ -4290,7 +4296,7 @@
         </p:nvSpPr>
         <p:spPr>
           <a:xfrm>
-            <a:off x="6329020" y="1947672"/>
+            <a:off x="6393028" y="1947672"/>
             <a:ext cx="292608" cy="292608"/>
           </a:xfrm>
           <a:prstGeom prst="rect">
@@ -4329,7 +4335,7 @@
         </p:nvSpPr>
         <p:spPr>
           <a:xfrm>
-            <a:off x="6722212" y="1792224"/>
+            <a:off x="6786220" y="1792224"/>
             <a:ext cx="4710532" cy="603504"/>
           </a:xfrm>
           <a:prstGeom prst="rect">
@@ -4371,7 +4377,7 @@
         </p:nvSpPr>
         <p:spPr>
           <a:xfrm>
-            <a:off x="6191860" y="2542032"/>
+            <a:off x="6255868" y="2542032"/>
             <a:ext cx="5368900" cy="749808"/>
           </a:xfrm>
           <a:prstGeom prst="rect">
@@ -4396,7 +4402,7 @@
         </p:nvSpPr>
         <p:spPr>
           <a:xfrm>
-            <a:off x="6329020" y="2770632"/>
+            <a:off x="6393028" y="2770632"/>
             <a:ext cx="292608" cy="292608"/>
           </a:xfrm>
           <a:prstGeom prst="rect">
@@ -4416,7 +4422,7 @@
         </p:nvSpPr>
         <p:spPr>
           <a:xfrm>
-            <a:off x="6329020" y="2770632"/>
+            <a:off x="6393028" y="2770632"/>
             <a:ext cx="292608" cy="292608"/>
           </a:xfrm>
           <a:prstGeom prst="rect">
@@ -4455,7 +4461,7 @@
         </p:nvSpPr>
         <p:spPr>
           <a:xfrm>
-            <a:off x="6722212" y="2615184"/>
+            <a:off x="6786220" y="2615184"/>
             <a:ext cx="4710532" cy="603504"/>
           </a:xfrm>
           <a:prstGeom prst="rect">
@@ -4497,7 +4503,7 @@
         </p:nvSpPr>
         <p:spPr>
           <a:xfrm>
-            <a:off x="6191860" y="3364992"/>
+            <a:off x="6255868" y="3364992"/>
             <a:ext cx="5368900" cy="749808"/>
           </a:xfrm>
           <a:prstGeom prst="rect">
@@ -4522,7 +4528,7 @@
         </p:nvSpPr>
         <p:spPr>
           <a:xfrm>
-            <a:off x="6329020" y="3593592"/>
+            <a:off x="6393028" y="3593592"/>
             <a:ext cx="292608" cy="292608"/>
           </a:xfrm>
           <a:prstGeom prst="rect">
@@ -4542,7 +4548,7 @@
         </p:nvSpPr>
         <p:spPr>
           <a:xfrm>
-            <a:off x="6329020" y="3593592"/>
+            <a:off x="6393028" y="3593592"/>
             <a:ext cx="292608" cy="292608"/>
           </a:xfrm>
           <a:prstGeom prst="rect">
@@ -4581,7 +4587,7 @@
         </p:nvSpPr>
         <p:spPr>
           <a:xfrm>
-            <a:off x="6722212" y="3438144"/>
+            <a:off x="6786220" y="3438144"/>
             <a:ext cx="4710532" cy="603504"/>
           </a:xfrm>
           <a:prstGeom prst="rect">
@@ -4623,7 +4629,7 @@
         </p:nvSpPr>
         <p:spPr>
           <a:xfrm>
-            <a:off x="502920" y="5349240"/>
+            <a:off x="566928" y="5349240"/>
             <a:ext cx="11057839" cy="457200"/>
           </a:xfrm>
           <a:prstGeom prst="rect">
@@ -4643,7 +4649,7 @@
         </p:nvSpPr>
         <p:spPr>
           <a:xfrm>
-            <a:off x="685800" y="5422392"/>
+            <a:off x="749808" y="5422392"/>
             <a:ext cx="10692079" cy="310896"/>
           </a:xfrm>
           <a:prstGeom prst="rect">
@@ -4682,7 +4688,7 @@
         </p:nvSpPr>
         <p:spPr>
           <a:xfrm>
-            <a:off x="502920" y="6382512"/>
+            <a:off x="566928" y="6382512"/>
             <a:ext cx="7315200" cy="219456"/>
           </a:xfrm>
           <a:prstGeom prst="rect">
@@ -4721,7 +4727,7 @@
         </p:nvSpPr>
         <p:spPr>
           <a:xfrm>
-            <a:off x="10774375" y="6382512"/>
+            <a:off x="10710367" y="6382512"/>
             <a:ext cx="914400" cy="219456"/>
           </a:xfrm>
           <a:prstGeom prst="rect">
@@ -4792,7 +4798,7 @@
         </p:nvSpPr>
         <p:spPr>
           <a:xfrm>
-            <a:off x="502920" y="457200"/>
+            <a:off x="566928" y="457200"/>
             <a:ext cx="384048" cy="384048"/>
           </a:xfrm>
           <a:prstGeom prst="ellipse">
@@ -4812,7 +4818,7 @@
         </p:nvSpPr>
         <p:spPr>
           <a:xfrm>
-            <a:off x="502920" y="457200"/>
+            <a:off x="566928" y="457200"/>
             <a:ext cx="384048" cy="384048"/>
           </a:xfrm>
           <a:prstGeom prst="rect">
@@ -4851,7 +4857,7 @@
         </p:nvSpPr>
         <p:spPr>
           <a:xfrm>
-            <a:off x="1069848" y="457200"/>
+            <a:off x="1133856" y="457200"/>
             <a:ext cx="10490911" cy="182880"/>
           </a:xfrm>
           <a:prstGeom prst="rect">
@@ -4890,7 +4896,7 @@
         </p:nvSpPr>
         <p:spPr>
           <a:xfrm>
-            <a:off x="1069848" y="640080"/>
+            <a:off x="1133856" y="640080"/>
             <a:ext cx="10490911" cy="365760"/>
           </a:xfrm>
           <a:prstGeom prst="rect">
@@ -4900,7 +4906,9 @@
           <a:ln/>
         </p:spPr>
         <p:txBody>
-          <a:bodyPr wrap="square" lIns="0" tIns="0" rIns="0" bIns="0" rtlCol="0" anchor="ctr"/>
+          <a:bodyPr wrap="square" lIns="0" tIns="0" rIns="0" bIns="0" rtlCol="0" anchor="ctr">
+            <a:normAutofit/>
+          </a:bodyPr>
           <a:lstStyle/>
           <a:p>
             <a:pPr indent="0" marL="0">
@@ -4929,7 +4937,7 @@
         </p:nvSpPr>
         <p:spPr>
           <a:xfrm>
-            <a:off x="502920" y="1572768"/>
+            <a:off x="566928" y="1572768"/>
             <a:ext cx="11057839" cy="3200400"/>
           </a:xfrm>
           <a:prstGeom prst="roundRect">
@@ -4956,7 +4964,7 @@
         </p:nvSpPr>
         <p:spPr>
           <a:xfrm>
-            <a:off x="722376" y="1792224"/>
+            <a:off x="786384" y="1792224"/>
             <a:ext cx="438912" cy="438912"/>
           </a:xfrm>
           <a:prstGeom prst="ellipse">
@@ -4976,7 +4984,7 @@
         </p:nvSpPr>
         <p:spPr>
           <a:xfrm>
-            <a:off x="722376" y="1792224"/>
+            <a:off x="786384" y="1792224"/>
             <a:ext cx="438912" cy="438912"/>
           </a:xfrm>
           <a:prstGeom prst="rect">
@@ -5015,7 +5023,7 @@
         </p:nvSpPr>
         <p:spPr>
           <a:xfrm>
-            <a:off x="722376" y="2304288"/>
+            <a:off x="786384" y="2304288"/>
             <a:ext cx="10618927" cy="365760"/>
           </a:xfrm>
           <a:prstGeom prst="rect">
@@ -5054,7 +5062,7 @@
         </p:nvSpPr>
         <p:spPr>
           <a:xfrm>
-            <a:off x="722376" y="2761488"/>
+            <a:off x="786384" y="2761488"/>
             <a:ext cx="10618927" cy="1828800"/>
           </a:xfrm>
           <a:prstGeom prst="rect">
@@ -5110,7 +5118,7 @@
         </p:nvSpPr>
         <p:spPr>
           <a:xfrm>
-            <a:off x="502920" y="6382512"/>
+            <a:off x="566928" y="6382512"/>
             <a:ext cx="7315200" cy="219456"/>
           </a:xfrm>
           <a:prstGeom prst="rect">
@@ -5149,7 +5157,7 @@
         </p:nvSpPr>
         <p:spPr>
           <a:xfrm>
-            <a:off x="10774375" y="6382512"/>
+            <a:off x="10710367" y="6382512"/>
             <a:ext cx="914400" cy="219456"/>
           </a:xfrm>
           <a:prstGeom prst="rect">
@@ -5220,7 +5228,7 @@
         </p:nvSpPr>
         <p:spPr>
           <a:xfrm>
-            <a:off x="502920" y="457200"/>
+            <a:off x="566928" y="457200"/>
             <a:ext cx="384048" cy="384048"/>
           </a:xfrm>
           <a:prstGeom prst="ellipse">
@@ -5240,7 +5248,7 @@
         </p:nvSpPr>
         <p:spPr>
           <a:xfrm>
-            <a:off x="502920" y="457200"/>
+            <a:off x="566928" y="457200"/>
             <a:ext cx="384048" cy="384048"/>
           </a:xfrm>
           <a:prstGeom prst="rect">
@@ -5279,7 +5287,7 @@
         </p:nvSpPr>
         <p:spPr>
           <a:xfrm>
-            <a:off x="1069848" y="457200"/>
+            <a:off x="1133856" y="457200"/>
             <a:ext cx="10490911" cy="182880"/>
           </a:xfrm>
           <a:prstGeom prst="rect">
@@ -5318,7 +5326,7 @@
         </p:nvSpPr>
         <p:spPr>
           <a:xfrm>
-            <a:off x="1069848" y="658368"/>
+            <a:off x="1133856" y="658368"/>
             <a:ext cx="10490911" cy="420624"/>
           </a:xfrm>
           <a:prstGeom prst="rect">
@@ -5328,7 +5336,9 @@
           <a:ln/>
         </p:spPr>
         <p:txBody>
-          <a:bodyPr wrap="square" lIns="0" tIns="0" rIns="0" bIns="0" rtlCol="0" anchor="ctr"/>
+          <a:bodyPr wrap="square" lIns="0" tIns="0" rIns="0" bIns="0" rtlCol="0" anchor="ctr">
+            <a:normAutofit/>
+          </a:bodyPr>
           <a:lstStyle/>
           <a:p>
             <a:pPr indent="0" marL="0">
@@ -5357,7 +5367,7 @@
         </p:nvSpPr>
         <p:spPr>
           <a:xfrm>
-            <a:off x="502920" y="1463040"/>
+            <a:off x="566928" y="1463040"/>
             <a:ext cx="3588410" cy="658368"/>
           </a:xfrm>
           <a:prstGeom prst="roundRect">
@@ -5379,7 +5389,7 @@
         </p:nvSpPr>
         <p:spPr>
           <a:xfrm>
-            <a:off x="612648" y="1572768"/>
+            <a:off x="676656" y="1572768"/>
             <a:ext cx="438912" cy="438912"/>
           </a:xfrm>
           <a:prstGeom prst="ellipse">
@@ -5399,7 +5409,7 @@
         </p:nvSpPr>
         <p:spPr>
           <a:xfrm>
-            <a:off x="612648" y="1572768"/>
+            <a:off x="676656" y="1572768"/>
             <a:ext cx="438912" cy="438912"/>
           </a:xfrm>
           <a:prstGeom prst="rect">
@@ -5438,7 +5448,7 @@
         </p:nvSpPr>
         <p:spPr>
           <a:xfrm>
-            <a:off x="1161288" y="1554480"/>
+            <a:off x="1225296" y="1554480"/>
             <a:ext cx="2820314" cy="237744"/>
           </a:xfrm>
           <a:prstGeom prst="rect">
@@ -5477,7 +5487,7 @@
         </p:nvSpPr>
         <p:spPr>
           <a:xfrm>
-            <a:off x="1161288" y="1792224"/>
+            <a:off x="1225296" y="1792224"/>
             <a:ext cx="2820314" cy="256032"/>
           </a:xfrm>
           <a:prstGeom prst="rect">
@@ -5516,7 +5526,7 @@
         </p:nvSpPr>
         <p:spPr>
           <a:xfrm>
-            <a:off x="4091330" y="1600200"/>
+            <a:off x="4155338" y="1600200"/>
             <a:ext cx="146304" cy="384048"/>
           </a:xfrm>
           <a:prstGeom prst="rect">
@@ -5555,7 +5565,7 @@
         </p:nvSpPr>
         <p:spPr>
           <a:xfrm>
-            <a:off x="4237634" y="1463040"/>
+            <a:off x="4301642" y="1463040"/>
             <a:ext cx="3588410" cy="658368"/>
           </a:xfrm>
           <a:prstGeom prst="roundRect">
@@ -5577,7 +5587,7 @@
         </p:nvSpPr>
         <p:spPr>
           <a:xfrm>
-            <a:off x="4347362" y="1572768"/>
+            <a:off x="4411370" y="1572768"/>
             <a:ext cx="438912" cy="438912"/>
           </a:xfrm>
           <a:prstGeom prst="ellipse">
@@ -5597,7 +5607,7 @@
         </p:nvSpPr>
         <p:spPr>
           <a:xfrm>
-            <a:off x="4347362" y="1572768"/>
+            <a:off x="4411370" y="1572768"/>
             <a:ext cx="438912" cy="438912"/>
           </a:xfrm>
           <a:prstGeom prst="rect">
@@ -5636,7 +5646,7 @@
         </p:nvSpPr>
         <p:spPr>
           <a:xfrm>
-            <a:off x="4896002" y="1554480"/>
+            <a:off x="4960010" y="1554480"/>
             <a:ext cx="2820314" cy="237744"/>
           </a:xfrm>
           <a:prstGeom prst="rect">
@@ -5675,7 +5685,7 @@
         </p:nvSpPr>
         <p:spPr>
           <a:xfrm>
-            <a:off x="4896002" y="1792224"/>
+            <a:off x="4960010" y="1792224"/>
             <a:ext cx="2820314" cy="256032"/>
           </a:xfrm>
           <a:prstGeom prst="rect">
@@ -5714,7 +5724,7 @@
         </p:nvSpPr>
         <p:spPr>
           <a:xfrm>
-            <a:off x="7826045" y="1600200"/>
+            <a:off x="7890053" y="1600200"/>
             <a:ext cx="146304" cy="384048"/>
           </a:xfrm>
           <a:prstGeom prst="rect">
@@ -5753,7 +5763,7 @@
         </p:nvSpPr>
         <p:spPr>
           <a:xfrm>
-            <a:off x="7972349" y="1463040"/>
+            <a:off x="8036357" y="1463040"/>
             <a:ext cx="3588410" cy="658368"/>
           </a:xfrm>
           <a:prstGeom prst="roundRect">
@@ -5775,7 +5785,7 @@
         </p:nvSpPr>
         <p:spPr>
           <a:xfrm>
-            <a:off x="8082077" y="1572768"/>
+            <a:off x="8146085" y="1572768"/>
             <a:ext cx="438912" cy="438912"/>
           </a:xfrm>
           <a:prstGeom prst="ellipse">
@@ -5795,7 +5805,7 @@
         </p:nvSpPr>
         <p:spPr>
           <a:xfrm>
-            <a:off x="8082077" y="1572768"/>
+            <a:off x="8146085" y="1572768"/>
             <a:ext cx="438912" cy="438912"/>
           </a:xfrm>
           <a:prstGeom prst="rect">
@@ -5834,7 +5844,7 @@
         </p:nvSpPr>
         <p:spPr>
           <a:xfrm>
-            <a:off x="8630717" y="1554480"/>
+            <a:off x="8694725" y="1554480"/>
             <a:ext cx="2820314" cy="237744"/>
           </a:xfrm>
           <a:prstGeom prst="rect">
@@ -5873,7 +5883,7 @@
         </p:nvSpPr>
         <p:spPr>
           <a:xfrm>
-            <a:off x="8630717" y="1792224"/>
+            <a:off x="8694725" y="1792224"/>
             <a:ext cx="2820314" cy="256032"/>
           </a:xfrm>
           <a:prstGeom prst="rect">
@@ -5912,7 +5922,7 @@
         </p:nvSpPr>
         <p:spPr>
           <a:xfrm>
-            <a:off x="502920" y="2395728"/>
+            <a:off x="566928" y="2395728"/>
             <a:ext cx="5486400" cy="237744"/>
           </a:xfrm>
           <a:prstGeom prst="rect">
@@ -5951,7 +5961,7 @@
         </p:nvSpPr>
         <p:spPr>
           <a:xfrm>
-            <a:off x="502920" y="2724912"/>
+            <a:off x="566928" y="2724912"/>
             <a:ext cx="1280160" cy="292608"/>
           </a:xfrm>
           <a:prstGeom prst="roundRect">
@@ -5973,7 +5983,7 @@
         </p:nvSpPr>
         <p:spPr>
           <a:xfrm>
-            <a:off x="502920" y="2724912"/>
+            <a:off x="566928" y="2724912"/>
             <a:ext cx="1280160" cy="292608"/>
           </a:xfrm>
           <a:prstGeom prst="rect">
@@ -6012,7 +6022,7 @@
         </p:nvSpPr>
         <p:spPr>
           <a:xfrm>
-            <a:off x="1929384" y="2706624"/>
+            <a:off x="1993392" y="2706624"/>
             <a:ext cx="3840480" cy="329184"/>
           </a:xfrm>
           <a:prstGeom prst="rect">
@@ -6051,7 +6061,7 @@
         </p:nvSpPr>
         <p:spPr>
           <a:xfrm>
-            <a:off x="502920" y="3127248"/>
+            <a:off x="566928" y="3127248"/>
             <a:ext cx="1280160" cy="292608"/>
           </a:xfrm>
           <a:prstGeom prst="roundRect">
@@ -6073,7 +6083,7 @@
         </p:nvSpPr>
         <p:spPr>
           <a:xfrm>
-            <a:off x="502920" y="3127248"/>
+            <a:off x="566928" y="3127248"/>
             <a:ext cx="1280160" cy="292608"/>
           </a:xfrm>
           <a:prstGeom prst="rect">
@@ -6112,7 +6122,7 @@
         </p:nvSpPr>
         <p:spPr>
           <a:xfrm>
-            <a:off x="1929384" y="3108960"/>
+            <a:off x="1993392" y="3108960"/>
             <a:ext cx="3840480" cy="329184"/>
           </a:xfrm>
           <a:prstGeom prst="rect">
@@ -6151,7 +6161,7 @@
         </p:nvSpPr>
         <p:spPr>
           <a:xfrm>
-            <a:off x="502920" y="3529584"/>
+            <a:off x="566928" y="3529584"/>
             <a:ext cx="1280160" cy="292608"/>
           </a:xfrm>
           <a:prstGeom prst="roundRect">
@@ -6173,7 +6183,7 @@
         </p:nvSpPr>
         <p:spPr>
           <a:xfrm>
-            <a:off x="502920" y="3529584"/>
+            <a:off x="566928" y="3529584"/>
             <a:ext cx="1280160" cy="292608"/>
           </a:xfrm>
           <a:prstGeom prst="rect">
@@ -6212,7 +6222,7 @@
         </p:nvSpPr>
         <p:spPr>
           <a:xfrm>
-            <a:off x="1929384" y="3511296"/>
+            <a:off x="1993392" y="3511296"/>
             <a:ext cx="3840480" cy="329184"/>
           </a:xfrm>
           <a:prstGeom prst="rect">
@@ -6251,7 +6261,7 @@
         </p:nvSpPr>
         <p:spPr>
           <a:xfrm>
-            <a:off x="502920" y="3931920"/>
+            <a:off x="566928" y="3931920"/>
             <a:ext cx="1280160" cy="292608"/>
           </a:xfrm>
           <a:prstGeom prst="roundRect">
@@ -6273,7 +6283,7 @@
         </p:nvSpPr>
         <p:spPr>
           <a:xfrm>
-            <a:off x="502920" y="3931920"/>
+            <a:off x="566928" y="3931920"/>
             <a:ext cx="1280160" cy="292608"/>
           </a:xfrm>
           <a:prstGeom prst="rect">
@@ -6312,7 +6322,7 @@
         </p:nvSpPr>
         <p:spPr>
           <a:xfrm>
-            <a:off x="1929384" y="3913632"/>
+            <a:off x="1993392" y="3913632"/>
             <a:ext cx="3840480" cy="329184"/>
           </a:xfrm>
           <a:prstGeom prst="rect">
@@ -6351,7 +6361,7 @@
         </p:nvSpPr>
         <p:spPr>
           <a:xfrm>
-            <a:off x="502920" y="4334256"/>
+            <a:off x="566928" y="4334256"/>
             <a:ext cx="1280160" cy="292608"/>
           </a:xfrm>
           <a:prstGeom prst="roundRect">
@@ -6373,7 +6383,7 @@
         </p:nvSpPr>
         <p:spPr>
           <a:xfrm>
-            <a:off x="502920" y="4334256"/>
+            <a:off x="566928" y="4334256"/>
             <a:ext cx="1280160" cy="292608"/>
           </a:xfrm>
           <a:prstGeom prst="rect">
@@ -6412,7 +6422,7 @@
         </p:nvSpPr>
         <p:spPr>
           <a:xfrm>
-            <a:off x="1929384" y="4315968"/>
+            <a:off x="1993392" y="4315968"/>
             <a:ext cx="3840480" cy="329184"/>
           </a:xfrm>
           <a:prstGeom prst="rect">
@@ -6554,7 +6564,7 @@
         </p:nvSpPr>
         <p:spPr>
           <a:xfrm>
-            <a:off x="502920" y="5760720"/>
+            <a:off x="566928" y="5760720"/>
             <a:ext cx="11057839" cy="457200"/>
           </a:xfrm>
           <a:prstGeom prst="rect">
@@ -6574,7 +6584,7 @@
         </p:nvSpPr>
         <p:spPr>
           <a:xfrm>
-            <a:off x="685800" y="5806440"/>
+            <a:off x="749808" y="5806440"/>
             <a:ext cx="10692079" cy="365760"/>
           </a:xfrm>
           <a:prstGeom prst="rect">
@@ -6613,7 +6623,7 @@
         </p:nvSpPr>
         <p:spPr>
           <a:xfrm>
-            <a:off x="502920" y="6382512"/>
+            <a:off x="566928" y="6382512"/>
             <a:ext cx="7315200" cy="219456"/>
           </a:xfrm>
           <a:prstGeom prst="rect">
@@ -6652,7 +6662,7 @@
         </p:nvSpPr>
         <p:spPr>
           <a:xfrm>
-            <a:off x="10774375" y="6382512"/>
+            <a:off x="10710367" y="6382512"/>
             <a:ext cx="914400" cy="219456"/>
           </a:xfrm>
           <a:prstGeom prst="rect">
@@ -6723,7 +6733,7 @@
         </p:nvSpPr>
         <p:spPr>
           <a:xfrm>
-            <a:off x="502920" y="457200"/>
+            <a:off x="566928" y="457200"/>
             <a:ext cx="384048" cy="384048"/>
           </a:xfrm>
           <a:prstGeom prst="ellipse">
@@ -6743,7 +6753,7 @@
         </p:nvSpPr>
         <p:spPr>
           <a:xfrm>
-            <a:off x="502920" y="457200"/>
+            <a:off x="566928" y="457200"/>
             <a:ext cx="384048" cy="384048"/>
           </a:xfrm>
           <a:prstGeom prst="rect">
@@ -6782,7 +6792,7 @@
         </p:nvSpPr>
         <p:spPr>
           <a:xfrm>
-            <a:off x="1069848" y="457200"/>
+            <a:off x="1133856" y="457200"/>
             <a:ext cx="10490911" cy="182880"/>
           </a:xfrm>
           <a:prstGeom prst="rect">
@@ -6821,7 +6831,7 @@
         </p:nvSpPr>
         <p:spPr>
           <a:xfrm>
-            <a:off x="1069848" y="640080"/>
+            <a:off x="1133856" y="640080"/>
             <a:ext cx="10490911" cy="365760"/>
           </a:xfrm>
           <a:prstGeom prst="rect">
@@ -6831,7 +6841,9 @@
           <a:ln/>
         </p:spPr>
         <p:txBody>
-          <a:bodyPr wrap="square" lIns="0" tIns="0" rIns="0" bIns="0" rtlCol="0" anchor="ctr"/>
+          <a:bodyPr wrap="square" lIns="0" tIns="0" rIns="0" bIns="0" rtlCol="0" anchor="ctr">
+            <a:normAutofit/>
+          </a:bodyPr>
           <a:lstStyle/>
           <a:p>
             <a:pPr indent="0" marL="0">
@@ -6860,24 +6872,26 @@
         </p:nvSpPr>
         <p:spPr>
           <a:xfrm>
-            <a:off x="502920" y="1188720"/>
-            <a:ext cx="11057839" cy="457200"/>
-          </a:xfrm>
-          <a:prstGeom prst="rect">
-            <a:avLst/>
-          </a:prstGeom>
-          <a:noFill/>
-          <a:ln/>
-        </p:spPr>
-        <p:txBody>
-          <a:bodyPr wrap="square" rtlCol="0" anchor="ctr"/>
+            <a:off x="566928" y="1188720"/>
+            <a:ext cx="11057839" cy="350520"/>
+          </a:xfrm>
+          <a:prstGeom prst="rect">
+            <a:avLst/>
+          </a:prstGeom>
+          <a:noFill/>
+          <a:ln/>
+        </p:spPr>
+        <p:txBody>
+          <a:bodyPr wrap="square" lIns="0" tIns="0" rIns="0" bIns="0" rtlCol="0" anchor="ctr">
+            <a:normAutofit/>
+          </a:bodyPr>
           <a:lstStyle/>
           <a:p>
             <a:pPr indent="0" marL="0">
               <a:buNone/>
             </a:pPr>
             <a:r>
-              <a:rPr lang="en-US" sz="1500" b="1" dirty="0">
+              <a:rPr lang="en-US" sz="1200" b="1" dirty="0">
                 <a:solidFill>
                   <a:srgbClr val="10161F"/>
                 </a:solidFill>
@@ -6885,9 +6899,9 @@
                 <a:ea typeface="Pretendard" pitchFamily="34" charset="-122"/>
                 <a:cs typeface="Pretendard" pitchFamily="34" charset="-120"/>
               </a:rPr>
-              <a:t>이 건물은 이 건물은 이 건물은 이 건물은 이 건물은 이 건물은 이 건물은 이 건물은 이 건물은 이 건물은 이 건물은 이 건물은 이 건물은 이 건물은 이 건물은 이 건물은 이 건물은 이 건물은 이 건물은 이 건물은 이 건물은 이 건물은 이 건물은 이 건물은 이 건물은 이 건물은 이 건물은 이 건물은 이 건물은 이 건물은 이 건물은 이 건물은 이 건물은 이 건물은 이 건물은 이 건물은 이 건물은 이 건물은 이 건물은 이 건물은 이 건물은 이 건물은 이 건물은 이 건물은 이 건물은 이 건물은 이 건물은 이 건물은 이 건물은 이 건물은 이 건물은 이 건물은 이 건물은 이 건물은 이 건물은 이 건물은 이 건물은 이 건물은 이 건물은 이 건물은 이 건물은 이 건물은 이 건물은 이 건물은 이 건물은 이 건물은 이 건물은 이 건물은 이 건물은 이 건물은 이 건물은 이 건물은 이 건물은 이 건물은 이 건물은 이 건물은 이 건물은 이 건물은 이 건물은 이 건물은 이 건물은 이 건물은 이 건물은 이 건물은 이 건물은 이 건물은 이 건물은 이 건물은 이 건물은 이 건물은 이 건물은 이 건물은 이 건물은 이 건물은 이 건물은 이 건물은 이 건물은 이 건물은 이 건물은 이 건물은 이 건물은 이 건물은 이 건물은 이 건물은 이 건물은 이 건물은 이 건물은 이 건물은 이 건물은 이 건물은 이 건물은 이 건물은 이 건물은 이 건물은 이 건물은 이 건물은 이 건물은 이 건물은 이 건물은 이 건물은 이 건물은 이 건물은 이 건물은 이 건물은 이 건물은 이 건물은 이 건물은 이 건물은 이 건물은 이 건물은 이 건물은 이 건물은 이 건물은 이 건물은 이 건물은 이 건물은 이 건물은 이 건물은 이 건물은 이 건물은 이 건물은 이 건물은 이 건물은 이 건물은 이 건물은 이 건물은 이 건물은 이 건물은 이 건물은 이 건물은 이 건물은 이 건물은 이 건물은 이 건물은 이 건물은 이 건물은 이 건물은 이 건물은 이 건물은 이 건물은 이 건물은 이 건물은 이 건물은 이 건물은 이 건물은 이 건물은 이 건물은 이 건물은 이 건물은 이 건물은 이 건물은 이 건물은 이 건물은 이 건물은 이 건물은 이 건물은 이 건물은 이 건물은 이 건물은 이 건물은 이 건물은 이 건물은 이 건물은 이 건물은 이 건물은 이 건물은 이 건물은 이 건물은 이 건물은 이 건물은 이 건물은 이 건물은 이 건물은 이 건물은 이 건물은 이 건물은 이 건물은 이 건물은 이 건물은 이 건물은 이 건물은 이 건물은 이 건물은 이 건물은 이 건물은 이 건물은 이 건물은 이 건물은 이 건물은 이 건물은 이 건물은 이 건물은 이 건물은 이 건물은 이 건물은 이 건물은 이 건물은 이 건물은 이 건물은 이 건물은 이 건물은 이 건물은 이 건물은 이 건물은 이 건물은 이 건물은 이 건물은 이 건물은 이 건물은 이 건물은 이 건물은 이 건물은 이 건물은 이 건물은 이 건물은 이 건물은 이 건물은 이 건물은 이 건물은 이 건물은 이 건물은 이 건물은 이 건물은 이 건물은 이 건물은 이 건물은 이 건물은 이 건물은 이 건물은 이 건물은 이 건물은 이 건물은 이 건물은 이 건물은 이 건물은 이 건물은 이 건물은 이 건물은 이 건물은 이 건물은 이 건물은 이 건물은 이 건물은 이 건물은 이 건물은 이 건물은 이 건물은 이 건물은 이 건물은 이 건물은 이 건물은 이 건물은 이 건물은 이 건물은 이 건물은 이 건물은 이 건물은 이 건물은 이 건물은 이 건물은 이 건물은 이 건물은 이 건물은 이 건물은 이 건물은 이 건물은 이 건물은 이 건물은 이 건물은 이 건물은 이 건물은 이 건물은 이 건물은 이 건물은 이 건물은 이 건물은 이 건물은 이 건물은 이 건물은 이 건물은 이 건물은 이 건물은 이 건물은 이 건물은 이 건물은 이 건물은 이 건물은 이 건물은 이 건물은 이 건물은 이 건물은 이 건물은 이 건물은 이 건물은 이 건물은 이 건물은 이 건물은 이 건물은 이 건물은 이 건물은 이 건물은 이 건물은 이 건물은 이 건물은 이 건물은 이 건물은 이 건물은 이 건물은 이 건물은 이 건물은 이 건물은 이 건물은 이 건물은 이 건물은 이 건물은 이 건물은 이 건물은 이 건물은 이 건물은 이 건물은 이 건물은 이 건물은 이 건물은 이 건물은 이 건물은 이 건물은 이 건물은 이 건물은 이 건물은 이 건물은 이 건물은 이 건물은 이 건물은 이 건물은 이 건물은 이 건물은 이 건물은 이 건물은 이 건물은 이 건물은 이 건물은 이 건물은 이 건물은 이 건물은 이 건물은 이 건물은 이 건물은 이 건물은 이 건물은 이 건물은 이 건물은 이 건물은 이 건물은 이 건물은 이 건물은 이 건물은 이 건물은 이 건물은 이 건물은 이 건물은 이 건물은 이 건물은 이 건물은 이 건물은 이 건물은 이 건물은 이 건물은 이 건물은 이 건물은 이 건물은 이 건물은 이 건물은 이 건물은 이 건물은 이 건물은 이 건물은 이 건물은 이 건물은 이 건물은 이 건물은 이 건물은 이 건물은 이 건물은 이 건물은 이 건물은 이 건물은 이 건물은 이 건물은 이 건물은 이 건물은 이 건물은 이 건물은 이 건물은 이 건물은 이 건물은 이 건물은 이 건물은 이 건물은 이 건물은 이 건물은 이 건물은 이 건물은 이 건물은 이 건물은 이 건물은 이 건물은 이 건물은 이 건물은 이 건물은 이 건물은 이 건물은 이 건물은 이 건물은 이 건물은 이 건물은 이 건물은 이 건물은 이 건물은 이 건물은 이 건물은 이 건물은 이 건물은 이 건물은 이 건물은 이 건물은 이 건물은 이 건물은 이 건물은 이 건물은 이 건물은 이 건물은 이 건물은 이 건물은 이 건물은 이 건물은 이 건물은 이 건물은 이 건물은 이 건물은 이 건물은 이 건물은 이 건물은 이 건물은 이 건물은 이 건물은 이 건물은 이 건물은 이 건물은 이 건물은 이 건물은 이 건물은 이 건물은 이 건물은 이 건물은 이 건물은 이 건물은 이 건물은 이 건물은 이 건물은 이 건물은 이 건물은 이 건물은 이 건물은 이 건물은 이 건물은 이 건물은 이 건물은 이 건물은 이 건물은 이 건물은 이 건물은 이 건물은 이 건물은 이 건물은 이 건물은 이 건물은 이 건물은 이 건물은 이 건물은 이 건물은 매우 우수한 투자 물건입니다.</a:t>
-            </a:r>
-            <a:endParaRPr lang="en-US" sz="1500" dirty="0"/>
+              <a:t>이 건물은 이 건물은 이 건물은 이 건물은 이 건물은 이 건물은 이 건물은 이 건물은 이 건물은 이 건물은 이 건물은 이 건물은 이 건물은 이 건물은 이 건물은 이 건물은 이 건물은 이 건물은 이 건물은 이 건물은 이 건물은 이 건물은 이 건물은 이 건물은 이 건물은 이 건물은 이 건물은 이 건물은 이 건물은 이 건물은 이 건물은…</a:t>
+            </a:r>
+            <a:endParaRPr lang="en-US" sz="1200" dirty="0"/>
           </a:p>
         </p:txBody>
       </p:sp>
@@ -6899,7 +6913,7 @@
         </p:nvSpPr>
         <p:spPr>
           <a:xfrm>
-            <a:off x="502920" y="1691640"/>
+            <a:off x="566928" y="1612392"/>
             <a:ext cx="11057839" cy="0"/>
           </a:xfrm>
           <a:prstGeom prst="line">
@@ -6922,7 +6936,7 @@
         </p:nvSpPr>
         <p:spPr>
           <a:xfrm>
-            <a:off x="502920" y="1965960"/>
+            <a:off x="566928" y="1749552"/>
             <a:ext cx="2641016" cy="960120"/>
           </a:xfrm>
           <a:prstGeom prst="roundRect">
@@ -6949,7 +6963,7 @@
         </p:nvSpPr>
         <p:spPr>
           <a:xfrm>
-            <a:off x="667512" y="2093976"/>
+            <a:off x="731520" y="1877568"/>
             <a:ext cx="2311832" cy="201168"/>
           </a:xfrm>
           <a:prstGeom prst="rect">
@@ -6959,7 +6973,9 @@
           <a:ln/>
         </p:spPr>
         <p:txBody>
-          <a:bodyPr wrap="square" lIns="0" tIns="0" rIns="0" bIns="0" rtlCol="0" anchor="ctr"/>
+          <a:bodyPr wrap="square" lIns="0" tIns="0" rIns="0" bIns="0" rtlCol="0" anchor="ctr">
+            <a:normAutofit/>
+          </a:bodyPr>
           <a:lstStyle/>
           <a:p>
             <a:pPr indent="0" marL="0">
@@ -6988,8 +7004,8 @@
         </p:nvSpPr>
         <p:spPr>
           <a:xfrm>
-            <a:off x="667512" y="2313432"/>
-            <a:ext cx="2311832" cy="274320"/>
+            <a:off x="731520" y="2097024"/>
+            <a:ext cx="2311832" cy="279400"/>
           </a:xfrm>
           <a:prstGeom prst="rect">
             <a:avLst/>
@@ -7032,7 +7048,7 @@
         </p:nvSpPr>
         <p:spPr>
           <a:xfrm>
-            <a:off x="3308528" y="1965960"/>
+            <a:off x="3372536" y="1749552"/>
             <a:ext cx="2641016" cy="960120"/>
           </a:xfrm>
           <a:prstGeom prst="roundRect">
@@ -7059,7 +7075,7 @@
         </p:nvSpPr>
         <p:spPr>
           <a:xfrm>
-            <a:off x="3473120" y="2093976"/>
+            <a:off x="3537128" y="1877568"/>
             <a:ext cx="2311832" cy="201168"/>
           </a:xfrm>
           <a:prstGeom prst="rect">
@@ -7069,7 +7085,9 @@
           <a:ln/>
         </p:spPr>
         <p:txBody>
-          <a:bodyPr wrap="square" lIns="0" tIns="0" rIns="0" bIns="0" rtlCol="0" anchor="ctr"/>
+          <a:bodyPr wrap="square" lIns="0" tIns="0" rIns="0" bIns="0" rtlCol="0" anchor="ctr">
+            <a:normAutofit/>
+          </a:bodyPr>
           <a:lstStyle/>
           <a:p>
             <a:pPr indent="0" marL="0">
@@ -7098,8 +7116,8 @@
         </p:nvSpPr>
         <p:spPr>
           <a:xfrm>
-            <a:off x="3473120" y="2313432"/>
-            <a:ext cx="2311832" cy="274320"/>
+            <a:off x="3537128" y="2097024"/>
+            <a:ext cx="2311832" cy="279400"/>
           </a:xfrm>
           <a:prstGeom prst="rect">
             <a:avLst/>
@@ -7142,7 +7160,7 @@
         </p:nvSpPr>
         <p:spPr>
           <a:xfrm>
-            <a:off x="6114136" y="1965960"/>
+            <a:off x="6178144" y="1749552"/>
             <a:ext cx="2641016" cy="960120"/>
           </a:xfrm>
           <a:prstGeom prst="roundRect">
@@ -7169,7 +7187,7 @@
         </p:nvSpPr>
         <p:spPr>
           <a:xfrm>
-            <a:off x="6278728" y="2093976"/>
+            <a:off x="6342736" y="1877568"/>
             <a:ext cx="2311832" cy="201168"/>
           </a:xfrm>
           <a:prstGeom prst="rect">
@@ -7179,7 +7197,9 @@
           <a:ln/>
         </p:spPr>
         <p:txBody>
-          <a:bodyPr wrap="square" lIns="0" tIns="0" rIns="0" bIns="0" rtlCol="0" anchor="ctr"/>
+          <a:bodyPr wrap="square" lIns="0" tIns="0" rIns="0" bIns="0" rtlCol="0" anchor="ctr">
+            <a:normAutofit/>
+          </a:bodyPr>
           <a:lstStyle/>
           <a:p>
             <a:pPr indent="0" marL="0">
@@ -7208,8 +7228,8 @@
         </p:nvSpPr>
         <p:spPr>
           <a:xfrm>
-            <a:off x="6278728" y="2313432"/>
-            <a:ext cx="2311832" cy="274320"/>
+            <a:off x="6342736" y="2097024"/>
+            <a:ext cx="2311832" cy="279400"/>
           </a:xfrm>
           <a:prstGeom prst="rect">
             <a:avLst/>
@@ -7252,7 +7272,7 @@
         </p:nvSpPr>
         <p:spPr>
           <a:xfrm>
-            <a:off x="8919743" y="1965960"/>
+            <a:off x="8983751" y="1749552"/>
             <a:ext cx="2641016" cy="960120"/>
           </a:xfrm>
           <a:prstGeom prst="roundRect">
@@ -7279,7 +7299,7 @@
         </p:nvSpPr>
         <p:spPr>
           <a:xfrm>
-            <a:off x="9084335" y="2093976"/>
+            <a:off x="9148343" y="1877568"/>
             <a:ext cx="2311832" cy="201168"/>
           </a:xfrm>
           <a:prstGeom prst="rect">
@@ -7289,7 +7309,9 @@
           <a:ln/>
         </p:spPr>
         <p:txBody>
-          <a:bodyPr wrap="square" lIns="0" tIns="0" rIns="0" bIns="0" rtlCol="0" anchor="ctr"/>
+          <a:bodyPr wrap="square" lIns="0" tIns="0" rIns="0" bIns="0" rtlCol="0" anchor="ctr">
+            <a:normAutofit/>
+          </a:bodyPr>
           <a:lstStyle/>
           <a:p>
             <a:pPr indent="0" marL="0">
@@ -7318,8 +7340,8 @@
         </p:nvSpPr>
         <p:spPr>
           <a:xfrm>
-            <a:off x="9084335" y="2313432"/>
-            <a:ext cx="2311832" cy="274320"/>
+            <a:off x="9148343" y="2097024"/>
+            <a:ext cx="2311832" cy="279400"/>
           </a:xfrm>
           <a:prstGeom prst="rect">
             <a:avLst/>
@@ -7362,7 +7384,7 @@
         </p:nvSpPr>
         <p:spPr>
           <a:xfrm>
-            <a:off x="502920" y="3090672"/>
+            <a:off x="566928" y="2874264"/>
             <a:ext cx="2641016" cy="960120"/>
           </a:xfrm>
           <a:prstGeom prst="roundRect">
@@ -7389,7 +7411,7 @@
         </p:nvSpPr>
         <p:spPr>
           <a:xfrm>
-            <a:off x="667512" y="3218688"/>
+            <a:off x="731520" y="3002280"/>
             <a:ext cx="2311832" cy="201168"/>
           </a:xfrm>
           <a:prstGeom prst="rect">
@@ -7399,7 +7421,9 @@
           <a:ln/>
         </p:spPr>
         <p:txBody>
-          <a:bodyPr wrap="square" lIns="0" tIns="0" rIns="0" bIns="0" rtlCol="0" anchor="ctr"/>
+          <a:bodyPr wrap="square" lIns="0" tIns="0" rIns="0" bIns="0" rtlCol="0" anchor="ctr">
+            <a:normAutofit/>
+          </a:bodyPr>
           <a:lstStyle/>
           <a:p>
             <a:pPr indent="0" marL="0">
@@ -7428,8 +7452,8 @@
         </p:nvSpPr>
         <p:spPr>
           <a:xfrm>
-            <a:off x="667512" y="3438144"/>
-            <a:ext cx="2311832" cy="274320"/>
+            <a:off x="731520" y="3221736"/>
+            <a:ext cx="2311832" cy="279400"/>
           </a:xfrm>
           <a:prstGeom prst="rect">
             <a:avLst/>
@@ -7472,7 +7496,7 @@
         </p:nvSpPr>
         <p:spPr>
           <a:xfrm>
-            <a:off x="3308528" y="3090672"/>
+            <a:off x="3372536" y="2874264"/>
             <a:ext cx="2641016" cy="960120"/>
           </a:xfrm>
           <a:prstGeom prst="roundRect">
@@ -7499,7 +7523,7 @@
         </p:nvSpPr>
         <p:spPr>
           <a:xfrm>
-            <a:off x="3473120" y="3218688"/>
+            <a:off x="3537128" y="3002280"/>
             <a:ext cx="2311832" cy="201168"/>
           </a:xfrm>
           <a:prstGeom prst="rect">
@@ -7509,7 +7533,9 @@
           <a:ln/>
         </p:spPr>
         <p:txBody>
-          <a:bodyPr wrap="square" lIns="0" tIns="0" rIns="0" bIns="0" rtlCol="0" anchor="ctr"/>
+          <a:bodyPr wrap="square" lIns="0" tIns="0" rIns="0" bIns="0" rtlCol="0" anchor="ctr">
+            <a:normAutofit/>
+          </a:bodyPr>
           <a:lstStyle/>
           <a:p>
             <a:pPr indent="0" marL="0">
@@ -7538,8 +7564,8 @@
         </p:nvSpPr>
         <p:spPr>
           <a:xfrm>
-            <a:off x="3473120" y="3438144"/>
-            <a:ext cx="2311832" cy="274320"/>
+            <a:off x="3537128" y="3221736"/>
+            <a:ext cx="2311832" cy="279400"/>
           </a:xfrm>
           <a:prstGeom prst="rect">
             <a:avLst/>
@@ -7582,7 +7608,7 @@
         </p:nvSpPr>
         <p:spPr>
           <a:xfrm>
-            <a:off x="6114136" y="3090672"/>
+            <a:off x="6178144" y="2874264"/>
             <a:ext cx="2641016" cy="960120"/>
           </a:xfrm>
           <a:prstGeom prst="roundRect">
@@ -7609,7 +7635,7 @@
         </p:nvSpPr>
         <p:spPr>
           <a:xfrm>
-            <a:off x="6278728" y="3218688"/>
+            <a:off x="6342736" y="3002280"/>
             <a:ext cx="2311832" cy="201168"/>
           </a:xfrm>
           <a:prstGeom prst="rect">
@@ -7619,7 +7645,9 @@
           <a:ln/>
         </p:spPr>
         <p:txBody>
-          <a:bodyPr wrap="square" lIns="0" tIns="0" rIns="0" bIns="0" rtlCol="0" anchor="ctr"/>
+          <a:bodyPr wrap="square" lIns="0" tIns="0" rIns="0" bIns="0" rtlCol="0" anchor="ctr">
+            <a:normAutofit/>
+          </a:bodyPr>
           <a:lstStyle/>
           <a:p>
             <a:pPr indent="0" marL="0">
@@ -7648,8 +7676,8 @@
         </p:nvSpPr>
         <p:spPr>
           <a:xfrm>
-            <a:off x="6278728" y="3438144"/>
-            <a:ext cx="2311832" cy="274320"/>
+            <a:off x="6342736" y="3221736"/>
+            <a:ext cx="2311832" cy="279400"/>
           </a:xfrm>
           <a:prstGeom prst="rect">
             <a:avLst/>
@@ -7692,7 +7720,7 @@
         </p:nvSpPr>
         <p:spPr>
           <a:xfrm>
-            <a:off x="8919743" y="3090672"/>
+            <a:off x="8983751" y="2874264"/>
             <a:ext cx="2641016" cy="960120"/>
           </a:xfrm>
           <a:prstGeom prst="roundRect">
@@ -7719,7 +7747,7 @@
         </p:nvSpPr>
         <p:spPr>
           <a:xfrm>
-            <a:off x="9084335" y="3218688"/>
+            <a:off x="9148343" y="3002280"/>
             <a:ext cx="2311832" cy="201168"/>
           </a:xfrm>
           <a:prstGeom prst="rect">
@@ -7729,7 +7757,9 @@
           <a:ln/>
         </p:spPr>
         <p:txBody>
-          <a:bodyPr wrap="square" lIns="0" tIns="0" rIns="0" bIns="0" rtlCol="0" anchor="ctr"/>
+          <a:bodyPr wrap="square" lIns="0" tIns="0" rIns="0" bIns="0" rtlCol="0" anchor="ctr">
+            <a:normAutofit/>
+          </a:bodyPr>
           <a:lstStyle/>
           <a:p>
             <a:pPr indent="0" marL="0">
@@ -7758,8 +7788,8 @@
         </p:nvSpPr>
         <p:spPr>
           <a:xfrm>
-            <a:off x="9084335" y="3438144"/>
-            <a:ext cx="2311832" cy="274320"/>
+            <a:off x="9148343" y="3221736"/>
+            <a:ext cx="2311832" cy="279400"/>
           </a:xfrm>
           <a:prstGeom prst="rect">
             <a:avLst/>
@@ -7802,7 +7832,7 @@
         </p:nvSpPr>
         <p:spPr>
           <a:xfrm>
-            <a:off x="502920" y="4306824"/>
+            <a:off x="566928" y="4090416"/>
             <a:ext cx="11057839" cy="274320"/>
           </a:xfrm>
           <a:prstGeom prst="rect">
@@ -7841,12 +7871,12 @@
         </p:nvSpPr>
         <p:spPr>
           <a:xfrm>
-            <a:off x="502920" y="4636008"/>
-            <a:ext cx="11057839" cy="396240"/>
+            <a:off x="566928" y="4419600"/>
+            <a:ext cx="11057839" cy="468376"/>
           </a:xfrm>
           <a:prstGeom prst="roundRect">
             <a:avLst>
-              <a:gd name="adj" fmla="val 11538"/>
+              <a:gd name="adj" fmla="val 9761"/>
             </a:avLst>
           </a:prstGeom>
           <a:solidFill>
@@ -7868,12 +7898,12 @@
         </p:nvSpPr>
         <p:spPr>
           <a:xfrm>
-            <a:off x="612648" y="4709160"/>
-            <a:ext cx="411480" cy="249936"/>
+            <a:off x="676656" y="4492752"/>
+            <a:ext cx="411480" cy="322072"/>
           </a:xfrm>
           <a:prstGeom prst="roundRect">
             <a:avLst>
-              <a:gd name="adj" fmla="val 14634"/>
+              <a:gd name="adj" fmla="val 11356"/>
             </a:avLst>
           </a:prstGeom>
           <a:solidFill>
@@ -7895,8 +7925,8 @@
         </p:nvSpPr>
         <p:spPr>
           <a:xfrm>
-            <a:off x="612648" y="4709160"/>
-            <a:ext cx="411480" cy="249936"/>
+            <a:off x="676656" y="4492752"/>
+            <a:ext cx="411480" cy="322072"/>
           </a:xfrm>
           <a:prstGeom prst="rect">
             <a:avLst/>
@@ -7934,8 +7964,8 @@
         </p:nvSpPr>
         <p:spPr>
           <a:xfrm>
-            <a:off x="1143000" y="4672584"/>
-            <a:ext cx="10280599" cy="323088"/>
+            <a:off x="1207008" y="4456176"/>
+            <a:ext cx="10280599" cy="395224"/>
           </a:xfrm>
           <a:prstGeom prst="rect">
             <a:avLst/>
@@ -7951,7 +7981,7 @@
               <a:buNone/>
             </a:pPr>
             <a:r>
-              <a:rPr lang="en-US" sz="1000" dirty="0">
+              <a:rPr lang="en-US" sz="1150" dirty="0">
                 <a:solidFill>
                   <a:srgbClr val="10161F"/>
                 </a:solidFill>
@@ -7961,7 +7991,7 @@
               </a:rPr>
               <a:t>입지 가치: 대중교통 역세권 입지, 해당 권역 업무·상업 중심지 배후 수요 확보</a:t>
             </a:r>
-            <a:endParaRPr lang="en-US" sz="1000" dirty="0"/>
+            <a:endParaRPr lang="en-US" sz="1150" dirty="0"/>
           </a:p>
         </p:txBody>
       </p:sp>
@@ -7973,12 +8003,12 @@
         </p:nvSpPr>
         <p:spPr>
           <a:xfrm>
-            <a:off x="502920" y="5114544"/>
-            <a:ext cx="11057839" cy="396240"/>
+            <a:off x="566928" y="4970272"/>
+            <a:ext cx="11057839" cy="468376"/>
           </a:xfrm>
           <a:prstGeom prst="roundRect">
             <a:avLst>
-              <a:gd name="adj" fmla="val 11538"/>
+              <a:gd name="adj" fmla="val 9761"/>
             </a:avLst>
           </a:prstGeom>
           <a:solidFill>
@@ -8000,12 +8030,12 @@
         </p:nvSpPr>
         <p:spPr>
           <a:xfrm>
-            <a:off x="612648" y="5187696"/>
-            <a:ext cx="411480" cy="249936"/>
+            <a:off x="676656" y="5043424"/>
+            <a:ext cx="411480" cy="322072"/>
           </a:xfrm>
           <a:prstGeom prst="roundRect">
             <a:avLst>
-              <a:gd name="adj" fmla="val 14634"/>
+              <a:gd name="adj" fmla="val 11356"/>
             </a:avLst>
           </a:prstGeom>
           <a:solidFill>
@@ -8027,8 +8057,8 @@
         </p:nvSpPr>
         <p:spPr>
           <a:xfrm>
-            <a:off x="612648" y="5187696"/>
-            <a:ext cx="411480" cy="249936"/>
+            <a:off x="676656" y="5043424"/>
+            <a:ext cx="411480" cy="322072"/>
           </a:xfrm>
           <a:prstGeom prst="rect">
             <a:avLst/>
@@ -8066,8 +8096,8 @@
         </p:nvSpPr>
         <p:spPr>
           <a:xfrm>
-            <a:off x="1143000" y="5151120"/>
-            <a:ext cx="10280599" cy="323088"/>
+            <a:off x="1207008" y="5006848"/>
+            <a:ext cx="10280599" cy="395224"/>
           </a:xfrm>
           <a:prstGeom prst="rect">
             <a:avLst/>
@@ -8083,7 +8113,7 @@
               <a:buNone/>
             </a:pPr>
             <a:r>
-              <a:rPr lang="en-US" sz="1000" dirty="0">
+              <a:rPr lang="en-US" sz="1150" dirty="0">
                 <a:solidFill>
                   <a:srgbClr val="10161F"/>
                 </a:solidFill>
@@ -8093,7 +8123,7 @@
               </a:rPr>
               <a:t>자산 규모: 해당 권역 소재 단독 빌딩 매입 기회</a:t>
             </a:r>
-            <a:endParaRPr lang="en-US" sz="1000" dirty="0"/>
+            <a:endParaRPr lang="en-US" sz="1150" dirty="0"/>
           </a:p>
         </p:txBody>
       </p:sp>
@@ -8105,12 +8135,12 @@
         </p:nvSpPr>
         <p:spPr>
           <a:xfrm>
-            <a:off x="502920" y="5593080"/>
-            <a:ext cx="11057839" cy="396240"/>
+            <a:off x="566928" y="5520944"/>
+            <a:ext cx="11057839" cy="468376"/>
           </a:xfrm>
           <a:prstGeom prst="roundRect">
             <a:avLst>
-              <a:gd name="adj" fmla="val 11538"/>
+              <a:gd name="adj" fmla="val 9761"/>
             </a:avLst>
           </a:prstGeom>
           <a:solidFill>
@@ -8132,12 +8162,12 @@
         </p:nvSpPr>
         <p:spPr>
           <a:xfrm>
-            <a:off x="612648" y="5666232"/>
-            <a:ext cx="411480" cy="249936"/>
+            <a:off x="676656" y="5594096"/>
+            <a:ext cx="411480" cy="322072"/>
           </a:xfrm>
           <a:prstGeom prst="roundRect">
             <a:avLst>
-              <a:gd name="adj" fmla="val 14634"/>
+              <a:gd name="adj" fmla="val 11356"/>
             </a:avLst>
           </a:prstGeom>
           <a:solidFill>
@@ -8159,8 +8189,8 @@
         </p:nvSpPr>
         <p:spPr>
           <a:xfrm>
-            <a:off x="612648" y="5666232"/>
-            <a:ext cx="411480" cy="249936"/>
+            <a:off x="676656" y="5594096"/>
+            <a:ext cx="411480" cy="322072"/>
           </a:xfrm>
           <a:prstGeom prst="rect">
             <a:avLst/>
@@ -8198,8 +8228,8 @@
         </p:nvSpPr>
         <p:spPr>
           <a:xfrm>
-            <a:off x="1143000" y="5629656"/>
-            <a:ext cx="10280599" cy="323088"/>
+            <a:off x="1207008" y="5557520"/>
+            <a:ext cx="10280599" cy="395224"/>
           </a:xfrm>
           <a:prstGeom prst="rect">
             <a:avLst/>
@@ -8215,7 +8245,7 @@
               <a:buNone/>
             </a:pPr>
             <a:r>
-              <a:rPr lang="en-US" sz="1000" dirty="0">
+              <a:rPr lang="en-US" sz="1150" dirty="0">
                 <a:solidFill>
                   <a:srgbClr val="10161F"/>
                 </a:solidFill>
@@ -8225,7 +8255,7 @@
               </a:rPr>
               <a:t>수익 안정성: 안정적 임대수익 기반 투자 매물</a:t>
             </a:r>
-            <a:endParaRPr lang="en-US" sz="1000" dirty="0"/>
+            <a:endParaRPr lang="en-US" sz="1150" dirty="0"/>
           </a:p>
         </p:txBody>
       </p:sp>
@@ -8237,7 +8267,7 @@
         </p:nvSpPr>
         <p:spPr>
           <a:xfrm>
-            <a:off x="502920" y="6382512"/>
+            <a:off x="566928" y="6382512"/>
             <a:ext cx="7315200" cy="219456"/>
           </a:xfrm>
           <a:prstGeom prst="rect">
@@ -8276,7 +8306,7 @@
         </p:nvSpPr>
         <p:spPr>
           <a:xfrm>
-            <a:off x="10774375" y="6382512"/>
+            <a:off x="10710367" y="6382512"/>
             <a:ext cx="914400" cy="219456"/>
           </a:xfrm>
           <a:prstGeom prst="rect">
@@ -8347,7 +8377,7 @@
         </p:nvSpPr>
         <p:spPr>
           <a:xfrm>
-            <a:off x="502920" y="457200"/>
+            <a:off x="566928" y="457200"/>
             <a:ext cx="384048" cy="384048"/>
           </a:xfrm>
           <a:prstGeom prst="ellipse">
@@ -8367,7 +8397,7 @@
         </p:nvSpPr>
         <p:spPr>
           <a:xfrm>
-            <a:off x="502920" y="457200"/>
+            <a:off x="566928" y="457200"/>
             <a:ext cx="384048" cy="384048"/>
           </a:xfrm>
           <a:prstGeom prst="rect">
@@ -8406,7 +8436,7 @@
         </p:nvSpPr>
         <p:spPr>
           <a:xfrm>
-            <a:off x="1069848" y="457200"/>
+            <a:off x="1133856" y="457200"/>
             <a:ext cx="10490911" cy="182880"/>
           </a:xfrm>
           <a:prstGeom prst="rect">
@@ -8445,7 +8475,7 @@
         </p:nvSpPr>
         <p:spPr>
           <a:xfrm>
-            <a:off x="1069848" y="640080"/>
+            <a:off x="1133856" y="640080"/>
             <a:ext cx="10490911" cy="365760"/>
           </a:xfrm>
           <a:prstGeom prst="rect">
@@ -8455,7 +8485,9 @@
           <a:ln/>
         </p:spPr>
         <p:txBody>
-          <a:bodyPr wrap="square" lIns="0" tIns="0" rIns="0" bIns="0" rtlCol="0" anchor="ctr"/>
+          <a:bodyPr wrap="square" lIns="0" tIns="0" rIns="0" bIns="0" rtlCol="0" anchor="ctr">
+            <a:normAutofit/>
+          </a:bodyPr>
           <a:lstStyle/>
           <a:p>
             <a:pPr indent="0" marL="0">
@@ -8492,7 +8524,7 @@
         </p:blipFill>
         <p:spPr>
           <a:xfrm>
-            <a:off x="502920" y="1481328"/>
+            <a:off x="566928" y="1481328"/>
             <a:ext cx="5120640" cy="4114800"/>
           </a:xfrm>
           <a:prstGeom prst="rect">
@@ -8508,7 +8540,7 @@
         </p:nvSpPr>
         <p:spPr>
           <a:xfrm>
-            <a:off x="5989320" y="1481328"/>
+            <a:off x="6053328" y="1481328"/>
             <a:ext cx="1560003" cy="457200"/>
           </a:xfrm>
           <a:prstGeom prst="rect">
@@ -8518,7 +8550,9 @@
           <a:ln/>
         </p:spPr>
         <p:txBody>
-          <a:bodyPr wrap="square" lIns="0" tIns="0" rIns="0" bIns="0" rtlCol="0" anchor="ctr"/>
+          <a:bodyPr wrap="square" lIns="0" tIns="0" rIns="0" bIns="0" rtlCol="0" anchor="ctr">
+            <a:normAutofit/>
+          </a:bodyPr>
           <a:lstStyle/>
           <a:p>
             <a:pPr indent="0" marL="0">
@@ -8550,7 +8584,7 @@
         </p:nvSpPr>
         <p:spPr>
           <a:xfrm>
-            <a:off x="7549323" y="1481328"/>
+            <a:off x="7613331" y="1481328"/>
             <a:ext cx="4011436" cy="457200"/>
           </a:xfrm>
           <a:prstGeom prst="rect">
@@ -8560,7 +8594,9 @@
           <a:ln/>
         </p:spPr>
         <p:txBody>
-          <a:bodyPr wrap="square" lIns="0" tIns="0" rIns="0" bIns="0" rtlCol="0" anchor="ctr"/>
+          <a:bodyPr wrap="square" lIns="0" tIns="0" rIns="0" bIns="0" rtlCol="0" anchor="ctr">
+            <a:normAutofit/>
+          </a:bodyPr>
           <a:lstStyle/>
           <a:p>
             <a:pPr indent="0" marL="0">
@@ -8592,7 +8628,7 @@
         </p:nvSpPr>
         <p:spPr>
           <a:xfrm>
-            <a:off x="5989320" y="1938528"/>
+            <a:off x="6053328" y="1938528"/>
             <a:ext cx="5571439" cy="0"/>
           </a:xfrm>
           <a:prstGeom prst="line">
@@ -8615,7 +8651,7 @@
         </p:nvSpPr>
         <p:spPr>
           <a:xfrm>
-            <a:off x="5989320" y="1938528"/>
+            <a:off x="6053328" y="1938528"/>
             <a:ext cx="1560003" cy="457200"/>
           </a:xfrm>
           <a:prstGeom prst="rect">
@@ -8625,7 +8661,9 @@
           <a:ln/>
         </p:spPr>
         <p:txBody>
-          <a:bodyPr wrap="square" lIns="0" tIns="0" rIns="0" bIns="0" rtlCol="0" anchor="ctr"/>
+          <a:bodyPr wrap="square" lIns="0" tIns="0" rIns="0" bIns="0" rtlCol="0" anchor="ctr">
+            <a:normAutofit/>
+          </a:bodyPr>
           <a:lstStyle/>
           <a:p>
             <a:pPr indent="0" marL="0">
@@ -8657,7 +8695,7 @@
         </p:nvSpPr>
         <p:spPr>
           <a:xfrm>
-            <a:off x="7549323" y="1938528"/>
+            <a:off x="7613331" y="1938528"/>
             <a:ext cx="4011436" cy="457200"/>
           </a:xfrm>
           <a:prstGeom prst="rect">
@@ -8667,7 +8705,9 @@
           <a:ln/>
         </p:spPr>
         <p:txBody>
-          <a:bodyPr wrap="square" lIns="0" tIns="0" rIns="0" bIns="0" rtlCol="0" anchor="ctr"/>
+          <a:bodyPr wrap="square" lIns="0" tIns="0" rIns="0" bIns="0" rtlCol="0" anchor="ctr">
+            <a:normAutofit/>
+          </a:bodyPr>
           <a:lstStyle/>
           <a:p>
             <a:pPr indent="0" marL="0">
@@ -8699,7 +8739,7 @@
         </p:nvSpPr>
         <p:spPr>
           <a:xfrm>
-            <a:off x="5989320" y="2505456"/>
+            <a:off x="6053328" y="2505456"/>
             <a:ext cx="5571439" cy="658368"/>
           </a:xfrm>
           <a:prstGeom prst="roundRect">
@@ -8721,7 +8761,7 @@
         </p:nvSpPr>
         <p:spPr>
           <a:xfrm>
-            <a:off x="5989320" y="2560320"/>
+            <a:off x="6053328" y="2560320"/>
             <a:ext cx="36576" cy="548640"/>
           </a:xfrm>
           <a:prstGeom prst="rect">
@@ -8741,7 +8781,7 @@
         </p:nvSpPr>
         <p:spPr>
           <a:xfrm>
-            <a:off x="6135624" y="2596896"/>
+            <a:off x="6199632" y="2596896"/>
             <a:ext cx="5315407" cy="201168"/>
           </a:xfrm>
           <a:prstGeom prst="rect">
@@ -8780,7 +8820,7 @@
         </p:nvSpPr>
         <p:spPr>
           <a:xfrm>
-            <a:off x="6135624" y="2798064"/>
+            <a:off x="6199632" y="2798064"/>
             <a:ext cx="5315407" cy="329184"/>
           </a:xfrm>
           <a:prstGeom prst="rect">
@@ -8823,7 +8863,7 @@
         </p:nvSpPr>
         <p:spPr>
           <a:xfrm>
-            <a:off x="502920" y="6382512"/>
+            <a:off x="566928" y="6382512"/>
             <a:ext cx="7315200" cy="219456"/>
           </a:xfrm>
           <a:prstGeom prst="rect">
@@ -8862,7 +8902,7 @@
         </p:nvSpPr>
         <p:spPr>
           <a:xfrm>
-            <a:off x="10774375" y="6382512"/>
+            <a:off x="10710367" y="6382512"/>
             <a:ext cx="914400" cy="219456"/>
           </a:xfrm>
           <a:prstGeom prst="rect">
@@ -8933,7 +8973,7 @@
         </p:nvSpPr>
         <p:spPr>
           <a:xfrm>
-            <a:off x="502920" y="457200"/>
+            <a:off x="566928" y="457200"/>
             <a:ext cx="384048" cy="384048"/>
           </a:xfrm>
           <a:prstGeom prst="ellipse">
@@ -8953,7 +8993,7 @@
         </p:nvSpPr>
         <p:spPr>
           <a:xfrm>
-            <a:off x="502920" y="457200"/>
+            <a:off x="566928" y="457200"/>
             <a:ext cx="384048" cy="384048"/>
           </a:xfrm>
           <a:prstGeom prst="rect">
@@ -8992,7 +9032,7 @@
         </p:nvSpPr>
         <p:spPr>
           <a:xfrm>
-            <a:off x="1069848" y="457200"/>
+            <a:off x="1133856" y="457200"/>
             <a:ext cx="10490911" cy="182880"/>
           </a:xfrm>
           <a:prstGeom prst="rect">
@@ -9031,7 +9071,7 @@
         </p:nvSpPr>
         <p:spPr>
           <a:xfrm>
-            <a:off x="1069848" y="640080"/>
+            <a:off x="1133856" y="640080"/>
             <a:ext cx="10490911" cy="365760"/>
           </a:xfrm>
           <a:prstGeom prst="rect">
@@ -9041,6 +9081,47 @@
           <a:ln/>
         </p:spPr>
         <p:txBody>
+          <a:bodyPr wrap="square" lIns="0" tIns="0" rIns="0" bIns="0" rtlCol="0" anchor="ctr">
+            <a:normAutofit/>
+          </a:bodyPr>
+          <a:lstStyle/>
+          <a:p>
+            <a:pPr indent="0" marL="0">
+              <a:buNone/>
+            </a:pPr>
+            <a:r>
+              <a:rPr lang="en-US" sz="2300" b="1" dirty="0">
+                <a:solidFill>
+                  <a:srgbClr val="10161F"/>
+                </a:solidFill>
+                <a:latin typeface="Pretendard" pitchFamily="34" charset="0"/>
+                <a:ea typeface="Pretendard" pitchFamily="34" charset="-122"/>
+                <a:cs typeface="Pretendard" pitchFamily="34" charset="-120"/>
+              </a:rPr>
+              <a:t>토지 현황</a:t>
+            </a:r>
+            <a:endParaRPr lang="en-US" sz="2300" dirty="0"/>
+          </a:p>
+        </p:txBody>
+      </p:sp>
+      <p:sp>
+        <p:nvSpPr>
+          <p:cNvPr id="6" name="Text 4"/>
+          <p:cNvSpPr/>
+          <p:nvPr/>
+        </p:nvSpPr>
+        <p:spPr>
+          <a:xfrm>
+            <a:off x="566928" y="1371600"/>
+            <a:ext cx="6858000" cy="237744"/>
+          </a:xfrm>
+          <a:prstGeom prst="rect">
+            <a:avLst/>
+          </a:prstGeom>
+          <a:noFill/>
+          <a:ln/>
+        </p:spPr>
+        <p:txBody>
           <a:bodyPr wrap="square" lIns="0" tIns="0" rIns="0" bIns="0" rtlCol="0" anchor="ctr"/>
           <a:lstStyle/>
           <a:p>
@@ -9048,7 +9129,7 @@
               <a:buNone/>
             </a:pPr>
             <a:r>
-              <a:rPr lang="en-US" sz="2300" b="1" dirty="0">
+              <a:rPr lang="en-US" sz="1100" b="1" dirty="0">
                 <a:solidFill>
                   <a:srgbClr val="10161F"/>
                 </a:solidFill>
@@ -9058,45 +9139,6 @@
               </a:rPr>
               <a:t>토지 현황</a:t>
             </a:r>
-            <a:endParaRPr lang="en-US" sz="2300" dirty="0"/>
-          </a:p>
-        </p:txBody>
-      </p:sp>
-      <p:sp>
-        <p:nvSpPr>
-          <p:cNvPr id="6" name="Text 4"/>
-          <p:cNvSpPr/>
-          <p:nvPr/>
-        </p:nvSpPr>
-        <p:spPr>
-          <a:xfrm>
-            <a:off x="502920" y="1371600"/>
-            <a:ext cx="6858000" cy="237744"/>
-          </a:xfrm>
-          <a:prstGeom prst="rect">
-            <a:avLst/>
-          </a:prstGeom>
-          <a:noFill/>
-          <a:ln/>
-        </p:spPr>
-        <p:txBody>
-          <a:bodyPr wrap="square" lIns="0" tIns="0" rIns="0" bIns="0" rtlCol="0" anchor="ctr"/>
-          <a:lstStyle/>
-          <a:p>
-            <a:pPr indent="0" marL="0">
-              <a:buNone/>
-            </a:pPr>
-            <a:r>
-              <a:rPr lang="en-US" sz="1100" b="1" dirty="0">
-                <a:solidFill>
-                  <a:srgbClr val="10161F"/>
-                </a:solidFill>
-                <a:latin typeface="Pretendard" pitchFamily="34" charset="0"/>
-                <a:ea typeface="Pretendard" pitchFamily="34" charset="-122"/>
-                <a:cs typeface="Pretendard" pitchFamily="34" charset="-120"/>
-              </a:rPr>
-              <a:t>토지 현황</a:t>
-            </a:r>
             <a:endParaRPr lang="en-US" sz="1100" dirty="0"/>
           </a:p>
         </p:txBody>
@@ -9109,7 +9151,7 @@
         </p:nvSpPr>
         <p:spPr>
           <a:xfrm>
-            <a:off x="502920" y="1645920"/>
+            <a:off x="566928" y="1645920"/>
             <a:ext cx="6858000" cy="1645920"/>
           </a:xfrm>
           <a:prstGeom prst="roundRect">
@@ -9131,7 +9173,7 @@
         </p:nvSpPr>
         <p:spPr>
           <a:xfrm>
-            <a:off x="502920" y="1700784"/>
+            <a:off x="566928" y="1700784"/>
             <a:ext cx="36576" cy="1536192"/>
           </a:xfrm>
           <a:prstGeom prst="rect">
@@ -9151,7 +9193,7 @@
         </p:nvSpPr>
         <p:spPr>
           <a:xfrm>
-            <a:off x="649224" y="1737360"/>
+            <a:off x="713232" y="1737360"/>
             <a:ext cx="6601968" cy="201168"/>
           </a:xfrm>
           <a:prstGeom prst="rect">
@@ -9190,7 +9232,7 @@
         </p:nvSpPr>
         <p:spPr>
           <a:xfrm>
-            <a:off x="649224" y="1938528"/>
+            <a:off x="713232" y="1938528"/>
             <a:ext cx="6601968" cy="1316736"/>
           </a:xfrm>
           <a:prstGeom prst="rect">
@@ -9281,7 +9323,7 @@
         </p:nvSpPr>
         <p:spPr>
           <a:xfrm>
-            <a:off x="7540600" y="1371600"/>
+            <a:off x="7604608" y="1371600"/>
             <a:ext cx="0" cy="4754880"/>
           </a:xfrm>
           <a:prstGeom prst="line">
@@ -9304,7 +9346,7 @@
         </p:nvSpPr>
         <p:spPr>
           <a:xfrm>
-            <a:off x="7720279" y="1645920"/>
+            <a:off x="7784287" y="1645920"/>
             <a:ext cx="3840480" cy="2103120"/>
           </a:xfrm>
           <a:prstGeom prst="roundRect">
@@ -9326,7 +9368,7 @@
         </p:nvSpPr>
         <p:spPr>
           <a:xfrm>
-            <a:off x="7720279" y="1700784"/>
+            <a:off x="7784287" y="1700784"/>
             <a:ext cx="36576" cy="1993392"/>
           </a:xfrm>
           <a:prstGeom prst="rect">
@@ -9346,7 +9388,7 @@
         </p:nvSpPr>
         <p:spPr>
           <a:xfrm>
-            <a:off x="7866583" y="1737360"/>
+            <a:off x="7930591" y="1737360"/>
             <a:ext cx="3584448" cy="201168"/>
           </a:xfrm>
           <a:prstGeom prst="rect">
@@ -9385,7 +9427,7 @@
         </p:nvSpPr>
         <p:spPr>
           <a:xfrm>
-            <a:off x="7866583" y="1938528"/>
+            <a:off x="7930591" y="1938528"/>
             <a:ext cx="3584448" cy="1773936"/>
           </a:xfrm>
           <a:prstGeom prst="rect">
@@ -9428,7 +9470,7 @@
         </p:nvSpPr>
         <p:spPr>
           <a:xfrm>
-            <a:off x="7720279" y="3977640"/>
+            <a:off x="7784287" y="3977640"/>
             <a:ext cx="3840480" cy="2148840"/>
           </a:xfrm>
           <a:prstGeom prst="roundRect">
@@ -9450,7 +9492,7 @@
         </p:nvSpPr>
         <p:spPr>
           <a:xfrm>
-            <a:off x="7720279" y="4032504"/>
+            <a:off x="7784287" y="4032504"/>
             <a:ext cx="36576" cy="2039112"/>
           </a:xfrm>
           <a:prstGeom prst="rect">
@@ -9470,7 +9512,7 @@
         </p:nvSpPr>
         <p:spPr>
           <a:xfrm>
-            <a:off x="7866583" y="4069080"/>
+            <a:off x="7930591" y="4069080"/>
             <a:ext cx="3584448" cy="201168"/>
           </a:xfrm>
           <a:prstGeom prst="rect">
@@ -9509,7 +9551,7 @@
         </p:nvSpPr>
         <p:spPr>
           <a:xfrm>
-            <a:off x="7866583" y="4270248"/>
+            <a:off x="7930591" y="4270248"/>
             <a:ext cx="3584448" cy="1819656"/>
           </a:xfrm>
           <a:prstGeom prst="rect">
@@ -9600,7 +9642,7 @@
         </p:nvSpPr>
         <p:spPr>
           <a:xfrm>
-            <a:off x="502920" y="6382512"/>
+            <a:off x="566928" y="6382512"/>
             <a:ext cx="7315200" cy="219456"/>
           </a:xfrm>
           <a:prstGeom prst="rect">
@@ -9639,7 +9681,7 @@
         </p:nvSpPr>
         <p:spPr>
           <a:xfrm>
-            <a:off x="10774375" y="6382512"/>
+            <a:off x="10710367" y="6382512"/>
             <a:ext cx="914400" cy="219456"/>
           </a:xfrm>
           <a:prstGeom prst="rect">
@@ -9710,7 +9752,7 @@
         </p:nvSpPr>
         <p:spPr>
           <a:xfrm>
-            <a:off x="502920" y="457200"/>
+            <a:off x="566928" y="457200"/>
             <a:ext cx="384048" cy="384048"/>
           </a:xfrm>
           <a:prstGeom prst="ellipse">
@@ -9730,7 +9772,7 @@
         </p:nvSpPr>
         <p:spPr>
           <a:xfrm>
-            <a:off x="502920" y="457200"/>
+            <a:off x="566928" y="457200"/>
             <a:ext cx="384048" cy="384048"/>
           </a:xfrm>
           <a:prstGeom prst="rect">
@@ -9769,7 +9811,7 @@
         </p:nvSpPr>
         <p:spPr>
           <a:xfrm>
-            <a:off x="1069848" y="457200"/>
+            <a:off x="1133856" y="457200"/>
             <a:ext cx="10490911" cy="182880"/>
           </a:xfrm>
           <a:prstGeom prst="rect">
@@ -9808,7 +9850,7 @@
         </p:nvSpPr>
         <p:spPr>
           <a:xfrm>
-            <a:off x="1069848" y="640080"/>
+            <a:off x="1133856" y="640080"/>
             <a:ext cx="10490911" cy="365760"/>
           </a:xfrm>
           <a:prstGeom prst="rect">
@@ -9818,6 +9860,47 @@
           <a:ln/>
         </p:spPr>
         <p:txBody>
+          <a:bodyPr wrap="square" lIns="0" tIns="0" rIns="0" bIns="0" rtlCol="0" anchor="ctr">
+            <a:normAutofit/>
+          </a:bodyPr>
+          <a:lstStyle/>
+          <a:p>
+            <a:pPr indent="0" marL="0">
+              <a:buNone/>
+            </a:pPr>
+            <a:r>
+              <a:rPr lang="en-US" sz="2300" b="1" dirty="0">
+                <a:solidFill>
+                  <a:srgbClr val="10161F"/>
+                </a:solidFill>
+                <a:latin typeface="Pretendard" pitchFamily="34" charset="0"/>
+                <a:ea typeface="Pretendard" pitchFamily="34" charset="-122"/>
+                <a:cs typeface="Pretendard" pitchFamily="34" charset="-120"/>
+              </a:rPr>
+              <a:t>건물 개요</a:t>
+            </a:r>
+            <a:endParaRPr lang="en-US" sz="2300" dirty="0"/>
+          </a:p>
+        </p:txBody>
+      </p:sp>
+      <p:sp>
+        <p:nvSpPr>
+          <p:cNvPr id="6" name="Text 4"/>
+          <p:cNvSpPr/>
+          <p:nvPr/>
+        </p:nvSpPr>
+        <p:spPr>
+          <a:xfrm>
+            <a:off x="566928" y="1371600"/>
+            <a:ext cx="6858000" cy="237744"/>
+          </a:xfrm>
+          <a:prstGeom prst="rect">
+            <a:avLst/>
+          </a:prstGeom>
+          <a:noFill/>
+          <a:ln/>
+        </p:spPr>
+        <p:txBody>
           <a:bodyPr wrap="square" lIns="0" tIns="0" rIns="0" bIns="0" rtlCol="0" anchor="ctr"/>
           <a:lstStyle/>
           <a:p>
@@ -9825,7 +9908,7 @@
               <a:buNone/>
             </a:pPr>
             <a:r>
-              <a:rPr lang="en-US" sz="2300" b="1" dirty="0">
+              <a:rPr lang="en-US" sz="1100" b="1" dirty="0">
                 <a:solidFill>
                   <a:srgbClr val="10161F"/>
                 </a:solidFill>
@@ -9833,45 +9916,6 @@
                 <a:ea typeface="Pretendard" pitchFamily="34" charset="-122"/>
                 <a:cs typeface="Pretendard" pitchFamily="34" charset="-120"/>
               </a:rPr>
-              <a:t>건물 개요</a:t>
-            </a:r>
-            <a:endParaRPr lang="en-US" sz="2300" dirty="0"/>
-          </a:p>
-        </p:txBody>
-      </p:sp>
-      <p:sp>
-        <p:nvSpPr>
-          <p:cNvPr id="6" name="Text 4"/>
-          <p:cNvSpPr/>
-          <p:nvPr/>
-        </p:nvSpPr>
-        <p:spPr>
-          <a:xfrm>
-            <a:off x="502920" y="1371600"/>
-            <a:ext cx="6858000" cy="237744"/>
-          </a:xfrm>
-          <a:prstGeom prst="rect">
-            <a:avLst/>
-          </a:prstGeom>
-          <a:noFill/>
-          <a:ln/>
-        </p:spPr>
-        <p:txBody>
-          <a:bodyPr wrap="square" lIns="0" tIns="0" rIns="0" bIns="0" rtlCol="0" anchor="ctr"/>
-          <a:lstStyle/>
-          <a:p>
-            <a:pPr indent="0" marL="0">
-              <a:buNone/>
-            </a:pPr>
-            <a:r>
-              <a:rPr lang="en-US" sz="1100" b="1" dirty="0">
-                <a:solidFill>
-                  <a:srgbClr val="10161F"/>
-                </a:solidFill>
-                <a:latin typeface="Pretendard" pitchFamily="34" charset="0"/>
-                <a:ea typeface="Pretendard" pitchFamily="34" charset="-122"/>
-                <a:cs typeface="Pretendard" pitchFamily="34" charset="-120"/>
-              </a:rPr>
               <a:t>건축물 개요 및 물리 스펙</a:t>
             </a:r>
             <a:endParaRPr lang="en-US" sz="1100" dirty="0"/>
@@ -9886,7 +9930,7 @@
         </p:nvSpPr>
         <p:spPr>
           <a:xfrm>
-            <a:off x="502920" y="1645920"/>
+            <a:off x="566928" y="1645920"/>
             <a:ext cx="6858000" cy="1645920"/>
           </a:xfrm>
           <a:prstGeom prst="roundRect">
@@ -9908,7 +9952,7 @@
         </p:nvSpPr>
         <p:spPr>
           <a:xfrm>
-            <a:off x="502920" y="1700784"/>
+            <a:off x="566928" y="1700784"/>
             <a:ext cx="36576" cy="1536192"/>
           </a:xfrm>
           <a:prstGeom prst="rect">
@@ -9928,7 +9972,7 @@
         </p:nvSpPr>
         <p:spPr>
           <a:xfrm>
-            <a:off x="649224" y="1737360"/>
+            <a:off x="713232" y="1737360"/>
             <a:ext cx="6601968" cy="201168"/>
           </a:xfrm>
           <a:prstGeom prst="rect">
@@ -9967,7 +10011,7 @@
         </p:nvSpPr>
         <p:spPr>
           <a:xfrm>
-            <a:off x="649224" y="1938528"/>
+            <a:off x="713232" y="1938528"/>
             <a:ext cx="6601968" cy="1316736"/>
           </a:xfrm>
           <a:prstGeom prst="rect">
@@ -10058,7 +10102,7 @@
         </p:nvSpPr>
         <p:spPr>
           <a:xfrm>
-            <a:off x="7540600" y="1371600"/>
+            <a:off x="7604608" y="1371600"/>
             <a:ext cx="0" cy="4754880"/>
           </a:xfrm>
           <a:prstGeom prst="line">
@@ -10081,7 +10125,7 @@
         </p:nvSpPr>
         <p:spPr>
           <a:xfrm>
-            <a:off x="7720279" y="1645920"/>
+            <a:off x="7784287" y="1645920"/>
             <a:ext cx="3840480" cy="2103120"/>
           </a:xfrm>
           <a:prstGeom prst="roundRect">
@@ -10103,7 +10147,7 @@
         </p:nvSpPr>
         <p:spPr>
           <a:xfrm>
-            <a:off x="7720279" y="1700784"/>
+            <a:off x="7784287" y="1700784"/>
             <a:ext cx="36576" cy="1993392"/>
           </a:xfrm>
           <a:prstGeom prst="rect">
@@ -10123,7 +10167,7 @@
         </p:nvSpPr>
         <p:spPr>
           <a:xfrm>
-            <a:off x="7866583" y="1737360"/>
+            <a:off x="7930591" y="1737360"/>
             <a:ext cx="3584448" cy="201168"/>
           </a:xfrm>
           <a:prstGeom prst="rect">
@@ -10151,7 +10195,7 @@
         </p:nvSpPr>
         <p:spPr>
           <a:xfrm>
-            <a:off x="7866583" y="1938528"/>
+            <a:off x="7930591" y="1938528"/>
             <a:ext cx="3584448" cy="1773936"/>
           </a:xfrm>
           <a:prstGeom prst="rect">
@@ -10193,7 +10237,7 @@
         </p:nvSpPr>
         <p:spPr>
           <a:xfrm>
-            <a:off x="502920" y="6382512"/>
+            <a:off x="566928" y="6382512"/>
             <a:ext cx="7315200" cy="219456"/>
           </a:xfrm>
           <a:prstGeom prst="rect">
@@ -10232,7 +10276,7 @@
         </p:nvSpPr>
         <p:spPr>
           <a:xfrm>
-            <a:off x="10774375" y="6382512"/>
+            <a:off x="10710367" y="6382512"/>
             <a:ext cx="914400" cy="219456"/>
           </a:xfrm>
           <a:prstGeom prst="rect">
@@ -10303,7 +10347,7 @@
         </p:nvSpPr>
         <p:spPr>
           <a:xfrm>
-            <a:off x="502920" y="457200"/>
+            <a:off x="566928" y="457200"/>
             <a:ext cx="384048" cy="384048"/>
           </a:xfrm>
           <a:prstGeom prst="ellipse">
@@ -10323,7 +10367,7 @@
         </p:nvSpPr>
         <p:spPr>
           <a:xfrm>
-            <a:off x="502920" y="457200"/>
+            <a:off x="566928" y="457200"/>
             <a:ext cx="384048" cy="384048"/>
           </a:xfrm>
           <a:prstGeom prst="rect">
@@ -10362,7 +10406,7 @@
         </p:nvSpPr>
         <p:spPr>
           <a:xfrm>
-            <a:off x="1069848" y="457200"/>
+            <a:off x="1133856" y="457200"/>
             <a:ext cx="10490911" cy="182880"/>
           </a:xfrm>
           <a:prstGeom prst="rect">
@@ -10401,7 +10445,7 @@
         </p:nvSpPr>
         <p:spPr>
           <a:xfrm>
-            <a:off x="1069848" y="640080"/>
+            <a:off x="1133856" y="640080"/>
             <a:ext cx="10490911" cy="365760"/>
           </a:xfrm>
           <a:prstGeom prst="rect">
@@ -10411,7 +10455,9 @@
           <a:ln/>
         </p:spPr>
         <p:txBody>
-          <a:bodyPr wrap="square" lIns="0" tIns="0" rIns="0" bIns="0" rtlCol="0" anchor="ctr"/>
+          <a:bodyPr wrap="square" lIns="0" tIns="0" rIns="0" bIns="0" rtlCol="0" anchor="ctr">
+            <a:normAutofit/>
+          </a:bodyPr>
           <a:lstStyle/>
           <a:p>
             <a:pPr indent="0" marL="0">
@@ -10440,7 +10486,7 @@
         </p:nvSpPr>
         <p:spPr>
           <a:xfrm>
-            <a:off x="502920" y="1700784"/>
+            <a:off x="566928" y="1700784"/>
             <a:ext cx="11057839" cy="1371600"/>
           </a:xfrm>
           <a:prstGeom prst="roundRect">
@@ -10462,7 +10508,7 @@
         </p:nvSpPr>
         <p:spPr>
           <a:xfrm>
-            <a:off x="502920" y="1755648"/>
+            <a:off x="566928" y="1755648"/>
             <a:ext cx="36576" cy="1261872"/>
           </a:xfrm>
           <a:prstGeom prst="rect">
@@ -10482,7 +10528,7 @@
         </p:nvSpPr>
         <p:spPr>
           <a:xfrm>
-            <a:off x="649224" y="1792224"/>
+            <a:off x="713232" y="1792224"/>
             <a:ext cx="10801807" cy="201168"/>
           </a:xfrm>
           <a:prstGeom prst="rect">
@@ -10521,7 +10567,7 @@
         </p:nvSpPr>
         <p:spPr>
           <a:xfrm>
-            <a:off x="649224" y="1993392"/>
+            <a:off x="713232" y="1993392"/>
             <a:ext cx="10801807" cy="1042416"/>
           </a:xfrm>
           <a:prstGeom prst="rect">
@@ -10563,7 +10609,7 @@
         </p:nvSpPr>
         <p:spPr>
           <a:xfrm>
-            <a:off x="502920" y="3291840"/>
+            <a:off x="566928" y="3291840"/>
             <a:ext cx="5437480" cy="2194560"/>
           </a:xfrm>
           <a:prstGeom prst="roundRect">
@@ -10585,7 +10631,7 @@
         </p:nvSpPr>
         <p:spPr>
           <a:xfrm>
-            <a:off x="502920" y="3346704"/>
+            <a:off x="566928" y="3346704"/>
             <a:ext cx="36576" cy="2084832"/>
           </a:xfrm>
           <a:prstGeom prst="rect">
@@ -10605,7 +10651,7 @@
         </p:nvSpPr>
         <p:spPr>
           <a:xfrm>
-            <a:off x="649224" y="3383280"/>
+            <a:off x="713232" y="3383280"/>
             <a:ext cx="5181448" cy="201168"/>
           </a:xfrm>
           <a:prstGeom prst="rect">
@@ -10644,7 +10690,7 @@
         </p:nvSpPr>
         <p:spPr>
           <a:xfrm>
-            <a:off x="649224" y="3584448"/>
+            <a:off x="713232" y="3584448"/>
             <a:ext cx="5181448" cy="1865376"/>
           </a:xfrm>
           <a:prstGeom prst="rect">
@@ -10735,7 +10781,7 @@
         </p:nvSpPr>
         <p:spPr>
           <a:xfrm>
-            <a:off x="6123280" y="3291840"/>
+            <a:off x="6187288" y="3291840"/>
             <a:ext cx="5437480" cy="2194560"/>
           </a:xfrm>
           <a:prstGeom prst="roundRect">
@@ -10757,7 +10803,7 @@
         </p:nvSpPr>
         <p:spPr>
           <a:xfrm>
-            <a:off x="6123280" y="3346704"/>
+            <a:off x="6187288" y="3346704"/>
             <a:ext cx="36576" cy="2084832"/>
           </a:xfrm>
           <a:prstGeom prst="rect">
@@ -10777,7 +10823,7 @@
         </p:nvSpPr>
         <p:spPr>
           <a:xfrm>
-            <a:off x="6269584" y="3383280"/>
+            <a:off x="6333592" y="3383280"/>
             <a:ext cx="5181448" cy="201168"/>
           </a:xfrm>
           <a:prstGeom prst="rect">
@@ -10816,7 +10862,7 @@
         </p:nvSpPr>
         <p:spPr>
           <a:xfrm>
-            <a:off x="6269584" y="3584448"/>
+            <a:off x="6333592" y="3584448"/>
             <a:ext cx="5181448" cy="1865376"/>
           </a:xfrm>
           <a:prstGeom prst="rect">
@@ -10907,7 +10953,7 @@
         </p:nvSpPr>
         <p:spPr>
           <a:xfrm>
-            <a:off x="502920" y="6382512"/>
+            <a:off x="566928" y="6382512"/>
             <a:ext cx="7315200" cy="219456"/>
           </a:xfrm>
           <a:prstGeom prst="rect">
@@ -10946,7 +10992,7 @@
         </p:nvSpPr>
         <p:spPr>
           <a:xfrm>
-            <a:off x="10774375" y="6382512"/>
+            <a:off x="10710367" y="6382512"/>
             <a:ext cx="914400" cy="219456"/>
           </a:xfrm>
           <a:prstGeom prst="rect">
@@ -11017,7 +11063,7 @@
         </p:nvSpPr>
         <p:spPr>
           <a:xfrm>
-            <a:off x="502920" y="457200"/>
+            <a:off x="566928" y="457200"/>
             <a:ext cx="384048" cy="384048"/>
           </a:xfrm>
           <a:prstGeom prst="ellipse">
@@ -11037,7 +11083,7 @@
         </p:nvSpPr>
         <p:spPr>
           <a:xfrm>
-            <a:off x="502920" y="457200"/>
+            <a:off x="566928" y="457200"/>
             <a:ext cx="384048" cy="384048"/>
           </a:xfrm>
           <a:prstGeom prst="rect">
@@ -11076,7 +11122,7 @@
         </p:nvSpPr>
         <p:spPr>
           <a:xfrm>
-            <a:off x="1069848" y="457200"/>
+            <a:off x="1133856" y="457200"/>
             <a:ext cx="10490911" cy="182880"/>
           </a:xfrm>
           <a:prstGeom prst="rect">
@@ -11115,7 +11161,7 @@
         </p:nvSpPr>
         <p:spPr>
           <a:xfrm>
-            <a:off x="1069848" y="640080"/>
+            <a:off x="1133856" y="640080"/>
             <a:ext cx="10490911" cy="365760"/>
           </a:xfrm>
           <a:prstGeom prst="rect">
@@ -11125,6 +11171,47 @@
           <a:ln/>
         </p:spPr>
         <p:txBody>
+          <a:bodyPr wrap="square" lIns="0" tIns="0" rIns="0" bIns="0" rtlCol="0" anchor="ctr">
+            <a:normAutofit/>
+          </a:bodyPr>
+          <a:lstStyle/>
+          <a:p>
+            <a:pPr indent="0" marL="0">
+              <a:buNone/>
+            </a:pPr>
+            <a:r>
+              <a:rPr lang="en-US" sz="2300" b="1" dirty="0">
+                <a:solidFill>
+                  <a:srgbClr val="10161F"/>
+                </a:solidFill>
+                <a:latin typeface="Pretendard" pitchFamily="34" charset="0"/>
+                <a:ea typeface="Pretendard" pitchFamily="34" charset="-122"/>
+                <a:cs typeface="Pretendard" pitchFamily="34" charset="-120"/>
+              </a:rPr>
+              <a:t>임대안정성</a:t>
+            </a:r>
+            <a:endParaRPr lang="en-US" sz="2300" dirty="0"/>
+          </a:p>
+        </p:txBody>
+      </p:sp>
+      <p:sp>
+        <p:nvSpPr>
+          <p:cNvPr id="6" name="Text 4"/>
+          <p:cNvSpPr/>
+          <p:nvPr/>
+        </p:nvSpPr>
+        <p:spPr>
+          <a:xfrm>
+            <a:off x="566928" y="1371600"/>
+            <a:ext cx="6858000" cy="237744"/>
+          </a:xfrm>
+          <a:prstGeom prst="rect">
+            <a:avLst/>
+          </a:prstGeom>
+          <a:noFill/>
+          <a:ln/>
+        </p:spPr>
+        <p:txBody>
           <a:bodyPr wrap="square" lIns="0" tIns="0" rIns="0" bIns="0" rtlCol="0" anchor="ctr"/>
           <a:lstStyle/>
           <a:p>
@@ -11132,7 +11219,7 @@
               <a:buNone/>
             </a:pPr>
             <a:r>
-              <a:rPr lang="en-US" sz="2300" b="1" dirty="0">
+              <a:rPr lang="en-US" sz="1100" b="1" dirty="0">
                 <a:solidFill>
                   <a:srgbClr val="10161F"/>
                 </a:solidFill>
@@ -11140,45 +11227,6 @@
                 <a:ea typeface="Pretendard" pitchFamily="34" charset="-122"/>
                 <a:cs typeface="Pretendard" pitchFamily="34" charset="-120"/>
               </a:rPr>
-              <a:t>임대안정성</a:t>
-            </a:r>
-            <a:endParaRPr lang="en-US" sz="2300" dirty="0"/>
-          </a:p>
-        </p:txBody>
-      </p:sp>
-      <p:sp>
-        <p:nvSpPr>
-          <p:cNvPr id="6" name="Text 4"/>
-          <p:cNvSpPr/>
-          <p:nvPr/>
-        </p:nvSpPr>
-        <p:spPr>
-          <a:xfrm>
-            <a:off x="502920" y="1371600"/>
-            <a:ext cx="6858000" cy="237744"/>
-          </a:xfrm>
-          <a:prstGeom prst="rect">
-            <a:avLst/>
-          </a:prstGeom>
-          <a:noFill/>
-          <a:ln/>
-        </p:spPr>
-        <p:txBody>
-          <a:bodyPr wrap="square" lIns="0" tIns="0" rIns="0" bIns="0" rtlCol="0" anchor="ctr"/>
-          <a:lstStyle/>
-          <a:p>
-            <a:pPr indent="0" marL="0">
-              <a:buNone/>
-            </a:pPr>
-            <a:r>
-              <a:rPr lang="en-US" sz="1100" b="1" dirty="0">
-                <a:solidFill>
-                  <a:srgbClr val="10161F"/>
-                </a:solidFill>
-                <a:latin typeface="Pretendard" pitchFamily="34" charset="0"/>
-                <a:ea typeface="Pretendard" pitchFamily="34" charset="-122"/>
-                <a:cs typeface="Pretendard" pitchFamily="34" charset="-120"/>
-              </a:rPr>
               <a:t>건축물 개요 및 물리 스펙</a:t>
             </a:r>
             <a:endParaRPr lang="en-US" sz="1100" dirty="0"/>
@@ -11193,7 +11241,7 @@
         </p:nvSpPr>
         <p:spPr>
           <a:xfrm>
-            <a:off x="502920" y="1645920"/>
+            <a:off x="566928" y="1645920"/>
             <a:ext cx="6858000" cy="1645920"/>
           </a:xfrm>
           <a:prstGeom prst="roundRect">
@@ -11215,7 +11263,7 @@
         </p:nvSpPr>
         <p:spPr>
           <a:xfrm>
-            <a:off x="502920" y="1700784"/>
+            <a:off x="566928" y="1700784"/>
             <a:ext cx="36576" cy="1536192"/>
           </a:xfrm>
           <a:prstGeom prst="rect">
@@ -11235,7 +11283,7 @@
         </p:nvSpPr>
         <p:spPr>
           <a:xfrm>
-            <a:off x="649224" y="1737360"/>
+            <a:off x="713232" y="1737360"/>
             <a:ext cx="6601968" cy="201168"/>
           </a:xfrm>
           <a:prstGeom prst="rect">
@@ -11274,7 +11322,7 @@
         </p:nvSpPr>
         <p:spPr>
           <a:xfrm>
-            <a:off x="649224" y="1938528"/>
+            <a:off x="713232" y="1938528"/>
             <a:ext cx="6601968" cy="1316736"/>
           </a:xfrm>
           <a:prstGeom prst="rect">
@@ -11365,7 +11413,7 @@
         </p:nvSpPr>
         <p:spPr>
           <a:xfrm>
-            <a:off x="7540600" y="1371600"/>
+            <a:off x="7604608" y="1371600"/>
             <a:ext cx="0" cy="4754880"/>
           </a:xfrm>
           <a:prstGeom prst="line">
@@ -11388,7 +11436,7 @@
         </p:nvSpPr>
         <p:spPr>
           <a:xfrm>
-            <a:off x="7720279" y="1645920"/>
+            <a:off x="7784287" y="1645920"/>
             <a:ext cx="3840480" cy="2103120"/>
           </a:xfrm>
           <a:prstGeom prst="roundRect">
@@ -11410,7 +11458,7 @@
         </p:nvSpPr>
         <p:spPr>
           <a:xfrm>
-            <a:off x="7720279" y="1700784"/>
+            <a:off x="7784287" y="1700784"/>
             <a:ext cx="36576" cy="1993392"/>
           </a:xfrm>
           <a:prstGeom prst="rect">
@@ -11430,7 +11478,7 @@
         </p:nvSpPr>
         <p:spPr>
           <a:xfrm>
-            <a:off x="7866583" y="1737360"/>
+            <a:off x="7930591" y="1737360"/>
             <a:ext cx="3584448" cy="201168"/>
           </a:xfrm>
           <a:prstGeom prst="rect">
@@ -11458,7 +11506,7 @@
         </p:nvSpPr>
         <p:spPr>
           <a:xfrm>
-            <a:off x="7866583" y="1938528"/>
+            <a:off x="7930591" y="1938528"/>
             <a:ext cx="3584448" cy="1773936"/>
           </a:xfrm>
           <a:prstGeom prst="rect">
@@ -11500,7 +11548,7 @@
         </p:nvSpPr>
         <p:spPr>
           <a:xfrm>
-            <a:off x="502920" y="6382512"/>
+            <a:off x="566928" y="6382512"/>
             <a:ext cx="7315200" cy="219456"/>
           </a:xfrm>
           <a:prstGeom prst="rect">
@@ -11539,7 +11587,7 @@
         </p:nvSpPr>
         <p:spPr>
           <a:xfrm>
-            <a:off x="10774375" y="6382512"/>
+            <a:off x="10710367" y="6382512"/>
             <a:ext cx="914400" cy="219456"/>
           </a:xfrm>
           <a:prstGeom prst="rect">
@@ -11610,7 +11658,7 @@
         </p:nvSpPr>
         <p:spPr>
           <a:xfrm>
-            <a:off x="502920" y="457200"/>
+            <a:off x="566928" y="457200"/>
             <a:ext cx="384048" cy="384048"/>
           </a:xfrm>
           <a:prstGeom prst="ellipse">
@@ -11630,7 +11678,7 @@
         </p:nvSpPr>
         <p:spPr>
           <a:xfrm>
-            <a:off x="502920" y="457200"/>
+            <a:off x="566928" y="457200"/>
             <a:ext cx="384048" cy="384048"/>
           </a:xfrm>
           <a:prstGeom prst="rect">
@@ -11669,7 +11717,7 @@
         </p:nvSpPr>
         <p:spPr>
           <a:xfrm>
-            <a:off x="1069848" y="457200"/>
+            <a:off x="1133856" y="457200"/>
             <a:ext cx="10490911" cy="182880"/>
           </a:xfrm>
           <a:prstGeom prst="rect">
@@ -11708,7 +11756,7 @@
         </p:nvSpPr>
         <p:spPr>
           <a:xfrm>
-            <a:off x="1069848" y="640080"/>
+            <a:off x="1133856" y="640080"/>
             <a:ext cx="10490911" cy="365760"/>
           </a:xfrm>
           <a:prstGeom prst="rect">
@@ -11718,7 +11766,9 @@
           <a:ln/>
         </p:spPr>
         <p:txBody>
-          <a:bodyPr wrap="square" lIns="0" tIns="0" rIns="0" bIns="0" rtlCol="0" anchor="ctr"/>
+          <a:bodyPr wrap="square" lIns="0" tIns="0" rIns="0" bIns="0" rtlCol="0" anchor="ctr">
+            <a:normAutofit/>
+          </a:bodyPr>
           <a:lstStyle/>
           <a:p>
             <a:pPr indent="0" marL="0">
@@ -11747,7 +11797,7 @@
         </p:nvSpPr>
         <p:spPr>
           <a:xfrm>
-            <a:off x="502920" y="1325880"/>
+            <a:off x="566928" y="1325880"/>
             <a:ext cx="11057839" cy="0"/>
           </a:xfrm>
           <a:prstGeom prst="line">
@@ -11770,7 +11820,7 @@
         </p:nvSpPr>
         <p:spPr>
           <a:xfrm>
-            <a:off x="502920" y="1554480"/>
+            <a:off x="566928" y="1554480"/>
             <a:ext cx="3576218" cy="1188720"/>
           </a:xfrm>
           <a:prstGeom prst="roundRect">
@@ -11797,7 +11847,7 @@
         </p:nvSpPr>
         <p:spPr>
           <a:xfrm>
-            <a:off x="667512" y="1682496"/>
+            <a:off x="731520" y="1682496"/>
             <a:ext cx="3247034" cy="201168"/>
           </a:xfrm>
           <a:prstGeom prst="rect">
@@ -11807,7 +11857,9 @@
           <a:ln/>
         </p:spPr>
         <p:txBody>
-          <a:bodyPr wrap="square" lIns="0" tIns="0" rIns="0" bIns="0" rtlCol="0" anchor="ctr"/>
+          <a:bodyPr wrap="square" lIns="0" tIns="0" rIns="0" bIns="0" rtlCol="0" anchor="ctr">
+            <a:normAutofit/>
+          </a:bodyPr>
           <a:lstStyle/>
           <a:p>
             <a:pPr indent="0" marL="0">
@@ -11836,8 +11888,8 @@
         </p:nvSpPr>
         <p:spPr>
           <a:xfrm>
-            <a:off x="667512" y="1901952"/>
-            <a:ext cx="3247034" cy="402336"/>
+            <a:off x="731520" y="1901952"/>
+            <a:ext cx="3247034" cy="279400"/>
           </a:xfrm>
           <a:prstGeom prst="rect">
             <a:avLst/>
@@ -11880,7 +11932,7 @@
         </p:nvSpPr>
         <p:spPr>
           <a:xfrm>
-            <a:off x="4243730" y="1554480"/>
+            <a:off x="4307738" y="1554480"/>
             <a:ext cx="3576218" cy="1188720"/>
           </a:xfrm>
           <a:prstGeom prst="roundRect">
@@ -11907,7 +11959,7 @@
         </p:nvSpPr>
         <p:spPr>
           <a:xfrm>
-            <a:off x="4408322" y="1682496"/>
+            <a:off x="4472330" y="1682496"/>
             <a:ext cx="3247034" cy="201168"/>
           </a:xfrm>
           <a:prstGeom prst="rect">
@@ -11917,7 +11969,9 @@
           <a:ln/>
         </p:spPr>
         <p:txBody>
-          <a:bodyPr wrap="square" lIns="0" tIns="0" rIns="0" bIns="0" rtlCol="0" anchor="ctr"/>
+          <a:bodyPr wrap="square" lIns="0" tIns="0" rIns="0" bIns="0" rtlCol="0" anchor="ctr">
+            <a:normAutofit/>
+          </a:bodyPr>
           <a:lstStyle/>
           <a:p>
             <a:pPr indent="0" marL="0">
@@ -11946,8 +12000,8 @@
         </p:nvSpPr>
         <p:spPr>
           <a:xfrm>
-            <a:off x="4408322" y="1901952"/>
-            <a:ext cx="3247034" cy="402336"/>
+            <a:off x="4472330" y="1901952"/>
+            <a:ext cx="3247034" cy="279400"/>
           </a:xfrm>
           <a:prstGeom prst="rect">
             <a:avLst/>
@@ -11990,7 +12044,7 @@
         </p:nvSpPr>
         <p:spPr>
           <a:xfrm>
-            <a:off x="7984541" y="1554480"/>
+            <a:off x="8048549" y="1554480"/>
             <a:ext cx="3576218" cy="1188720"/>
           </a:xfrm>
           <a:prstGeom prst="roundRect">
@@ -12017,7 +12071,7 @@
         </p:nvSpPr>
         <p:spPr>
           <a:xfrm>
-            <a:off x="8149133" y="1682496"/>
+            <a:off x="8213141" y="1682496"/>
             <a:ext cx="3247034" cy="201168"/>
           </a:xfrm>
           <a:prstGeom prst="rect">
@@ -12027,7 +12081,9 @@
           <a:ln/>
         </p:spPr>
         <p:txBody>
-          <a:bodyPr wrap="square" lIns="0" tIns="0" rIns="0" bIns="0" rtlCol="0" anchor="ctr"/>
+          <a:bodyPr wrap="square" lIns="0" tIns="0" rIns="0" bIns="0" rtlCol="0" anchor="ctr">
+            <a:normAutofit/>
+          </a:bodyPr>
           <a:lstStyle/>
           <a:p>
             <a:pPr indent="0" marL="0">
@@ -12056,8 +12112,8 @@
         </p:nvSpPr>
         <p:spPr>
           <a:xfrm>
-            <a:off x="8149133" y="1901952"/>
-            <a:ext cx="3247034" cy="402336"/>
+            <a:off x="8213141" y="1901952"/>
+            <a:ext cx="3247034" cy="279400"/>
           </a:xfrm>
           <a:prstGeom prst="rect">
             <a:avLst/>
@@ -12100,7 +12156,7 @@
         </p:nvSpPr>
         <p:spPr>
           <a:xfrm>
-            <a:off x="502920" y="2999232"/>
+            <a:off x="566928" y="2999232"/>
             <a:ext cx="11057839" cy="1280160"/>
           </a:xfrm>
           <a:prstGeom prst="roundRect">
@@ -12122,7 +12178,7 @@
         </p:nvSpPr>
         <p:spPr>
           <a:xfrm>
-            <a:off x="502920" y="3054096"/>
+            <a:off x="566928" y="3054096"/>
             <a:ext cx="36576" cy="1170432"/>
           </a:xfrm>
           <a:prstGeom prst="rect">
@@ -12142,7 +12198,7 @@
         </p:nvSpPr>
         <p:spPr>
           <a:xfrm>
-            <a:off x="649224" y="3090672"/>
+            <a:off x="713232" y="3090672"/>
             <a:ext cx="10801807" cy="201168"/>
           </a:xfrm>
           <a:prstGeom prst="rect">
@@ -12181,7 +12237,7 @@
         </p:nvSpPr>
         <p:spPr>
           <a:xfrm>
-            <a:off x="649224" y="3291840"/>
+            <a:off x="713232" y="3291840"/>
             <a:ext cx="10801807" cy="950976"/>
           </a:xfrm>
           <a:prstGeom prst="rect">
@@ -12223,7 +12279,7 @@
         </p:nvSpPr>
         <p:spPr>
           <a:xfrm>
-            <a:off x="502920" y="6382512"/>
+            <a:off x="566928" y="6382512"/>
             <a:ext cx="7315200" cy="219456"/>
           </a:xfrm>
           <a:prstGeom prst="rect">
@@ -12262,7 +12318,7 @@
         </p:nvSpPr>
         <p:spPr>
           <a:xfrm>
-            <a:off x="10774375" y="6382512"/>
+            <a:off x="10710367" y="6382512"/>
             <a:ext cx="914400" cy="219456"/>
           </a:xfrm>
           <a:prstGeom prst="rect">
@@ -12333,7 +12389,7 @@
         </p:nvSpPr>
         <p:spPr>
           <a:xfrm>
-            <a:off x="502920" y="457200"/>
+            <a:off x="566928" y="457200"/>
             <a:ext cx="384048" cy="384048"/>
           </a:xfrm>
           <a:prstGeom prst="ellipse">
@@ -12353,7 +12409,7 @@
         </p:nvSpPr>
         <p:spPr>
           <a:xfrm>
-            <a:off x="502920" y="457200"/>
+            <a:off x="566928" y="457200"/>
             <a:ext cx="384048" cy="384048"/>
           </a:xfrm>
           <a:prstGeom prst="rect">
@@ -12392,7 +12448,7 @@
         </p:nvSpPr>
         <p:spPr>
           <a:xfrm>
-            <a:off x="1069848" y="457200"/>
+            <a:off x="1133856" y="457200"/>
             <a:ext cx="10490911" cy="182880"/>
           </a:xfrm>
           <a:prstGeom prst="rect">
@@ -12431,7 +12487,7 @@
         </p:nvSpPr>
         <p:spPr>
           <a:xfrm>
-            <a:off x="1069848" y="640080"/>
+            <a:off x="1133856" y="640080"/>
             <a:ext cx="10490911" cy="365760"/>
           </a:xfrm>
           <a:prstGeom prst="rect">
@@ -12441,7 +12497,9 @@
           <a:ln/>
         </p:spPr>
         <p:txBody>
-          <a:bodyPr wrap="square" lIns="0" tIns="0" rIns="0" bIns="0" rtlCol="0" anchor="ctr"/>
+          <a:bodyPr wrap="square" lIns="0" tIns="0" rIns="0" bIns="0" rtlCol="0" anchor="ctr">
+            <a:normAutofit/>
+          </a:bodyPr>
           <a:lstStyle/>
           <a:p>
             <a:pPr indent="0" marL="0">
@@ -12470,7 +12528,7 @@
         </p:nvSpPr>
         <p:spPr>
           <a:xfrm>
-            <a:off x="502920" y="1417320"/>
+            <a:off x="566928" y="1417320"/>
             <a:ext cx="5391760" cy="4389120"/>
           </a:xfrm>
           <a:prstGeom prst="roundRect">
@@ -12497,7 +12555,7 @@
         </p:nvSpPr>
         <p:spPr>
           <a:xfrm>
-            <a:off x="731520" y="1618488"/>
+            <a:off x="795528" y="1618488"/>
             <a:ext cx="4934560" cy="320040"/>
           </a:xfrm>
           <a:prstGeom prst="rect">
@@ -12536,7 +12594,7 @@
         </p:nvSpPr>
         <p:spPr>
           <a:xfrm>
-            <a:off x="731520" y="2011680"/>
+            <a:off x="795528" y="2011680"/>
             <a:ext cx="2269897" cy="475488"/>
           </a:xfrm>
           <a:prstGeom prst="rect">
@@ -12546,7 +12604,9 @@
           <a:ln/>
         </p:spPr>
         <p:txBody>
-          <a:bodyPr wrap="square" lIns="0" tIns="0" rIns="0" bIns="0" rtlCol="0" anchor="ctr"/>
+          <a:bodyPr wrap="square" lIns="0" tIns="0" rIns="0" bIns="0" rtlCol="0" anchor="ctr">
+            <a:normAutofit/>
+          </a:bodyPr>
           <a:lstStyle/>
           <a:p>
             <a:pPr indent="0" marL="0">
@@ -12578,7 +12638,7 @@
         </p:nvSpPr>
         <p:spPr>
           <a:xfrm>
-            <a:off x="3001417" y="2011680"/>
+            <a:off x="3065425" y="2011680"/>
             <a:ext cx="2664662" cy="475488"/>
           </a:xfrm>
           <a:prstGeom prst="rect">
@@ -12588,7 +12648,9 @@
           <a:ln/>
         </p:spPr>
         <p:txBody>
-          <a:bodyPr wrap="square" lIns="0" tIns="0" rIns="0" bIns="0" rtlCol="0" anchor="ctr"/>
+          <a:bodyPr wrap="square" lIns="0" tIns="0" rIns="0" bIns="0" rtlCol="0" anchor="ctr">
+            <a:normAutofit/>
+          </a:bodyPr>
           <a:lstStyle/>
           <a:p>
             <a:pPr indent="0" marL="0">
@@ -12620,7 +12682,7 @@
         </p:nvSpPr>
         <p:spPr>
           <a:xfrm>
-            <a:off x="731520" y="2487168"/>
+            <a:off x="795528" y="2487168"/>
             <a:ext cx="4934560" cy="0"/>
           </a:xfrm>
           <a:prstGeom prst="line">
@@ -12643,7 +12705,7 @@
         </p:nvSpPr>
         <p:spPr>
           <a:xfrm>
-            <a:off x="731520" y="2487168"/>
+            <a:off x="795528" y="2487168"/>
             <a:ext cx="2269897" cy="475488"/>
           </a:xfrm>
           <a:prstGeom prst="rect">
@@ -12653,7 +12715,9 @@
           <a:ln/>
         </p:spPr>
         <p:txBody>
-          <a:bodyPr wrap="square" lIns="0" tIns="0" rIns="0" bIns="0" rtlCol="0" anchor="ctr"/>
+          <a:bodyPr wrap="square" lIns="0" tIns="0" rIns="0" bIns="0" rtlCol="0" anchor="ctr">
+            <a:normAutofit/>
+          </a:bodyPr>
           <a:lstStyle/>
           <a:p>
             <a:pPr indent="0" marL="0">
@@ -12685,7 +12749,7 @@
         </p:nvSpPr>
         <p:spPr>
           <a:xfrm>
-            <a:off x="3001417" y="2487168"/>
+            <a:off x="3065425" y="2487168"/>
             <a:ext cx="2664662" cy="475488"/>
           </a:xfrm>
           <a:prstGeom prst="rect">
@@ -12695,7 +12759,9 @@
           <a:ln/>
         </p:spPr>
         <p:txBody>
-          <a:bodyPr wrap="square" lIns="0" tIns="0" rIns="0" bIns="0" rtlCol="0" anchor="ctr"/>
+          <a:bodyPr wrap="square" lIns="0" tIns="0" rIns="0" bIns="0" rtlCol="0" anchor="ctr">
+            <a:normAutofit/>
+          </a:bodyPr>
           <a:lstStyle/>
           <a:p>
             <a:pPr indent="0" marL="0">
@@ -12727,7 +12793,7 @@
         </p:nvSpPr>
         <p:spPr>
           <a:xfrm>
-            <a:off x="731520" y="2962656"/>
+            <a:off x="795528" y="2962656"/>
             <a:ext cx="4934560" cy="0"/>
           </a:xfrm>
           <a:prstGeom prst="line">
@@ -12750,7 +12816,7 @@
         </p:nvSpPr>
         <p:spPr>
           <a:xfrm>
-            <a:off x="731520" y="2962656"/>
+            <a:off x="795528" y="2962656"/>
             <a:ext cx="2269897" cy="475488"/>
           </a:xfrm>
           <a:prstGeom prst="rect">
@@ -12760,7 +12826,9 @@
           <a:ln/>
         </p:spPr>
         <p:txBody>
-          <a:bodyPr wrap="square" lIns="0" tIns="0" rIns="0" bIns="0" rtlCol="0" anchor="ctr"/>
+          <a:bodyPr wrap="square" lIns="0" tIns="0" rIns="0" bIns="0" rtlCol="0" anchor="ctr">
+            <a:normAutofit/>
+          </a:bodyPr>
           <a:lstStyle/>
           <a:p>
             <a:pPr indent="0" marL="0">
@@ -12792,7 +12860,7 @@
         </p:nvSpPr>
         <p:spPr>
           <a:xfrm>
-            <a:off x="3001417" y="2962656"/>
+            <a:off x="3065425" y="2962656"/>
             <a:ext cx="2664662" cy="475488"/>
           </a:xfrm>
           <a:prstGeom prst="rect">
@@ -12802,7 +12870,9 @@
           <a:ln/>
         </p:spPr>
         <p:txBody>
-          <a:bodyPr wrap="square" lIns="0" tIns="0" rIns="0" bIns="0" rtlCol="0" anchor="ctr"/>
+          <a:bodyPr wrap="square" lIns="0" tIns="0" rIns="0" bIns="0" rtlCol="0" anchor="ctr">
+            <a:normAutofit/>
+          </a:bodyPr>
           <a:lstStyle/>
           <a:p>
             <a:pPr indent="0" marL="0">
@@ -12834,7 +12904,7 @@
         </p:nvSpPr>
         <p:spPr>
           <a:xfrm>
-            <a:off x="731520" y="3438144"/>
+            <a:off x="795528" y="3438144"/>
             <a:ext cx="4934560" cy="0"/>
           </a:xfrm>
           <a:prstGeom prst="line">
@@ -12857,7 +12927,7 @@
         </p:nvSpPr>
         <p:spPr>
           <a:xfrm>
-            <a:off x="731520" y="3438144"/>
+            <a:off x="795528" y="3438144"/>
             <a:ext cx="2269897" cy="475488"/>
           </a:xfrm>
           <a:prstGeom prst="rect">
@@ -12867,7 +12937,9 @@
           <a:ln/>
         </p:spPr>
         <p:txBody>
-          <a:bodyPr wrap="square" lIns="0" tIns="0" rIns="0" bIns="0" rtlCol="0" anchor="ctr"/>
+          <a:bodyPr wrap="square" lIns="0" tIns="0" rIns="0" bIns="0" rtlCol="0" anchor="ctr">
+            <a:normAutofit/>
+          </a:bodyPr>
           <a:lstStyle/>
           <a:p>
             <a:pPr indent="0" marL="0">
@@ -12899,7 +12971,7 @@
         </p:nvSpPr>
         <p:spPr>
           <a:xfrm>
-            <a:off x="3001417" y="3438144"/>
+            <a:off x="3065425" y="3438144"/>
             <a:ext cx="2664662" cy="475488"/>
           </a:xfrm>
           <a:prstGeom prst="rect">
@@ -12909,7 +12981,9 @@
           <a:ln/>
         </p:spPr>
         <p:txBody>
-          <a:bodyPr wrap="square" lIns="0" tIns="0" rIns="0" bIns="0" rtlCol="0" anchor="ctr"/>
+          <a:bodyPr wrap="square" lIns="0" tIns="0" rIns="0" bIns="0" rtlCol="0" anchor="ctr">
+            <a:normAutofit/>
+          </a:bodyPr>
           <a:lstStyle/>
           <a:p>
             <a:pPr indent="0" marL="0">
@@ -12941,7 +13015,7 @@
         </p:nvSpPr>
         <p:spPr>
           <a:xfrm>
-            <a:off x="731520" y="3913632"/>
+            <a:off x="795528" y="3913632"/>
             <a:ext cx="4934560" cy="0"/>
           </a:xfrm>
           <a:prstGeom prst="line">
@@ -12964,7 +13038,7 @@
         </p:nvSpPr>
         <p:spPr>
           <a:xfrm>
-            <a:off x="731520" y="3913632"/>
+            <a:off x="795528" y="3913632"/>
             <a:ext cx="2269897" cy="475488"/>
           </a:xfrm>
           <a:prstGeom prst="rect">
@@ -12974,7 +13048,9 @@
           <a:ln/>
         </p:spPr>
         <p:txBody>
-          <a:bodyPr wrap="square" lIns="0" tIns="0" rIns="0" bIns="0" rtlCol="0" anchor="ctr"/>
+          <a:bodyPr wrap="square" lIns="0" tIns="0" rIns="0" bIns="0" rtlCol="0" anchor="ctr">
+            <a:normAutofit/>
+          </a:bodyPr>
           <a:lstStyle/>
           <a:p>
             <a:pPr indent="0" marL="0">
@@ -13006,7 +13082,7 @@
         </p:nvSpPr>
         <p:spPr>
           <a:xfrm>
-            <a:off x="3001417" y="3913632"/>
+            <a:off x="3065425" y="3913632"/>
             <a:ext cx="2664662" cy="475488"/>
           </a:xfrm>
           <a:prstGeom prst="rect">
@@ -13016,7 +13092,9 @@
           <a:ln/>
         </p:spPr>
         <p:txBody>
-          <a:bodyPr wrap="square" lIns="0" tIns="0" rIns="0" bIns="0" rtlCol="0" anchor="ctr"/>
+          <a:bodyPr wrap="square" lIns="0" tIns="0" rIns="0" bIns="0" rtlCol="0" anchor="ctr">
+            <a:normAutofit/>
+          </a:bodyPr>
           <a:lstStyle/>
           <a:p>
             <a:pPr indent="0" marL="0">
@@ -13048,7 +13126,7 @@
         </p:nvSpPr>
         <p:spPr>
           <a:xfrm>
-            <a:off x="731520" y="4389120"/>
+            <a:off x="795528" y="4389120"/>
             <a:ext cx="4934560" cy="0"/>
           </a:xfrm>
           <a:prstGeom prst="line">
@@ -13071,7 +13149,7 @@
         </p:nvSpPr>
         <p:spPr>
           <a:xfrm>
-            <a:off x="731520" y="4389120"/>
+            <a:off x="795528" y="4389120"/>
             <a:ext cx="2269897" cy="475488"/>
           </a:xfrm>
           <a:prstGeom prst="rect">
@@ -13081,7 +13159,9 @@
           <a:ln/>
         </p:spPr>
         <p:txBody>
-          <a:bodyPr wrap="square" lIns="0" tIns="0" rIns="0" bIns="0" rtlCol="0" anchor="ctr"/>
+          <a:bodyPr wrap="square" lIns="0" tIns="0" rIns="0" bIns="0" rtlCol="0" anchor="ctr">
+            <a:normAutofit/>
+          </a:bodyPr>
           <a:lstStyle/>
           <a:p>
             <a:pPr indent="0" marL="0">
@@ -13113,7 +13193,7 @@
         </p:nvSpPr>
         <p:spPr>
           <a:xfrm>
-            <a:off x="3001417" y="4389120"/>
+            <a:off x="3065425" y="4389120"/>
             <a:ext cx="2664662" cy="475488"/>
           </a:xfrm>
           <a:prstGeom prst="rect">
@@ -13123,7 +13203,9 @@
           <a:ln/>
         </p:spPr>
         <p:txBody>
-          <a:bodyPr wrap="square" lIns="0" tIns="0" rIns="0" bIns="0" rtlCol="0" anchor="ctr"/>
+          <a:bodyPr wrap="square" lIns="0" tIns="0" rIns="0" bIns="0" rtlCol="0" anchor="ctr">
+            <a:normAutofit/>
+          </a:bodyPr>
           <a:lstStyle/>
           <a:p>
             <a:pPr indent="0" marL="0">
@@ -13155,7 +13237,7 @@
         </p:nvSpPr>
         <p:spPr>
           <a:xfrm>
-            <a:off x="731520" y="4864608"/>
+            <a:off x="795528" y="4864608"/>
             <a:ext cx="4934560" cy="0"/>
           </a:xfrm>
           <a:prstGeom prst="line">
@@ -13178,7 +13260,7 @@
         </p:nvSpPr>
         <p:spPr>
           <a:xfrm>
-            <a:off x="731520" y="4864608"/>
+            <a:off x="795528" y="4864608"/>
             <a:ext cx="2269897" cy="475488"/>
           </a:xfrm>
           <a:prstGeom prst="rect">
@@ -13188,7 +13270,9 @@
           <a:ln/>
         </p:spPr>
         <p:txBody>
-          <a:bodyPr wrap="square" lIns="0" tIns="0" rIns="0" bIns="0" rtlCol="0" anchor="ctr"/>
+          <a:bodyPr wrap="square" lIns="0" tIns="0" rIns="0" bIns="0" rtlCol="0" anchor="ctr">
+            <a:normAutofit/>
+          </a:bodyPr>
           <a:lstStyle/>
           <a:p>
             <a:pPr indent="0" marL="0">
@@ -13220,7 +13304,7 @@
         </p:nvSpPr>
         <p:spPr>
           <a:xfrm>
-            <a:off x="3001417" y="4864608"/>
+            <a:off x="3065425" y="4864608"/>
             <a:ext cx="2664662" cy="475488"/>
           </a:xfrm>
           <a:prstGeom prst="rect">
@@ -13230,7 +13314,9 @@
           <a:ln/>
         </p:spPr>
         <p:txBody>
-          <a:bodyPr wrap="square" lIns="0" tIns="0" rIns="0" bIns="0" rtlCol="0" anchor="ctr"/>
+          <a:bodyPr wrap="square" lIns="0" tIns="0" rIns="0" bIns="0" rtlCol="0" anchor="ctr">
+            <a:normAutofit/>
+          </a:bodyPr>
           <a:lstStyle/>
           <a:p>
             <a:pPr indent="0" marL="0">
@@ -13262,7 +13348,7 @@
         </p:nvSpPr>
         <p:spPr>
           <a:xfrm>
-            <a:off x="6169000" y="1417320"/>
+            <a:off x="6233008" y="1417320"/>
             <a:ext cx="5391760" cy="4389120"/>
           </a:xfrm>
           <a:prstGeom prst="roundRect">
@@ -13289,7 +13375,7 @@
         </p:nvSpPr>
         <p:spPr>
           <a:xfrm>
-            <a:off x="6397600" y="1618488"/>
+            <a:off x="6461608" y="1618488"/>
             <a:ext cx="4934560" cy="320040"/>
           </a:xfrm>
           <a:prstGeom prst="rect">
@@ -13335,7 +13421,7 @@
           </p:nvPr>
         </p:nvGraphicFramePr>
         <p:xfrm>
-          <a:off x="6397600" y="2057400"/>
+          <a:off x="6461608" y="2057400"/>
           <a:ext cx="4934560" cy="914400"/>
         </p:xfrm>
         <a:graphic>
@@ -14842,7 +14928,7 @@
         </p:nvSpPr>
         <p:spPr>
           <a:xfrm>
-            <a:off x="6397600" y="4069080"/>
+            <a:off x="6461608" y="4069080"/>
             <a:ext cx="4934560" cy="1463040"/>
           </a:xfrm>
           <a:prstGeom prst="roundRect">
@@ -14864,7 +14950,7 @@
         </p:nvSpPr>
         <p:spPr>
           <a:xfrm>
-            <a:off x="6397600" y="4123944"/>
+            <a:off x="6461608" y="4123944"/>
             <a:ext cx="36576" cy="1353312"/>
           </a:xfrm>
           <a:prstGeom prst="rect">
@@ -14884,7 +14970,7 @@
         </p:nvSpPr>
         <p:spPr>
           <a:xfrm>
-            <a:off x="6543904" y="4160520"/>
+            <a:off x="6607912" y="4160520"/>
             <a:ext cx="4678528" cy="201168"/>
           </a:xfrm>
           <a:prstGeom prst="rect">
@@ -14923,7 +15009,7 @@
         </p:nvSpPr>
         <p:spPr>
           <a:xfrm>
-            <a:off x="6543904" y="4361688"/>
+            <a:off x="6607912" y="4361688"/>
             <a:ext cx="4678528" cy="1133856"/>
           </a:xfrm>
           <a:prstGeom prst="rect">
@@ -14965,7 +15051,7 @@
         </p:nvSpPr>
         <p:spPr>
           <a:xfrm>
-            <a:off x="502920" y="6382512"/>
+            <a:off x="566928" y="6382512"/>
             <a:ext cx="7315200" cy="219456"/>
           </a:xfrm>
           <a:prstGeom prst="rect">
@@ -15004,7 +15090,7 @@
         </p:nvSpPr>
         <p:spPr>
           <a:xfrm>
-            <a:off x="10774375" y="6382512"/>
+            <a:off x="10710367" y="6382512"/>
             <a:ext cx="914400" cy="219456"/>
           </a:xfrm>
           <a:prstGeom prst="rect">

--- a/docs/test/stress/e2e-outputs/income_overflow_pr11.pptx
+++ b/docs/test/stress/e2e-outputs/income_overflow_pr11.pptx
@@ -2285,10 +2285,15 @@
           <a:ln/>
         </p:spPr>
         <p:txBody>
-          <a:bodyPr wrap="square" lIns="0" tIns="0" rIns="0" bIns="0" rtlCol="0" anchor="ctr"/>
+          <a:bodyPr wrap="square" lIns="0" tIns="0" rIns="0" bIns="0" rtlCol="0" anchor="ctr">
+            <a:normAutofit/>
+          </a:bodyPr>
           <a:lstStyle/>
           <a:p>
             <a:pPr algn="l" indent="0" marL="0">
+              <a:lnSpc>
+                <a:spcPct val="100000"/>
+              </a:lnSpc>
               <a:buNone/>
             </a:pPr>
             <a:r>
@@ -7430,7 +7435,7 @@
               <a:buNone/>
             </a:pPr>
             <a:r>
-              <a:rPr lang="en-US" sz="850" dirty="0">
+              <a:rPr lang="en-US" sz="950" dirty="0">
                 <a:solidFill>
                   <a:srgbClr val="718096"/>
                 </a:solidFill>
@@ -7438,9 +7443,9 @@
                 <a:ea typeface="Pretendard" pitchFamily="34" charset="-122"/>
                 <a:cs typeface="Pretendard" pitchFamily="34" charset="-120"/>
               </a:rPr>
-              <a:t>연 수익률(Cap Rate)</a:t>
-            </a:r>
-            <a:endParaRPr lang="en-US" sz="850" dirty="0"/>
+              <a:t>연 수익률</a:t>
+            </a:r>
+            <a:endParaRPr lang="en-US" sz="950" dirty="0"/>
           </a:p>
         </p:txBody>
       </p:sp>
@@ -7542,7 +7547,7 @@
               <a:buNone/>
             </a:pPr>
             <a:r>
-              <a:rPr lang="en-US" sz="950" dirty="0">
+              <a:rPr lang="en-US" sz="850" dirty="0">
                 <a:solidFill>
                   <a:srgbClr val="718096"/>
                 </a:solidFill>
@@ -7550,9 +7555,9 @@
                 <a:ea typeface="Pretendard" pitchFamily="34" charset="-122"/>
                 <a:cs typeface="Pretendard" pitchFamily="34" charset="-120"/>
               </a:rPr>
-              <a:t>실투자금</a:t>
-            </a:r>
-            <a:endParaRPr lang="en-US" sz="950" dirty="0"/>
+              <a:t>실투자금 (취득비용 포함)</a:t>
+            </a:r>
+            <a:endParaRPr lang="en-US" sz="850" dirty="0"/>
           </a:p>
         </p:txBody>
       </p:sp>
@@ -7974,7 +7979,9 @@
           <a:ln/>
         </p:spPr>
         <p:txBody>
-          <a:bodyPr wrap="square" lIns="0" tIns="0" rIns="0" bIns="0" rtlCol="0" anchor="ctr"/>
+          <a:bodyPr wrap="square" lIns="0" tIns="0" rIns="0" bIns="0" rtlCol="0" anchor="ctr">
+            <a:normAutofit/>
+          </a:bodyPr>
           <a:lstStyle/>
           <a:p>
             <a:pPr indent="0" marL="0">
@@ -8106,7 +8113,9 @@
           <a:ln/>
         </p:spPr>
         <p:txBody>
-          <a:bodyPr wrap="square" lIns="0" tIns="0" rIns="0" bIns="0" rtlCol="0" anchor="ctr"/>
+          <a:bodyPr wrap="square" lIns="0" tIns="0" rIns="0" bIns="0" rtlCol="0" anchor="ctr">
+            <a:normAutofit/>
+          </a:bodyPr>
           <a:lstStyle/>
           <a:p>
             <a:pPr indent="0" marL="0">
@@ -8121,7 +8130,7 @@
                 <a:ea typeface="Pretendard" pitchFamily="34" charset="-122"/>
                 <a:cs typeface="Pretendard" pitchFamily="34" charset="-120"/>
               </a:rPr>
-              <a:t>자산 규모: 해당 권역 소재 단독 빌딩 매입 기회</a:t>
+              <a:t>안정적 현금흐름: 전 층 임차인 운영 기반의 안정적 월 임대수익 창출</a:t>
             </a:r>
             <a:endParaRPr lang="en-US" sz="1150" dirty="0"/>
           </a:p>
@@ -8238,7 +8247,9 @@
           <a:ln/>
         </p:spPr>
         <p:txBody>
-          <a:bodyPr wrap="square" lIns="0" tIns="0" rIns="0" bIns="0" rtlCol="0" anchor="ctr"/>
+          <a:bodyPr wrap="square" lIns="0" tIns="0" rIns="0" bIns="0" rtlCol="0" anchor="ctr">
+            <a:normAutofit/>
+          </a:bodyPr>
           <a:lstStyle/>
           <a:p>
             <a:pPr indent="0" marL="0">
@@ -8253,7 +8264,7 @@
                 <a:ea typeface="Pretendard" pitchFamily="34" charset="-122"/>
                 <a:cs typeface="Pretendard" pitchFamily="34" charset="-120"/>
               </a:rPr>
-              <a:t>수익 안정성: 안정적 임대수익 기반 투자 매물</a:t>
+              <a:t>자산 규모: 해당 권역 소재 단독 빌딩 매입 기회</a:t>
             </a:r>
             <a:endParaRPr lang="en-US" sz="1150" dirty="0"/>
           </a:p>
@@ -8534,7 +8545,183 @@
       </p:pic>
       <p:sp>
         <p:nvSpPr>
-          <p:cNvPr id="7" name="Text 4"/>
+          <p:cNvPr id="7" name="Shape 4"/>
+          <p:cNvSpPr/>
+          <p:nvPr/>
+        </p:nvSpPr>
+        <p:spPr>
+          <a:xfrm>
+            <a:off x="704088" y="5184648"/>
+            <a:ext cx="3200400" cy="320040"/>
+          </a:xfrm>
+          <a:prstGeom prst="roundRect">
+            <a:avLst>
+              <a:gd name="adj" fmla="val 11429"/>
+            </a:avLst>
+          </a:prstGeom>
+          <a:solidFill>
+            <a:srgbClr val="FFFFFF">
+              <a:alpha val="90000"/>
+            </a:srgbClr>
+          </a:solidFill>
+          <a:ln w="10160">
+            <a:solidFill>
+              <a:srgbClr val="CBD5E1"/>
+            </a:solidFill>
+            <a:prstDash val="solid"/>
+          </a:ln>
+        </p:spPr>
+      </p:sp>
+      <p:sp>
+        <p:nvSpPr>
+          <p:cNvPr id="8" name="Text 5"/>
+          <p:cNvSpPr/>
+          <p:nvPr/>
+        </p:nvSpPr>
+        <p:spPr>
+          <a:xfrm>
+            <a:off x="749808" y="5202936"/>
+            <a:ext cx="3108960" cy="274320"/>
+          </a:xfrm>
+          <a:prstGeom prst="rect">
+            <a:avLst/>
+          </a:prstGeom>
+          <a:noFill/>
+          <a:ln/>
+        </p:spPr>
+        <p:txBody>
+          <a:bodyPr wrap="square" rtlCol="0" anchor="ctr"/>
+          <a:lstStyle/>
+          <a:p>
+            <a:pPr indent="0" marL="0">
+              <a:buNone/>
+            </a:pPr>
+            <a:r>
+              <a:rPr lang="en-US" sz="900" b="1" dirty="0">
+                <a:solidFill>
+                  <a:srgbClr val="B8860B"/>
+                </a:solidFill>
+                <a:latin typeface="Pretendard" pitchFamily="34" charset="0"/>
+                <a:ea typeface="Pretendard" pitchFamily="34" charset="-122"/>
+                <a:cs typeface="Pretendard" pitchFamily="34" charset="-120"/>
+              </a:rPr>
+              <a:t>★ </a:t>
+            </a:r>
+            <a:pPr indent="0" marL="0">
+              <a:buNone/>
+            </a:pPr>
+            <a:r>
+              <a:rPr lang="en-US" sz="850" b="1" dirty="0">
+                <a:solidFill>
+                  <a:srgbClr val="1E293B"/>
+                </a:solidFill>
+                <a:latin typeface="Pretendard" pitchFamily="34" charset="0"/>
+                <a:ea typeface="Pretendard" pitchFamily="34" charset="-122"/>
+                <a:cs typeface="Pretendard" pitchFamily="34" charset="-120"/>
+              </a:rPr>
+              <a:t>대상 자산(본건)   </a:t>
+            </a:r>
+            <a:pPr indent="0" marL="0">
+              <a:buNone/>
+            </a:pPr>
+            <a:r>
+              <a:rPr lang="en-US" sz="1000" b="1" dirty="0">
+                <a:solidFill>
+                  <a:srgbClr val="B8860B"/>
+                </a:solidFill>
+                <a:latin typeface="Pretendard" pitchFamily="34" charset="0"/>
+                <a:ea typeface="Pretendard" pitchFamily="34" charset="-122"/>
+                <a:cs typeface="Pretendard" pitchFamily="34" charset="-120"/>
+              </a:rPr>
+              <a:t>╌ </a:t>
+            </a:r>
+            <a:pPr indent="0" marL="0">
+              <a:buNone/>
+            </a:pPr>
+            <a:r>
+              <a:rPr lang="en-US" sz="850" dirty="0">
+                <a:solidFill>
+                  <a:srgbClr val="475569"/>
+                </a:solidFill>
+                <a:latin typeface="Pretendard" pitchFamily="34" charset="0"/>
+                <a:ea typeface="Pretendard" pitchFamily="34" charset="-122"/>
+                <a:cs typeface="Pretendard" pitchFamily="34" charset="-120"/>
+              </a:rPr>
+              <a:t>도보 5분 반경 (약 400m)</a:t>
+            </a:r>
+            <a:endParaRPr lang="en-US" sz="900" dirty="0"/>
+          </a:p>
+        </p:txBody>
+      </p:sp>
+      <p:sp>
+        <p:nvSpPr>
+          <p:cNvPr id="9" name="Shape 6"/>
+          <p:cNvSpPr/>
+          <p:nvPr/>
+        </p:nvSpPr>
+        <p:spPr>
+          <a:xfrm>
+            <a:off x="2715768" y="3739896"/>
+            <a:ext cx="822960" cy="219456"/>
+          </a:xfrm>
+          <a:prstGeom prst="roundRect">
+            <a:avLst>
+              <a:gd name="adj" fmla="val 16667"/>
+            </a:avLst>
+          </a:prstGeom>
+          <a:solidFill>
+            <a:srgbClr val="132A3A"/>
+          </a:solidFill>
+          <a:ln w="12700">
+            <a:solidFill>
+              <a:srgbClr val="FFFFFF"/>
+            </a:solidFill>
+            <a:prstDash val="solid"/>
+          </a:ln>
+        </p:spPr>
+      </p:sp>
+      <p:sp>
+        <p:nvSpPr>
+          <p:cNvPr id="10" name="Text 7"/>
+          <p:cNvSpPr/>
+          <p:nvPr/>
+        </p:nvSpPr>
+        <p:spPr>
+          <a:xfrm>
+            <a:off x="2715768" y="3739896"/>
+            <a:ext cx="822960" cy="219456"/>
+          </a:xfrm>
+          <a:prstGeom prst="rect">
+            <a:avLst/>
+          </a:prstGeom>
+          <a:noFill/>
+          <a:ln/>
+        </p:spPr>
+        <p:txBody>
+          <a:bodyPr wrap="square" rtlCol="0" anchor="ctr"/>
+          <a:lstStyle/>
+          <a:p>
+            <a:pPr algn="ctr" indent="0" marL="0">
+              <a:buNone/>
+            </a:pPr>
+            <a:r>
+              <a:rPr lang="en-US" sz="900" b="1" dirty="0">
+                <a:solidFill>
+                  <a:srgbClr val="FFFFFF"/>
+                </a:solidFill>
+                <a:latin typeface="Pretendard" pitchFamily="34" charset="0"/>
+                <a:ea typeface="Pretendard" pitchFamily="34" charset="-122"/>
+                <a:cs typeface="Pretendard" pitchFamily="34" charset="-120"/>
+              </a:rPr>
+              <a:t>★ 본건</a:t>
+            </a:r>
+            <a:endParaRPr lang="en-US" sz="900" dirty="0"/>
+          </a:p>
+        </p:txBody>
+      </p:sp>
+      <p:sp>
+        <p:nvSpPr>
+          <p:cNvPr id="11" name="Text 8"/>
           <p:cNvSpPr/>
           <p:nvPr/>
         </p:nvSpPr>
@@ -8578,7 +8765,7 @@
       </p:sp>
       <p:sp>
         <p:nvSpPr>
-          <p:cNvPr id="8" name="Text 5"/>
+          <p:cNvPr id="12" name="Text 9"/>
           <p:cNvSpPr/>
           <p:nvPr/>
         </p:nvSpPr>
@@ -8622,7 +8809,7 @@
       </p:sp>
       <p:sp>
         <p:nvSpPr>
-          <p:cNvPr id="9" name="Shape 6"/>
+          <p:cNvPr id="13" name="Shape 10"/>
           <p:cNvSpPr/>
           <p:nvPr/>
         </p:nvSpPr>
@@ -8645,7 +8832,7 @@
       </p:sp>
       <p:sp>
         <p:nvSpPr>
-          <p:cNvPr id="10" name="Text 7"/>
+          <p:cNvPr id="14" name="Text 11"/>
           <p:cNvSpPr/>
           <p:nvPr/>
         </p:nvSpPr>
@@ -8689,7 +8876,7 @@
       </p:sp>
       <p:sp>
         <p:nvSpPr>
-          <p:cNvPr id="11" name="Text 8"/>
+          <p:cNvPr id="15" name="Text 12"/>
           <p:cNvSpPr/>
           <p:nvPr/>
         </p:nvSpPr>
@@ -8733,7 +8920,7 @@
       </p:sp>
       <p:sp>
         <p:nvSpPr>
-          <p:cNvPr id="12" name="Shape 9"/>
+          <p:cNvPr id="16" name="Shape 13"/>
           <p:cNvSpPr/>
           <p:nvPr/>
         </p:nvSpPr>
@@ -8755,7 +8942,7 @@
       </p:sp>
       <p:sp>
         <p:nvSpPr>
-          <p:cNvPr id="13" name="Shape 10"/>
+          <p:cNvPr id="17" name="Shape 14"/>
           <p:cNvSpPr/>
           <p:nvPr/>
         </p:nvSpPr>
@@ -8775,7 +8962,7 @@
       </p:sp>
       <p:sp>
         <p:nvSpPr>
-          <p:cNvPr id="14" name="Text 11"/>
+          <p:cNvPr id="18" name="Text 15"/>
           <p:cNvSpPr/>
           <p:nvPr/>
         </p:nvSpPr>
@@ -8814,7 +9001,7 @@
       </p:sp>
       <p:sp>
         <p:nvSpPr>
-          <p:cNvPr id="15" name="Text 12"/>
+          <p:cNvPr id="19" name="Text 16"/>
           <p:cNvSpPr/>
           <p:nvPr/>
         </p:nvSpPr>
@@ -8857,7 +9044,7 @@
       </p:sp>
       <p:sp>
         <p:nvSpPr>
-          <p:cNvPr id="16" name="Text 13"/>
+          <p:cNvPr id="20" name="Text 17"/>
           <p:cNvSpPr/>
           <p:nvPr/>
         </p:nvSpPr>
@@ -8896,7 +9083,7 @@
       </p:sp>
       <p:sp>
         <p:nvSpPr>
-          <p:cNvPr id="17" name="Text 14"/>
+          <p:cNvPr id="21" name="Text 18"/>
           <p:cNvSpPr/>
           <p:nvPr/>
         </p:nvSpPr>
